--- a/docs/第1次阶段性评审_第九组.pptx
+++ b/docs/第1次阶段性评审_第九组.pptx
@@ -21,42 +21,49 @@
     <p:sldId id="262" r:id="rId16"/>
     <p:sldId id="263" r:id="rId17"/>
     <p:sldId id="279" r:id="rId18"/>
-    <p:sldId id="265" r:id="rId19"/>
-    <p:sldId id="281" r:id="rId20"/>
-    <p:sldId id="283" r:id="rId21"/>
-    <p:sldId id="266" r:id="rId22"/>
-    <p:sldId id="272" r:id="rId23"/>
+    <p:sldId id="285" r:id="rId19"/>
+    <p:sldId id="286" r:id="rId20"/>
+    <p:sldId id="284" r:id="rId21"/>
+    <p:sldId id="287" r:id="rId22"/>
+    <p:sldId id="288" r:id="rId23"/>
+    <p:sldId id="289" r:id="rId24"/>
+    <p:sldId id="290" r:id="rId25"/>
+    <p:sldId id="291" r:id="rId26"/>
+    <p:sldId id="281" r:id="rId27"/>
+    <p:sldId id="283" r:id="rId28"/>
+    <p:sldId id="266" r:id="rId29"/>
+    <p:sldId id="272" r:id="rId30"/>
   </p:sldIdLst>
   <p:sldSz cx="12191365" cy="6858000" type="screen4x3"/>
   <p:notesSz cx="6858000" cy="9144000"/>
   <p:embeddedFontLst>
     <p:embeddedFont>
       <p:font typeface="微软雅黑" panose="020B0503020204020204" charset="-122"/>
-      <p:regular r:id="rId27"/>
-      <p:bold r:id="rId28"/>
+      <p:regular r:id="rId34"/>
+      <p:bold r:id="rId35"/>
     </p:embeddedFont>
     <p:embeddedFont>
       <p:font typeface="仿宋" panose="02010609060101010101" charset="-122"/>
-      <p:regular r:id="rId29"/>
+      <p:regular r:id="rId36"/>
     </p:embeddedFont>
     <p:embeddedFont>
       <p:font typeface="方正仿宋_GB2312" panose="02000000000000000000" charset="-122"/>
-      <p:regular r:id="rId30"/>
+      <p:regular r:id="rId37"/>
+    </p:embeddedFont>
+    <p:embeddedFont>
+      <p:font typeface="Calibri" panose="020F0502020204030204" charset="0"/>
+      <p:regular r:id="rId38"/>
+      <p:bold r:id="rId39"/>
+      <p:italic r:id="rId40"/>
+      <p:boldItalic r:id="rId41"/>
     </p:embeddedFont>
     <p:embeddedFont>
       <p:font typeface="黑体" panose="02010609060101010101" charset="-122"/>
-      <p:regular r:id="rId31"/>
+      <p:regular r:id="rId42"/>
     </p:embeddedFont>
     <p:embeddedFont>
       <p:font typeface="Impact" panose="020B0806030902050204" pitchFamily="34" charset="0"/>
-      <p:regular r:id="rId32"/>
-    </p:embeddedFont>
-    <p:embeddedFont>
-      <p:font typeface="Calibri" panose="020F0502020204030204" charset="0"/>
-      <p:regular r:id="rId33"/>
-      <p:bold r:id="rId34"/>
-      <p:italic r:id="rId35"/>
-      <p:boldItalic r:id="rId36"/>
+      <p:regular r:id="rId43"/>
     </p:embeddedFont>
   </p:embeddedFontLst>
   <p:defaultTextStyle>
@@ -15767,29 +15774,173 @@
           </a:p>
         </p:txBody>
       </p:sp>
-      <p:sp>
-        <p:nvSpPr>
-          <p:cNvPr id="19" name="Rounded Rectangle 30"/>
+      <p:pic>
+        <p:nvPicPr>
+          <p:cNvPr id="13" name="图片 12"/>
+          <p:cNvPicPr>
+            <a:picLocks noChangeAspect="1"/>
+          </p:cNvPicPr>
+          <p:nvPr/>
+        </p:nvPicPr>
+        <p:blipFill>
+          <a:blip r:embed="rId1"/>
+          <a:srcRect l="27322" r="28033"/>
+          <a:stretch>
+            <a:fillRect/>
+          </a:stretch>
+        </p:blipFill>
+        <p:spPr>
+          <a:xfrm>
+            <a:off x="7139940" y="1339850"/>
+            <a:ext cx="4222115" cy="4843780"/>
+          </a:xfrm>
+          <a:prstGeom prst="rect">
+            <a:avLst/>
+          </a:prstGeom>
+        </p:spPr>
+      </p:pic>
+      <p:sp>
+        <p:nvSpPr>
+          <p:cNvPr id="16" name="文本框 15"/>
+          <p:cNvSpPr txBox="1"/>
+          <p:nvPr/>
+        </p:nvSpPr>
+        <p:spPr>
+          <a:xfrm>
+            <a:off x="725805" y="3072765"/>
+            <a:ext cx="5506085" cy="3230245"/>
+          </a:xfrm>
+          <a:prstGeom prst="rect">
+            <a:avLst/>
+          </a:prstGeom>
+          <a:noFill/>
+        </p:spPr>
+        <p:txBody>
+          <a:bodyPr wrap="square" rtlCol="0">
+            <a:spAutoFit/>
+          </a:bodyPr>
+          <a:p>
+            <a:r>
+              <a:rPr lang="en-US" altLang="zh-CN" sz="2800"/>
+              <a:t>1. </a:t>
+            </a:r>
+            <a:r>
+              <a:rPr lang="zh-CN" altLang="en-US" sz="2800" b="1"/>
+              <a:t>商品摘要模块：</a:t>
+            </a:r>
+            <a:r>
+              <a:rPr lang="zh-CN" altLang="en-US" sz="2400"/>
+              <a:t>展示当前可购买商品图片、商品名称、商品价格</a:t>
+            </a:r>
+            <a:r>
+              <a:rPr lang="en-US" altLang="zh-CN" sz="2400"/>
+              <a:t>.</a:t>
+            </a:r>
+            <a:endParaRPr lang="zh-CN" altLang="en-US" sz="2400"/>
+          </a:p>
+          <a:p>
+            <a:r>
+              <a:rPr lang="en-US" altLang="zh-CN" sz="2800"/>
+              <a:t>2</a:t>
+            </a:r>
+            <a:r>
+              <a:rPr lang="zh-CN" altLang="en-US" sz="2800"/>
+              <a:t>. </a:t>
+            </a:r>
+            <a:r>
+              <a:rPr lang="zh-CN" altLang="en-US" sz="2800" b="1"/>
+              <a:t>表单输入模块</a:t>
+            </a:r>
+            <a:r>
+              <a:rPr lang="zh-CN" altLang="en-US" sz="2800"/>
+              <a:t>：</a:t>
+            </a:r>
+            <a:r>
+              <a:rPr lang="zh-CN" altLang="en-US" sz="2400"/>
+              <a:t>包含姓名、联系电话两个必填输入框；校验失败展示红色错误文案。</a:t>
+            </a:r>
+            <a:endParaRPr lang="zh-CN" altLang="en-US" sz="2400"/>
+          </a:p>
+          <a:p>
+            <a:r>
+              <a:rPr lang="en-US" altLang="zh-CN" sz="2800"/>
+              <a:t>3</a:t>
+            </a:r>
+            <a:r>
+              <a:rPr lang="zh-CN" altLang="en-US" sz="2800"/>
+              <a:t>. </a:t>
+            </a:r>
+            <a:r>
+              <a:rPr lang="zh-CN" altLang="en-US" sz="2800" b="1"/>
+              <a:t>底部提交按钮模块</a:t>
+            </a:r>
+            <a:r>
+              <a:rPr lang="zh-CN" altLang="en-US" sz="2800"/>
+              <a:t>：</a:t>
+            </a:r>
+            <a:r>
+              <a:rPr lang="zh-CN" altLang="en-US" sz="2400"/>
+              <a:t>固定在页面底部，提交过程设置按钮禁用状态，防止用户重复点击重复提交。</a:t>
+            </a:r>
+            <a:endParaRPr lang="zh-CN" altLang="en-US" sz="2400"/>
+          </a:p>
+        </p:txBody>
+      </p:sp>
+      <p:sp>
+        <p:nvSpPr>
+          <p:cNvPr id="20" name="文本框 19"/>
+          <p:cNvSpPr txBox="1"/>
+          <p:nvPr/>
+        </p:nvSpPr>
+        <p:spPr>
+          <a:xfrm>
+            <a:off x="502920" y="935355"/>
+            <a:ext cx="3011170" cy="1129030"/>
+          </a:xfrm>
+          <a:prstGeom prst="rect">
+            <a:avLst/>
+          </a:prstGeom>
+          <a:noFill/>
+        </p:spPr>
+        <p:txBody>
+          <a:bodyPr wrap="square" rtlCol="0">
+            <a:noAutofit/>
+          </a:bodyPr>
+          <a:p>
+            <a:r>
+              <a:rPr lang="zh-CN" altLang="en-US" sz="2800" b="1">
+                <a:latin typeface="黑体" panose="02010609060101010101" charset="-122"/>
+                <a:ea typeface="黑体" panose="02010609060101010101" charset="-122"/>
+              </a:rPr>
+              <a:t>买家端</a:t>
+            </a:r>
+            <a:endParaRPr lang="zh-CN" altLang="en-US" sz="2800" b="1">
+              <a:latin typeface="黑体" panose="02010609060101010101" charset="-122"/>
+              <a:ea typeface="黑体" panose="02010609060101010101" charset="-122"/>
+            </a:endParaRPr>
+          </a:p>
+        </p:txBody>
+      </p:sp>
+      <p:sp>
+        <p:nvSpPr>
+          <p:cNvPr id="22" name="圆角矩形 21"/>
           <p:cNvSpPr/>
           <p:nvPr/>
         </p:nvSpPr>
         <p:spPr>
           <a:xfrm>
-            <a:off x="502920" y="1053465"/>
-            <a:ext cx="5971540" cy="507365"/>
+            <a:off x="725805" y="1530350"/>
+            <a:ext cx="5173345" cy="1525270"/>
           </a:xfrm>
           <a:prstGeom prst="roundRect">
             <a:avLst/>
           </a:prstGeom>
           <a:solidFill>
-            <a:srgbClr val="FFFFFF"/>
+            <a:schemeClr val="accent1">
+              <a:lumMod val="20000"/>
+              <a:lumOff val="80000"/>
+            </a:schemeClr>
           </a:solidFill>
-          <a:ln w="19050">
-            <a:solidFill>
-              <a:srgbClr val="B8860B"/>
-            </a:solidFill>
-          </a:ln>
-          <a:effectLst/>
         </p:spPr>
         <p:style>
           <a:lnRef idx="1">
@@ -15806,91 +15957,15 @@
           </a:fontRef>
         </p:style>
         <p:txBody>
-          <a:bodyPr rtlCol="0" anchor="ctr"/>
-          <a:lstStyle/>
-          <a:p>
-            <a:pPr algn="ctr"/>
-          </a:p>
-        </p:txBody>
-      </p:sp>
-      <p:sp>
-        <p:nvSpPr>
-          <p:cNvPr id="8" name="文本框 7"/>
-          <p:cNvSpPr txBox="1"/>
-          <p:nvPr/>
-        </p:nvSpPr>
-        <p:spPr>
-          <a:xfrm>
-            <a:off x="502920" y="1053465"/>
-            <a:ext cx="6383020" cy="605790"/>
-          </a:xfrm>
-          <a:prstGeom prst="rect">
-            <a:avLst/>
-          </a:prstGeom>
-          <a:noFill/>
-        </p:spPr>
-        <p:txBody>
-          <a:bodyPr wrap="square" rtlCol="0">
-            <a:noAutofit/>
-          </a:bodyPr>
-          <a:p>
-            <a:r>
-              <a:rPr lang="zh-CN" altLang="en-US" sz="2400">
-                <a:solidFill>
-                  <a:schemeClr val="tx2">
-                    <a:lumMod val="75000"/>
-                  </a:schemeClr>
-                </a:solidFill>
-              </a:rPr>
-              <a:t>技术上用 </a:t>
-            </a:r>
-            <a:r>
-              <a:rPr lang="en-US" altLang="zh-CN" sz="2400">
-                <a:solidFill>
-                  <a:schemeClr val="tx2">
-                    <a:lumMod val="75000"/>
-                  </a:schemeClr>
-                </a:solidFill>
-              </a:rPr>
-              <a:t>Vue 3 + Vite + Vue Router + Pinia</a:t>
-            </a:r>
-            <a:endParaRPr lang="en-US" altLang="zh-CN" sz="2400">
-              <a:solidFill>
-                <a:schemeClr val="tx2">
-                  <a:lumMod val="75000"/>
-                </a:schemeClr>
-              </a:solidFill>
-            </a:endParaRPr>
+          <a:bodyPr/>
+          <a:p>
+            <a:endParaRPr lang="zh-CN" altLang="en-US"/>
           </a:p>
         </p:txBody>
       </p:sp>
       <p:pic>
         <p:nvPicPr>
-          <p:cNvPr id="14" name="图片 13"/>
-          <p:cNvPicPr>
-            <a:picLocks noChangeAspect="1"/>
-          </p:cNvPicPr>
-          <p:nvPr/>
-        </p:nvPicPr>
-        <p:blipFill>
-          <a:blip r:embed="rId1"/>
-          <a:stretch>
-            <a:fillRect/>
-          </a:stretch>
-        </p:blipFill>
-        <p:spPr>
-          <a:xfrm>
-            <a:off x="424815" y="2819400"/>
-            <a:ext cx="5321300" cy="2855595"/>
-          </a:xfrm>
-          <a:prstGeom prst="rect">
-            <a:avLst/>
-          </a:prstGeom>
-        </p:spPr>
-      </p:pic>
-      <p:pic>
-        <p:nvPicPr>
-          <p:cNvPr id="15" name="图片 14"/>
+          <p:cNvPr id="21" name="图片 20"/>
           <p:cNvPicPr>
             <a:picLocks noChangeAspect="1"/>
           </p:cNvPicPr>
@@ -15904,144 +15979,14 @@
         </p:blipFill>
         <p:spPr>
           <a:xfrm>
-            <a:off x="6096635" y="2792095"/>
-            <a:ext cx="5589270" cy="3009900"/>
+            <a:off x="1024255" y="1530350"/>
+            <a:ext cx="4581525" cy="1504315"/>
           </a:xfrm>
           <a:prstGeom prst="rect">
             <a:avLst/>
           </a:prstGeom>
         </p:spPr>
       </p:pic>
-      <p:sp>
-        <p:nvSpPr>
-          <p:cNvPr id="17" name="Rounded Rectangle 14"/>
-          <p:cNvSpPr/>
-          <p:nvPr/>
-        </p:nvSpPr>
-        <p:spPr>
-          <a:xfrm>
-            <a:off x="424815" y="1987296"/>
-            <a:ext cx="1371600" cy="566928"/>
-          </a:xfrm>
-          <a:prstGeom prst="roundRect">
-            <a:avLst>
-              <a:gd name="adj" fmla="val 50000"/>
-            </a:avLst>
-          </a:prstGeom>
-          <a:solidFill>
-            <a:srgbClr val="DEEBF7"/>
-          </a:solidFill>
-          <a:ln w="19050">
-            <a:solidFill>
-              <a:srgbClr val="2E75B6"/>
-            </a:solidFill>
-          </a:ln>
-          <a:effectLst/>
-        </p:spPr>
-        <p:style>
-          <a:lnRef idx="1">
-            <a:schemeClr val="accent1"/>
-          </a:lnRef>
-          <a:fillRef idx="3">
-            <a:schemeClr val="accent1"/>
-          </a:fillRef>
-          <a:effectRef idx="2">
-            <a:schemeClr val="accent1"/>
-          </a:effectRef>
-          <a:fontRef idx="minor">
-            <a:schemeClr val="lt1"/>
-          </a:fontRef>
-        </p:style>
-        <p:txBody>
-          <a:bodyPr rtlCol="0" anchor="ctr"/>
-          <a:lstStyle/>
-          <a:p>
-            <a:pPr algn="ctr"/>
-            <a:r>
-              <a:rPr lang="zh-CN" altLang="en-US" sz="2400" b="1" i="0">
-                <a:solidFill>
-                  <a:srgbClr val="1F3864"/>
-                </a:solidFill>
-                <a:latin typeface="微软雅黑" panose="020B0503020204020204" charset="-122"/>
-                <a:ea typeface="微软雅黑" panose="020B0503020204020204" charset="-122"/>
-              </a:rPr>
-              <a:t>买家端</a:t>
-            </a:r>
-            <a:endParaRPr lang="zh-CN" altLang="en-US" sz="2400" b="1" i="0">
-              <a:solidFill>
-                <a:srgbClr val="1F3864"/>
-              </a:solidFill>
-              <a:latin typeface="微软雅黑" panose="020B0503020204020204" charset="-122"/>
-              <a:ea typeface="微软雅黑" panose="020B0503020204020204" charset="-122"/>
-            </a:endParaRPr>
-          </a:p>
-        </p:txBody>
-      </p:sp>
-      <p:sp>
-        <p:nvSpPr>
-          <p:cNvPr id="18" name="Rounded Rectangle 14"/>
-          <p:cNvSpPr/>
-          <p:nvPr/>
-        </p:nvSpPr>
-        <p:spPr>
-          <a:xfrm>
-            <a:off x="6002020" y="2026031"/>
-            <a:ext cx="1371600" cy="566928"/>
-          </a:xfrm>
-          <a:prstGeom prst="roundRect">
-            <a:avLst>
-              <a:gd name="adj" fmla="val 50000"/>
-            </a:avLst>
-          </a:prstGeom>
-          <a:solidFill>
-            <a:srgbClr val="DEEBF7"/>
-          </a:solidFill>
-          <a:ln w="19050">
-            <a:solidFill>
-              <a:srgbClr val="2E75B6"/>
-            </a:solidFill>
-          </a:ln>
-          <a:effectLst/>
-        </p:spPr>
-        <p:style>
-          <a:lnRef idx="1">
-            <a:schemeClr val="accent1"/>
-          </a:lnRef>
-          <a:fillRef idx="3">
-            <a:schemeClr val="accent1"/>
-          </a:fillRef>
-          <a:effectRef idx="2">
-            <a:schemeClr val="accent1"/>
-          </a:effectRef>
-          <a:fontRef idx="minor">
-            <a:schemeClr val="lt1"/>
-          </a:fontRef>
-        </p:style>
-        <p:txBody>
-          <a:bodyPr rtlCol="0" anchor="ctr"/>
-          <a:lstStyle/>
-          <a:p>
-            <a:pPr algn="ctr"/>
-            <a:r>
-              <a:rPr lang="zh-CN" altLang="en-US" sz="2400" b="1" i="0">
-                <a:solidFill>
-                  <a:srgbClr val="1F3864"/>
-                </a:solidFill>
-                <a:latin typeface="微软雅黑" panose="020B0503020204020204" charset="-122"/>
-                <a:ea typeface="微软雅黑" panose="020B0503020204020204" charset="-122"/>
-              </a:rPr>
-              <a:t>卖家端</a:t>
-            </a:r>
-            <a:endParaRPr lang="zh-CN" altLang="en-US" sz="2400" b="1" i="0">
-              <a:solidFill>
-                <a:srgbClr val="1F3864"/>
-              </a:solidFill>
-              <a:latin typeface="微软雅黑" panose="020B0503020204020204" charset="-122"/>
-              <a:ea typeface="微软雅黑" panose="020B0503020204020204" charset="-122"/>
-            </a:endParaRPr>
-          </a:p>
-        </p:txBody>
-      </p:sp>
     </p:spTree>
   </p:cSld>
   <p:clrMapOvr>
@@ -16230,7 +16175,7 @@
                 <a:latin typeface="微软雅黑" panose="020B0503020204020204" charset="-122"/>
                 <a:ea typeface="微软雅黑" panose="020B0503020204020204" charset="-122"/>
               </a:rPr>
-              <a:t>后端</a:t>
+              <a:t>前端</a:t>
             </a:r>
             <a:endParaRPr lang="zh-CN" sz="2600" b="1" i="0">
               <a:solidFill>
@@ -16549,56 +16494,14 @@
       </p:sp>
       <p:sp>
         <p:nvSpPr>
-          <p:cNvPr id="13" name="圆角矩形 12"/>
-          <p:cNvSpPr/>
-          <p:nvPr/>
-        </p:nvSpPr>
-        <p:spPr>
-          <a:xfrm>
-            <a:off x="1132205" y="1459230"/>
-            <a:ext cx="3566795" cy="1198880"/>
-          </a:xfrm>
-          <a:prstGeom prst="roundRect">
-            <a:avLst/>
-          </a:prstGeom>
-          <a:solidFill>
-            <a:schemeClr val="accent1">
-              <a:lumMod val="20000"/>
-              <a:lumOff val="80000"/>
-            </a:schemeClr>
-          </a:solidFill>
-        </p:spPr>
-        <p:style>
-          <a:lnRef idx="1">
-            <a:schemeClr val="accent1"/>
-          </a:lnRef>
-          <a:fillRef idx="3">
-            <a:schemeClr val="accent1"/>
-          </a:fillRef>
-          <a:effectRef idx="2">
-            <a:schemeClr val="accent1"/>
-          </a:effectRef>
-          <a:fontRef idx="minor">
-            <a:schemeClr val="lt1"/>
-          </a:fontRef>
-        </p:style>
-        <p:txBody>
-          <a:bodyPr/>
-          <a:p>
-            <a:endParaRPr lang="zh-CN" altLang="en-US"/>
-          </a:p>
-        </p:txBody>
-      </p:sp>
-      <p:sp>
-        <p:nvSpPr>
-          <p:cNvPr id="8" name="文本框 7"/>
+          <p:cNvPr id="16" name="文本框 15"/>
           <p:cNvSpPr txBox="1"/>
           <p:nvPr/>
         </p:nvSpPr>
         <p:spPr>
           <a:xfrm>
-            <a:off x="1132840" y="1467485"/>
-            <a:ext cx="3639820" cy="1198880"/>
+            <a:off x="620395" y="1342390"/>
+            <a:ext cx="5947410" cy="4523105"/>
           </a:xfrm>
           <a:prstGeom prst="rect">
             <a:avLst/>
@@ -16610,120 +16513,119 @@
             <a:spAutoFit/>
           </a:bodyPr>
           <a:p>
+            <a:pPr>
+              <a:lnSpc>
+                <a:spcPct val="150000"/>
+              </a:lnSpc>
+            </a:pPr>
+            <a:r>
+              <a:rPr lang="en-US" altLang="zh-CN" sz="2400"/>
+              <a:t>1. form</a:t>
+            </a:r>
             <a:r>
               <a:rPr lang="zh-CN" altLang="en-US" sz="2400"/>
-              <a:t>本机已就绪 </a:t>
+              <a:t>为 </a:t>
             </a:r>
             <a:r>
               <a:rPr lang="en-US" altLang="zh-CN" sz="2400"/>
-              <a:t>Python </a:t>
+              <a:t>reactive </a:t>
             </a:r>
             <a:r>
               <a:rPr lang="zh-CN" altLang="en-US" sz="2400"/>
-              <a:t>而缺少 </a:t>
+              <a:t>响应式对象，配合模板</a:t>
             </a:r>
             <a:r>
               <a:rPr lang="en-US" altLang="zh-CN" sz="2400"/>
-              <a:t>Maven/Node，</a:t>
+              <a:t>v-model</a:t>
             </a:r>
             <a:r>
               <a:rPr lang="zh-CN" altLang="en-US" sz="2400"/>
-              <a:t>且需求明确要求接口文档</a:t>
+              <a:t>双向绑定，实时收集用户表单输入；</a:t>
             </a:r>
             <a:endParaRPr lang="zh-CN" altLang="en-US" sz="2400"/>
           </a:p>
-        </p:txBody>
-      </p:sp>
-      <p:cxnSp>
-        <p:nvCxnSpPr>
-          <p:cNvPr id="14" name="直接箭头连接符 13"/>
-          <p:cNvCxnSpPr/>
-          <p:nvPr/>
-        </p:nvCxnSpPr>
-        <p:spPr>
-          <a:xfrm>
-            <a:off x="4772660" y="1882775"/>
-            <a:ext cx="2286000" cy="0"/>
-          </a:xfrm>
-          <a:prstGeom prst="straightConnector1">
-            <a:avLst/>
-          </a:prstGeom>
-          <a:ln>
-            <a:tailEnd type="arrow"/>
-          </a:ln>
-        </p:spPr>
-        <p:style>
-          <a:lnRef idx="2">
-            <a:schemeClr val="accent1"/>
-          </a:lnRef>
-          <a:fillRef idx="0">
-            <a:schemeClr val="accent1"/>
-          </a:fillRef>
-          <a:effectRef idx="1">
-            <a:schemeClr val="accent1"/>
-          </a:effectRef>
-          <a:fontRef idx="minor">
-            <a:schemeClr val="tx1"/>
-          </a:fontRef>
-        </p:style>
-      </p:cxnSp>
-      <p:sp>
-        <p:nvSpPr>
-          <p:cNvPr id="17" name="圆角矩形 16"/>
-          <p:cNvSpPr/>
-          <p:nvPr/>
-        </p:nvSpPr>
-        <p:spPr>
-          <a:xfrm>
-            <a:off x="7387590" y="1459230"/>
-            <a:ext cx="2120265" cy="922020"/>
-          </a:xfrm>
-          <a:prstGeom prst="roundRect">
+          <a:p>
+            <a:pPr>
+              <a:lnSpc>
+                <a:spcPct val="150000"/>
+              </a:lnSpc>
+            </a:pPr>
+            <a:r>
+              <a:rPr lang="en-US" altLang="zh-CN" sz="2400"/>
+              <a:t>2. errors</a:t>
+            </a:r>
+            <a:r>
+              <a:rPr lang="zh-CN" altLang="en-US" sz="2400"/>
+              <a:t>响应式对象保存校验错误信息；</a:t>
+            </a:r>
+            <a:endParaRPr lang="zh-CN" altLang="en-US" sz="2400"/>
+          </a:p>
+          <a:p>
+            <a:pPr>
+              <a:lnSpc>
+                <a:spcPct val="150000"/>
+              </a:lnSpc>
+            </a:pPr>
+            <a:r>
+              <a:rPr lang="en-US" altLang="zh-CN" sz="2400"/>
+              <a:t>3. validate()</a:t>
+            </a:r>
+            <a:r>
+              <a:rPr lang="zh-CN" altLang="en-US" sz="2400"/>
+              <a:t>函数完成校验逻辑：姓名非空、长度限制，手机号正则校验；校验失败给 </a:t>
+            </a:r>
+            <a:r>
+              <a:rPr lang="en-US" altLang="zh-CN" sz="2400"/>
+              <a:t>errors </a:t>
+            </a:r>
+            <a:r>
+              <a:rPr lang="zh-CN" altLang="en-US" sz="2400"/>
+              <a:t>赋值；</a:t>
+            </a:r>
+            <a:endParaRPr lang="zh-CN" altLang="en-US" sz="2400"/>
+          </a:p>
+          <a:p>
+            <a:pPr>
+              <a:lnSpc>
+                <a:spcPct val="150000"/>
+              </a:lnSpc>
+            </a:pPr>
+            <a:r>
+              <a:rPr lang="zh-CN" altLang="en-US" sz="2400"/>
+              <a:t>4. 模板直接读取</a:t>
+            </a:r>
+            <a:r>
+              <a:rPr lang="en-US" altLang="zh-CN" sz="2400"/>
+              <a:t>errors，</a:t>
+            </a:r>
+            <a:r>
+              <a:rPr lang="zh-CN" altLang="en-US" sz="2400"/>
+              <a:t>渲染错误文字与输入框错误样式。</a:t>
+            </a:r>
+            <a:endParaRPr lang="zh-CN" altLang="en-US" sz="2400"/>
+          </a:p>
+        </p:txBody>
+      </p:sp>
+      <p:sp>
+        <p:nvSpPr>
+          <p:cNvPr id="8" name="文本框 7"/>
+          <p:cNvSpPr txBox="1"/>
+          <p:nvPr/>
+        </p:nvSpPr>
+        <p:spPr>
+          <a:xfrm>
+            <a:off x="6937375" y="908050"/>
+            <a:ext cx="4537710" cy="5908040"/>
+          </a:xfrm>
+          <a:prstGeom prst="rect">
             <a:avLst/>
           </a:prstGeom>
           <a:solidFill>
             <a:schemeClr val="accent1">
-              <a:lumMod val="20000"/>
-              <a:lumOff val="80000"/>
+              <a:lumMod val="40000"/>
+              <a:lumOff val="60000"/>
             </a:schemeClr>
           </a:solidFill>
-        </p:spPr>
-        <p:style>
-          <a:lnRef idx="1">
-            <a:schemeClr val="accent1"/>
-          </a:lnRef>
-          <a:fillRef idx="3">
-            <a:schemeClr val="accent1"/>
-          </a:fillRef>
-          <a:effectRef idx="2">
-            <a:schemeClr val="accent1"/>
-          </a:effectRef>
-          <a:fontRef idx="minor">
-            <a:schemeClr val="lt1"/>
-          </a:fontRef>
-        </p:style>
-        <p:txBody>
-          <a:bodyPr/>
-          <a:p>
-            <a:endParaRPr lang="zh-CN" altLang="en-US"/>
-          </a:p>
-        </p:txBody>
-      </p:sp>
-      <p:sp>
-        <p:nvSpPr>
-          <p:cNvPr id="15" name="文本框 14"/>
-          <p:cNvSpPr txBox="1"/>
-          <p:nvPr/>
-        </p:nvSpPr>
-        <p:spPr>
-          <a:xfrm>
-            <a:off x="7524750" y="1532890"/>
-            <a:ext cx="2494915" cy="829945"/>
-          </a:xfrm>
-          <a:prstGeom prst="rect">
-            <a:avLst/>
-          </a:prstGeom>
-          <a:noFill/>
         </p:spPr>
         <p:txBody>
           <a:bodyPr wrap="square" rtlCol="0">
@@ -16731,353 +16633,161 @@
           </a:bodyPr>
           <a:p>
             <a:r>
-              <a:rPr lang="en-US" altLang="zh-CN" sz="2400"/>
-              <a:t> FastAPI    </a:t>
-            </a:r>
-            <a:r>
-              <a:rPr lang="en-US" altLang="zh-CN" sz="2400">
-                <a:solidFill>
-                  <a:srgbClr val="92D050"/>
-                </a:solidFill>
-              </a:rPr>
-              <a:t>√</a:t>
-            </a:r>
-            <a:endParaRPr lang="en-US" altLang="zh-CN" sz="2400"/>
-          </a:p>
-          <a:p>
-            <a:r>
-              <a:rPr lang="en-US" altLang="zh-CN" sz="2400"/>
-              <a:t>Spring Boot </a:t>
-            </a:r>
-            <a:r>
-              <a:rPr lang="zh-CN" altLang="en-US" sz="2400">
-                <a:solidFill>
-                  <a:srgbClr val="FF0000"/>
-                </a:solidFill>
-              </a:rPr>
-              <a:t>×</a:t>
-            </a:r>
-            <a:endParaRPr lang="zh-CN" altLang="en-US" sz="2400">
-              <a:solidFill>
-                <a:srgbClr val="FF0000"/>
-              </a:solidFill>
-            </a:endParaRPr>
-          </a:p>
-        </p:txBody>
-      </p:sp>
-      <p:sp>
-        <p:nvSpPr>
-          <p:cNvPr id="16" name="圆角矩形 15"/>
-          <p:cNvSpPr/>
-          <p:nvPr/>
-        </p:nvSpPr>
-        <p:spPr>
-          <a:xfrm>
-            <a:off x="1132205" y="2930525"/>
-            <a:ext cx="3598545" cy="890905"/>
-          </a:xfrm>
-          <a:prstGeom prst="roundRect">
-            <a:avLst/>
-          </a:prstGeom>
-          <a:solidFill>
-            <a:schemeClr val="accent1">
-              <a:lumMod val="20000"/>
-              <a:lumOff val="80000"/>
-            </a:schemeClr>
-          </a:solidFill>
-        </p:spPr>
-        <p:style>
-          <a:lnRef idx="1">
-            <a:schemeClr val="accent1"/>
-          </a:lnRef>
-          <a:fillRef idx="3">
-            <a:schemeClr val="accent1"/>
-          </a:fillRef>
-          <a:effectRef idx="2">
-            <a:schemeClr val="accent1"/>
-          </a:effectRef>
-          <a:fontRef idx="minor">
-            <a:schemeClr val="lt1"/>
-          </a:fontRef>
-        </p:style>
-        <p:txBody>
-          <a:bodyPr/>
-          <a:p>
+              <a:rPr lang="en-US" altLang="zh-CN"/>
+              <a:t>const errors = reactive({ name: '', phone: '' })</a:t>
+            </a:r>
+            <a:endParaRPr lang="en-US" altLang="zh-CN"/>
+          </a:p>
+          <a:p>
+            <a:r>
+              <a:rPr lang="en-US" altLang="zh-CN"/>
+              <a:t>const form = reactive({ name: '', phone: '' })</a:t>
+            </a:r>
+            <a:endParaRPr lang="en-US" altLang="zh-CN"/>
+          </a:p>
+          <a:p>
+            <a:endParaRPr lang="en-US" altLang="zh-CN"/>
+          </a:p>
+          <a:p>
+            <a:r>
+              <a:rPr lang="en-US" altLang="zh-CN"/>
+              <a:t>function validate() {</a:t>
+            </a:r>
+            <a:endParaRPr lang="en-US" altLang="zh-CN"/>
+          </a:p>
+          <a:p>
+            <a:r>
+              <a:rPr lang="en-US" altLang="zh-CN"/>
+              <a:t>  errors.name = ''</a:t>
+            </a:r>
+            <a:endParaRPr lang="en-US" altLang="zh-CN"/>
+          </a:p>
+          <a:p>
+            <a:r>
+              <a:rPr lang="en-US" altLang="zh-CN"/>
+              <a:t>  errors.phone = ''</a:t>
+            </a:r>
+            <a:endParaRPr lang="en-US" altLang="zh-CN"/>
+          </a:p>
+          <a:p>
+            <a:r>
+              <a:rPr lang="en-US" altLang="zh-CN"/>
+              <a:t>  const name = form.name.trim()</a:t>
+            </a:r>
+            <a:endParaRPr lang="en-US" altLang="zh-CN"/>
+          </a:p>
+          <a:p>
+            <a:r>
+              <a:rPr lang="en-US" altLang="zh-CN"/>
+              <a:t>  if (!name) {</a:t>
+            </a:r>
+            <a:endParaRPr lang="en-US" altLang="zh-CN"/>
+          </a:p>
+          <a:p>
+            <a:r>
+              <a:rPr lang="en-US" altLang="zh-CN"/>
+              <a:t>    errors.name = '</a:t>
+            </a:r>
+            <a:r>
+              <a:rPr lang="zh-CN" altLang="en-US"/>
+              <a:t>请输入您的姓名'</a:t>
+            </a:r>
             <a:endParaRPr lang="zh-CN" altLang="en-US"/>
           </a:p>
-        </p:txBody>
-      </p:sp>
-      <p:sp>
-        <p:nvSpPr>
-          <p:cNvPr id="18" name="圆角矩形 17"/>
-          <p:cNvSpPr/>
-          <p:nvPr/>
-        </p:nvSpPr>
-        <p:spPr>
-          <a:xfrm>
-            <a:off x="7387590" y="2985770"/>
-            <a:ext cx="2416810" cy="772160"/>
-          </a:xfrm>
-          <a:prstGeom prst="roundRect">
-            <a:avLst/>
-          </a:prstGeom>
-          <a:solidFill>
-            <a:schemeClr val="accent1">
-              <a:lumMod val="20000"/>
-              <a:lumOff val="80000"/>
-            </a:schemeClr>
-          </a:solidFill>
-        </p:spPr>
-        <p:style>
-          <a:lnRef idx="1">
-            <a:schemeClr val="accent1"/>
-          </a:lnRef>
-          <a:fillRef idx="3">
-            <a:schemeClr val="accent1"/>
-          </a:fillRef>
-          <a:effectRef idx="2">
-            <a:schemeClr val="accent1"/>
-          </a:effectRef>
-          <a:fontRef idx="minor">
-            <a:schemeClr val="lt1"/>
-          </a:fontRef>
-        </p:style>
-        <p:txBody>
-          <a:bodyPr/>
-          <a:p>
+          <a:p>
+            <a:r>
+              <a:rPr lang="en-US" altLang="zh-CN"/>
+              <a:t>  } else if (name.length &gt; 64) {</a:t>
+            </a:r>
+            <a:endParaRPr lang="en-US" altLang="zh-CN"/>
+          </a:p>
+          <a:p>
+            <a:r>
+              <a:rPr lang="en-US" altLang="zh-CN"/>
+              <a:t>    errors.name = '</a:t>
+            </a:r>
+            <a:r>
+              <a:rPr lang="zh-CN" altLang="en-US"/>
+              <a:t>姓名不能超过 64 个字'</a:t>
+            </a:r>
             <a:endParaRPr lang="zh-CN" altLang="en-US"/>
           </a:p>
-        </p:txBody>
-      </p:sp>
-      <p:sp>
-        <p:nvSpPr>
-          <p:cNvPr id="41" name="文本框 40"/>
-          <p:cNvSpPr txBox="1"/>
-          <p:nvPr/>
-        </p:nvSpPr>
-        <p:spPr>
-          <a:xfrm>
-            <a:off x="7524750" y="3153410"/>
-            <a:ext cx="2359660" cy="460375"/>
-          </a:xfrm>
-          <a:prstGeom prst="rect">
-            <a:avLst/>
-          </a:prstGeom>
-          <a:noFill/>
-        </p:spPr>
-        <p:txBody>
-          <a:bodyPr wrap="square" rtlCol="0">
-            <a:spAutoFit/>
-          </a:bodyPr>
-          <a:p>
-            <a:r>
-              <a:rPr lang="zh-CN" altLang="en-US" sz="2400"/>
-              <a:t>零配置的 </a:t>
-            </a:r>
-            <a:r>
-              <a:rPr lang="en-US" altLang="zh-CN" sz="2400"/>
-              <a:t>SQLite</a:t>
-            </a:r>
-            <a:endParaRPr lang="en-US" altLang="zh-CN" sz="2400"/>
-          </a:p>
-        </p:txBody>
-      </p:sp>
-      <p:sp>
-        <p:nvSpPr>
-          <p:cNvPr id="45" name="文本框 44"/>
-          <p:cNvSpPr txBox="1"/>
-          <p:nvPr/>
-        </p:nvSpPr>
-        <p:spPr>
-          <a:xfrm>
-            <a:off x="1132840" y="2950210"/>
-            <a:ext cx="3660140" cy="829945"/>
-          </a:xfrm>
-          <a:prstGeom prst="rect">
-            <a:avLst/>
-          </a:prstGeom>
-          <a:noFill/>
-        </p:spPr>
-        <p:txBody>
-          <a:bodyPr wrap="square" rtlCol="0">
-            <a:spAutoFit/>
-          </a:bodyPr>
-          <a:p>
-            <a:r>
-              <a:rPr lang="zh-CN" altLang="en-US" sz="2400"/>
-              <a:t>"单卖家、任一时刻仅一件商品在售、队列个位数"</a:t>
-            </a:r>
-            <a:endParaRPr lang="zh-CN" altLang="en-US" sz="2400"/>
-          </a:p>
-        </p:txBody>
-      </p:sp>
-      <p:pic>
-        <p:nvPicPr>
-          <p:cNvPr id="52" name="图片 51"/>
-          <p:cNvPicPr>
-            <a:picLocks noChangeAspect="1"/>
-          </p:cNvPicPr>
-          <p:nvPr/>
-        </p:nvPicPr>
-        <p:blipFill>
-          <a:blip r:embed="rId1"/>
-          <a:stretch>
-            <a:fillRect/>
-          </a:stretch>
-        </p:blipFill>
-        <p:spPr>
-          <a:xfrm>
-            <a:off x="9819005" y="4375150"/>
-            <a:ext cx="2482850" cy="2482850"/>
-          </a:xfrm>
-          <a:prstGeom prst="rect">
-            <a:avLst/>
-          </a:prstGeom>
-        </p:spPr>
-      </p:pic>
-      <p:sp>
-        <p:nvSpPr>
-          <p:cNvPr id="48" name="Rounded Rectangle 30"/>
-          <p:cNvSpPr/>
-          <p:nvPr/>
-        </p:nvSpPr>
-        <p:spPr>
-          <a:xfrm>
-            <a:off x="1078865" y="4561840"/>
-            <a:ext cx="10117455" cy="706120"/>
-          </a:xfrm>
-          <a:prstGeom prst="roundRect">
-            <a:avLst/>
-          </a:prstGeom>
-          <a:solidFill>
-            <a:srgbClr val="FFFFFF"/>
-          </a:solidFill>
-          <a:ln w="19050">
-            <a:solidFill>
-              <a:srgbClr val="B8860B"/>
-            </a:solidFill>
-          </a:ln>
-          <a:effectLst/>
-        </p:spPr>
-        <p:style>
-          <a:lnRef idx="1">
-            <a:schemeClr val="accent1"/>
-          </a:lnRef>
-          <a:fillRef idx="3">
-            <a:schemeClr val="accent1"/>
-          </a:fillRef>
-          <a:effectRef idx="2">
-            <a:schemeClr val="accent1"/>
-          </a:effectRef>
-          <a:fontRef idx="minor">
-            <a:schemeClr val="lt1"/>
-          </a:fontRef>
-        </p:style>
-        <p:txBody>
-          <a:bodyPr rtlCol="0" anchor="ctr"/>
-          <a:lstStyle/>
-          <a:p>
-            <a:pPr algn="ctr"/>
-            <a:r>
-              <a:rPr lang="zh-CN" altLang="en-US">
-                <a:sym typeface="+mn-ea"/>
-              </a:rPr>
-              <a:t>先让空壳服务跑通再动业务，把表结构、改一次要返工一大片"的决策全部前置成文档</a:t>
+          <a:p>
+            <a:r>
+              <a:rPr lang="en-US" altLang="zh-CN"/>
+              <a:t>  }</a:t>
+            </a:r>
+            <a:endParaRPr lang="en-US" altLang="zh-CN"/>
+          </a:p>
+          <a:p>
+            <a:r>
+              <a:rPr lang="en-US" altLang="zh-CN"/>
+              <a:t>  const phone = form.phone.trim()</a:t>
+            </a:r>
+            <a:endParaRPr lang="en-US" altLang="zh-CN"/>
+          </a:p>
+          <a:p>
+            <a:r>
+              <a:rPr lang="en-US" altLang="zh-CN"/>
+              <a:t>  if (!phone) {</a:t>
+            </a:r>
+            <a:endParaRPr lang="en-US" altLang="zh-CN"/>
+          </a:p>
+          <a:p>
+            <a:r>
+              <a:rPr lang="en-US" altLang="zh-CN"/>
+              <a:t>    errors.phone = '</a:t>
+            </a:r>
+            <a:r>
+              <a:rPr lang="zh-CN" altLang="en-US"/>
+              <a:t>请输入联系电话'</a:t>
             </a:r>
             <a:endParaRPr lang="zh-CN" altLang="en-US"/>
           </a:p>
           <a:p>
-            <a:pPr algn="ctr"/>
+            <a:r>
+              <a:rPr lang="en-US" altLang="zh-CN"/>
+              <a:t>  } else if (!PHONE_RE.test(phone)) {</a:t>
+            </a:r>
+            <a:endParaRPr lang="en-US" altLang="zh-CN"/>
+          </a:p>
+          <a:p>
+            <a:r>
+              <a:rPr lang="en-US" altLang="zh-CN"/>
+              <a:t>    errors.phone = '</a:t>
+            </a:r>
+            <a:r>
+              <a:rPr lang="zh-CN" altLang="en-US"/>
+              <a:t>联系电话格式不正确'</a:t>
+            </a:r>
             <a:endParaRPr lang="zh-CN" altLang="en-US"/>
           </a:p>
-        </p:txBody>
-      </p:sp>
-      <p:sp>
-        <p:nvSpPr>
-          <p:cNvPr id="46" name="文本框 45"/>
-          <p:cNvSpPr txBox="1"/>
-          <p:nvPr/>
-        </p:nvSpPr>
-        <p:spPr>
-          <a:xfrm>
-            <a:off x="1078865" y="4622800"/>
-            <a:ext cx="9387205" cy="645160"/>
-          </a:xfrm>
-          <a:prstGeom prst="rect">
-            <a:avLst/>
-          </a:prstGeom>
-          <a:noFill/>
-        </p:spPr>
-        <p:txBody>
-          <a:bodyPr wrap="square" rtlCol="0">
-            <a:spAutoFit/>
-          </a:bodyPr>
-          <a:p>
-            <a:r>
-              <a:rPr lang="zh-CN" altLang="en-US"/>
-              <a:t>先让空壳服务跑通再动业务，把表结构、状态机这些"改一次要返工一大片"的决策全部前置成文档</a:t>
-            </a:r>
-            <a:endParaRPr lang="zh-CN" altLang="en-US"/>
-          </a:p>
-        </p:txBody>
-      </p:sp>
-      <p:cxnSp>
-        <p:nvCxnSpPr>
-          <p:cNvPr id="47" name="直接箭头连接符 46"/>
-          <p:cNvCxnSpPr/>
-          <p:nvPr/>
-        </p:nvCxnSpPr>
-        <p:spPr>
-          <a:xfrm>
-            <a:off x="4699000" y="3380740"/>
-            <a:ext cx="2359660" cy="0"/>
-          </a:xfrm>
-          <a:prstGeom prst="straightConnector1">
-            <a:avLst/>
-          </a:prstGeom>
-          <a:ln>
-            <a:tailEnd type="arrow"/>
-          </a:ln>
-        </p:spPr>
-        <p:style>
-          <a:lnRef idx="2">
-            <a:schemeClr val="accent1"/>
-          </a:lnRef>
-          <a:fillRef idx="0">
-            <a:schemeClr val="accent1"/>
-          </a:fillRef>
-          <a:effectRef idx="1">
-            <a:schemeClr val="accent1"/>
-          </a:effectRef>
-          <a:fontRef idx="minor">
-            <a:schemeClr val="tx1"/>
-          </a:fontRef>
-        </p:style>
-      </p:cxnSp>
-      <p:pic>
-        <p:nvPicPr>
-          <p:cNvPr id="51" name="图片 50"/>
-          <p:cNvPicPr>
-            <a:picLocks noChangeAspect="1"/>
-          </p:cNvPicPr>
-          <p:nvPr/>
-        </p:nvPicPr>
-        <p:blipFill>
-          <a:blip r:embed="rId2"/>
-          <a:stretch>
-            <a:fillRect/>
-          </a:stretch>
-        </p:blipFill>
-        <p:spPr>
-          <a:xfrm rot="16200000">
-            <a:off x="4231005" y="612775"/>
-            <a:ext cx="3368675" cy="4013200"/>
-          </a:xfrm>
-          <a:prstGeom prst="rect">
-            <a:avLst/>
-          </a:prstGeom>
-        </p:spPr>
-      </p:pic>
+          <a:p>
+            <a:r>
+              <a:rPr lang="en-US" altLang="zh-CN"/>
+              <a:t>  }</a:t>
+            </a:r>
+            <a:endParaRPr lang="en-US" altLang="zh-CN"/>
+          </a:p>
+          <a:p>
+            <a:r>
+              <a:rPr lang="en-US" altLang="zh-CN"/>
+              <a:t>  return !errors.name &amp;&amp; !errors.phone</a:t>
+            </a:r>
+            <a:endParaRPr lang="en-US" altLang="zh-CN"/>
+          </a:p>
+          <a:p>
+            <a:r>
+              <a:rPr lang="en-US" altLang="zh-CN"/>
+              <a:t>}</a:t>
+            </a:r>
+            <a:endParaRPr lang="en-US" altLang="zh-CN"/>
+          </a:p>
+          <a:p>
+            <a:endParaRPr lang="en-US" altLang="zh-CN"/>
+          </a:p>
+        </p:txBody>
+      </p:sp>
     </p:spTree>
   </p:cSld>
   <p:clrMapOvr>
@@ -17098,6 +16808,50 @@
       <p:grpSpPr/>
       <p:sp>
         <p:nvSpPr>
+          <p:cNvPr id="2" name="Rectangle 1"/>
+          <p:cNvSpPr/>
+          <p:nvPr/>
+        </p:nvSpPr>
+        <p:spPr>
+          <a:xfrm>
+            <a:off x="0" y="0"/>
+            <a:ext cx="12191695" cy="6858000"/>
+          </a:xfrm>
+          <a:prstGeom prst="rect">
+            <a:avLst/>
+          </a:prstGeom>
+          <a:solidFill>
+            <a:srgbClr val="FFFFFF"/>
+          </a:solidFill>
+          <a:ln>
+            <a:noFill/>
+          </a:ln>
+          <a:effectLst/>
+        </p:spPr>
+        <p:style>
+          <a:lnRef idx="1">
+            <a:schemeClr val="accent1"/>
+          </a:lnRef>
+          <a:fillRef idx="3">
+            <a:schemeClr val="accent1"/>
+          </a:fillRef>
+          <a:effectRef idx="2">
+            <a:schemeClr val="accent1"/>
+          </a:effectRef>
+          <a:fontRef idx="minor">
+            <a:schemeClr val="lt1"/>
+          </a:fontRef>
+        </p:style>
+        <p:txBody>
+          <a:bodyPr rtlCol="0" anchor="ctr"/>
+          <a:lstStyle/>
+          <a:p>
+            <a:pPr algn="ctr"/>
+          </a:p>
+        </p:txBody>
+      </p:sp>
+      <p:sp>
+        <p:nvSpPr>
           <p:cNvPr id="3" name="Rectangle 2"/>
           <p:cNvSpPr/>
           <p:nvPr/>
@@ -17222,7 +16976,7 @@
                 <a:latin typeface="微软雅黑" panose="020B0503020204020204" charset="-122"/>
                 <a:ea typeface="微软雅黑" panose="020B0503020204020204" charset="-122"/>
               </a:rPr>
-              <a:t>后端</a:t>
+              <a:t>前端</a:t>
             </a:r>
             <a:endParaRPr lang="zh-CN" sz="2600" b="1" i="0">
               <a:solidFill>
@@ -17539,519 +17293,9 @@
           </a:p>
         </p:txBody>
       </p:sp>
-      <p:sp>
-        <p:nvSpPr>
-          <p:cNvPr id="49" name="椭圆 48"/>
-          <p:cNvSpPr/>
-          <p:nvPr/>
-        </p:nvSpPr>
-        <p:spPr>
-          <a:xfrm>
-            <a:off x="237490" y="2832100"/>
-            <a:ext cx="1581785" cy="953770"/>
-          </a:xfrm>
-          <a:prstGeom prst="ellipse">
-            <a:avLst/>
-          </a:prstGeom>
-          <a:solidFill>
-            <a:schemeClr val="accent3">
-              <a:lumMod val="60000"/>
-              <a:lumOff val="40000"/>
-            </a:schemeClr>
-          </a:solidFill>
-          <a:ln>
-            <a:solidFill>
-              <a:srgbClr val="92D050"/>
-            </a:solidFill>
-          </a:ln>
-        </p:spPr>
-        <p:style>
-          <a:lnRef idx="1">
-            <a:schemeClr val="accent1"/>
-          </a:lnRef>
-          <a:fillRef idx="3">
-            <a:schemeClr val="accent1"/>
-          </a:fillRef>
-          <a:effectRef idx="2">
-            <a:schemeClr val="accent1"/>
-          </a:effectRef>
-          <a:fontRef idx="minor">
-            <a:schemeClr val="lt1"/>
-          </a:fontRef>
-        </p:style>
-        <p:txBody>
-          <a:bodyPr/>
-          <a:p>
-            <a:endParaRPr lang="zh-CN" altLang="en-US"/>
-          </a:p>
-        </p:txBody>
-      </p:sp>
-      <p:sp>
-        <p:nvSpPr>
-          <p:cNvPr id="50" name="文本框 49"/>
-          <p:cNvSpPr txBox="1"/>
-          <p:nvPr/>
-        </p:nvSpPr>
-        <p:spPr>
-          <a:xfrm>
-            <a:off x="249555" y="3078480"/>
-            <a:ext cx="1600200" cy="460375"/>
-          </a:xfrm>
-          <a:prstGeom prst="rect">
-            <a:avLst/>
-          </a:prstGeom>
-          <a:noFill/>
-        </p:spPr>
-        <p:txBody>
-          <a:bodyPr wrap="square" rtlCol="0">
-            <a:spAutoFit/>
-          </a:bodyPr>
-          <a:p>
-            <a:r>
-              <a:rPr lang="en-US" altLang="zh-CN" sz="2400"/>
-              <a:t>service </a:t>
-            </a:r>
-            <a:r>
-              <a:rPr lang="zh-CN" altLang="en-US" sz="2400"/>
-              <a:t>层</a:t>
-            </a:r>
-            <a:endParaRPr lang="zh-CN" altLang="en-US" sz="2400"/>
-          </a:p>
-        </p:txBody>
-      </p:sp>
-      <p:sp>
-        <p:nvSpPr>
-          <p:cNvPr id="19" name="右大括号 18"/>
-          <p:cNvSpPr/>
-          <p:nvPr/>
-        </p:nvSpPr>
-        <p:spPr>
-          <a:xfrm rot="10800000">
-            <a:off x="1903095" y="2044065"/>
-            <a:ext cx="1144270" cy="2482850"/>
-          </a:xfrm>
-          <a:prstGeom prst="rightBrace">
-            <a:avLst>
-              <a:gd name="adj1" fmla="val 8333"/>
-              <a:gd name="adj2" fmla="val 50000"/>
-            </a:avLst>
-          </a:prstGeom>
-          <a:ln>
-            <a:solidFill>
-              <a:srgbClr val="92D050"/>
-            </a:solidFill>
-          </a:ln>
-        </p:spPr>
-        <p:style>
-          <a:lnRef idx="2">
-            <a:schemeClr val="accent1"/>
-          </a:lnRef>
-          <a:fillRef idx="0">
-            <a:schemeClr val="accent1"/>
-          </a:fillRef>
-          <a:effectRef idx="1">
-            <a:schemeClr val="accent1"/>
-          </a:effectRef>
-          <a:fontRef idx="minor">
-            <a:schemeClr val="tx1"/>
-          </a:fontRef>
-        </p:style>
-        <p:txBody>
-          <a:bodyPr/>
-          <a:p>
-            <a:endParaRPr lang="zh-CN" altLang="en-US"/>
-          </a:p>
-        </p:txBody>
-      </p:sp>
-      <p:sp>
-        <p:nvSpPr>
-          <p:cNvPr id="24" name="矩形 23"/>
-          <p:cNvSpPr/>
-          <p:nvPr/>
-        </p:nvSpPr>
-        <p:spPr>
-          <a:xfrm>
-            <a:off x="3320415" y="1938020"/>
-            <a:ext cx="2952750" cy="460375"/>
-          </a:xfrm>
-          <a:prstGeom prst="rect">
-            <a:avLst/>
-          </a:prstGeom>
-          <a:solidFill>
-            <a:schemeClr val="accent3">
-              <a:lumMod val="60000"/>
-              <a:lumOff val="40000"/>
-            </a:schemeClr>
-          </a:solidFill>
-          <a:ln>
-            <a:solidFill>
-              <a:srgbClr val="92D050"/>
-            </a:solidFill>
-          </a:ln>
-        </p:spPr>
-        <p:style>
-          <a:lnRef idx="1">
-            <a:schemeClr val="accent1"/>
-          </a:lnRef>
-          <a:fillRef idx="3">
-            <a:schemeClr val="accent1"/>
-          </a:fillRef>
-          <a:effectRef idx="2">
-            <a:schemeClr val="accent1"/>
-          </a:effectRef>
-          <a:fontRef idx="minor">
-            <a:schemeClr val="lt1"/>
-          </a:fontRef>
-        </p:style>
-        <p:txBody>
-          <a:bodyPr/>
-          <a:p>
-            <a:endParaRPr lang="zh-CN" altLang="en-US"/>
-          </a:p>
-        </p:txBody>
-      </p:sp>
-      <p:sp>
-        <p:nvSpPr>
-          <p:cNvPr id="20" name="文本框 19"/>
-          <p:cNvSpPr txBox="1"/>
-          <p:nvPr/>
-        </p:nvSpPr>
-        <p:spPr>
-          <a:xfrm>
-            <a:off x="3320415" y="1938020"/>
-            <a:ext cx="3735070" cy="460375"/>
-          </a:xfrm>
-          <a:prstGeom prst="rect">
-            <a:avLst/>
-          </a:prstGeom>
-          <a:noFill/>
-        </p:spPr>
-        <p:txBody>
-          <a:bodyPr wrap="square" rtlCol="0">
-            <a:spAutoFit/>
-          </a:bodyPr>
-          <a:p>
-            <a:r>
-              <a:rPr lang="en-US" altLang="zh-CN" sz="2400"/>
-              <a:t>FIFO </a:t>
-            </a:r>
-            <a:r>
-              <a:rPr lang="zh-CN" altLang="en-US" sz="2400"/>
-              <a:t>排队与交易冻结</a:t>
-            </a:r>
-            <a:endParaRPr lang="zh-CN" altLang="en-US" sz="2400"/>
-          </a:p>
-        </p:txBody>
-      </p:sp>
-      <p:sp>
-        <p:nvSpPr>
-          <p:cNvPr id="25" name="矩形 24"/>
-          <p:cNvSpPr/>
-          <p:nvPr/>
-        </p:nvSpPr>
-        <p:spPr>
-          <a:xfrm>
-            <a:off x="3267075" y="3012440"/>
-            <a:ext cx="2952750" cy="460375"/>
-          </a:xfrm>
-          <a:prstGeom prst="rect">
-            <a:avLst/>
-          </a:prstGeom>
-          <a:solidFill>
-            <a:schemeClr val="accent3">
-              <a:lumMod val="60000"/>
-              <a:lumOff val="40000"/>
-            </a:schemeClr>
-          </a:solidFill>
-          <a:ln>
-            <a:solidFill>
-              <a:srgbClr val="92D050"/>
-            </a:solidFill>
-          </a:ln>
-        </p:spPr>
-        <p:style>
-          <a:lnRef idx="1">
-            <a:schemeClr val="accent1"/>
-          </a:lnRef>
-          <a:fillRef idx="3">
-            <a:schemeClr val="accent1"/>
-          </a:fillRef>
-          <a:effectRef idx="2">
-            <a:schemeClr val="accent1"/>
-          </a:effectRef>
-          <a:fontRef idx="minor">
-            <a:schemeClr val="lt1"/>
-          </a:fontRef>
-        </p:style>
-        <p:txBody>
-          <a:bodyPr/>
-          <a:p>
-            <a:endParaRPr lang="zh-CN" altLang="en-US"/>
-          </a:p>
-        </p:txBody>
-      </p:sp>
-      <p:sp>
-        <p:nvSpPr>
-          <p:cNvPr id="21" name="文本框 20"/>
-          <p:cNvSpPr txBox="1"/>
-          <p:nvPr/>
-        </p:nvSpPr>
-        <p:spPr>
-          <a:xfrm>
-            <a:off x="3320415" y="3007360"/>
-            <a:ext cx="3069590" cy="460375"/>
-          </a:xfrm>
-          <a:prstGeom prst="rect">
-            <a:avLst/>
-          </a:prstGeom>
-          <a:noFill/>
-        </p:spPr>
-        <p:txBody>
-          <a:bodyPr wrap="square" rtlCol="0">
-            <a:spAutoFit/>
-          </a:bodyPr>
-          <a:p>
-            <a:r>
-              <a:rPr lang="zh-CN" altLang="en-US" sz="2400"/>
-              <a:t>失败后的自动递补</a:t>
-            </a:r>
-            <a:endParaRPr lang="zh-CN" altLang="en-US" sz="2400"/>
-          </a:p>
-        </p:txBody>
-      </p:sp>
-      <p:sp>
-        <p:nvSpPr>
-          <p:cNvPr id="26" name="矩形 25"/>
-          <p:cNvSpPr/>
-          <p:nvPr/>
-        </p:nvSpPr>
-        <p:spPr>
-          <a:xfrm>
-            <a:off x="3267075" y="4054475"/>
-            <a:ext cx="2952750" cy="460375"/>
-          </a:xfrm>
-          <a:prstGeom prst="rect">
-            <a:avLst/>
-          </a:prstGeom>
-          <a:solidFill>
-            <a:schemeClr val="accent3">
-              <a:lumMod val="60000"/>
-              <a:lumOff val="40000"/>
-            </a:schemeClr>
-          </a:solidFill>
-          <a:ln>
-            <a:solidFill>
-              <a:srgbClr val="92D050"/>
-            </a:solidFill>
-          </a:ln>
-        </p:spPr>
-        <p:style>
-          <a:lnRef idx="1">
-            <a:schemeClr val="accent1"/>
-          </a:lnRef>
-          <a:fillRef idx="3">
-            <a:schemeClr val="accent1"/>
-          </a:fillRef>
-          <a:effectRef idx="2">
-            <a:schemeClr val="accent1"/>
-          </a:effectRef>
-          <a:fontRef idx="minor">
-            <a:schemeClr val="lt1"/>
-          </a:fontRef>
-        </p:style>
-        <p:txBody>
-          <a:bodyPr/>
-          <a:p>
-            <a:endParaRPr lang="zh-CN" altLang="en-US"/>
-          </a:p>
-        </p:txBody>
-      </p:sp>
-      <p:sp>
-        <p:nvSpPr>
-          <p:cNvPr id="22" name="文本框 21"/>
-          <p:cNvSpPr txBox="1"/>
-          <p:nvPr/>
-        </p:nvSpPr>
-        <p:spPr>
-          <a:xfrm>
-            <a:off x="3267075" y="4086860"/>
-            <a:ext cx="3788410" cy="460375"/>
-          </a:xfrm>
-          <a:prstGeom prst="rect">
-            <a:avLst/>
-          </a:prstGeom>
-          <a:noFill/>
-        </p:spPr>
-        <p:txBody>
-          <a:bodyPr wrap="square" rtlCol="0">
-            <a:spAutoFit/>
-          </a:bodyPr>
-          <a:p>
-            <a:r>
-              <a:rPr lang="zh-CN" altLang="en-US" sz="2400"/>
-              <a:t>口令码全生命周期</a:t>
-            </a:r>
-            <a:endParaRPr lang="zh-CN" altLang="en-US" sz="2400"/>
-          </a:p>
-        </p:txBody>
-      </p:sp>
-      <p:sp>
-        <p:nvSpPr>
-          <p:cNvPr id="23" name="文本框 22"/>
-          <p:cNvSpPr txBox="1"/>
-          <p:nvPr/>
-        </p:nvSpPr>
-        <p:spPr>
-          <a:xfrm>
-            <a:off x="1849755" y="2611120"/>
-            <a:ext cx="744855" cy="645160"/>
-          </a:xfrm>
-          <a:prstGeom prst="rect">
-            <a:avLst/>
-          </a:prstGeom>
-          <a:noFill/>
-        </p:spPr>
-        <p:txBody>
-          <a:bodyPr wrap="square" rtlCol="0">
-            <a:spAutoFit/>
-          </a:bodyPr>
-          <a:p>
-            <a:r>
-              <a:rPr lang="zh-CN" altLang="en-US"/>
-              <a:t>三</a:t>
-            </a:r>
-            <a:r>
-              <a:rPr lang="zh-CN" altLang="en-US"/>
-              <a:t>个逻辑</a:t>
-            </a:r>
-            <a:endParaRPr lang="zh-CN" altLang="en-US"/>
-          </a:p>
-        </p:txBody>
-      </p:sp>
-      <p:sp>
-        <p:nvSpPr>
-          <p:cNvPr id="29" name="圆角矩形 28"/>
-          <p:cNvSpPr/>
-          <p:nvPr/>
-        </p:nvSpPr>
-        <p:spPr>
-          <a:xfrm>
-            <a:off x="6995795" y="2027555"/>
-            <a:ext cx="4690110" cy="784860"/>
-          </a:xfrm>
-          <a:prstGeom prst="roundRect">
-            <a:avLst/>
-          </a:prstGeom>
-          <a:solidFill>
-            <a:schemeClr val="accent1">
-              <a:lumMod val="20000"/>
-              <a:lumOff val="80000"/>
-            </a:schemeClr>
-          </a:solidFill>
-        </p:spPr>
-        <p:style>
-          <a:lnRef idx="1">
-            <a:schemeClr val="accent1"/>
-          </a:lnRef>
-          <a:fillRef idx="3">
-            <a:schemeClr val="accent1"/>
-          </a:fillRef>
-          <a:effectRef idx="2">
-            <a:schemeClr val="accent1"/>
-          </a:effectRef>
-          <a:fontRef idx="minor">
-            <a:schemeClr val="lt1"/>
-          </a:fontRef>
-        </p:style>
-        <p:txBody>
-          <a:bodyPr/>
-          <a:p>
-            <a:endParaRPr lang="zh-CN" altLang="en-US"/>
-          </a:p>
-        </p:txBody>
-      </p:sp>
-      <p:sp>
-        <p:nvSpPr>
-          <p:cNvPr id="27" name="文本框 26"/>
-          <p:cNvSpPr txBox="1"/>
-          <p:nvPr/>
-        </p:nvSpPr>
-        <p:spPr>
-          <a:xfrm>
-            <a:off x="7052945" y="2024380"/>
-            <a:ext cx="4719320" cy="829945"/>
-          </a:xfrm>
-          <a:prstGeom prst="rect">
-            <a:avLst/>
-          </a:prstGeom>
-          <a:noFill/>
-        </p:spPr>
-        <p:txBody>
-          <a:bodyPr wrap="square" rtlCol="0">
-            <a:spAutoFit/>
-          </a:bodyPr>
-          <a:p>
-            <a:r>
-              <a:rPr lang="zh-CN" altLang="en-US" sz="2400">
-                <a:solidFill>
-                  <a:srgbClr val="FF0000"/>
-                </a:solidFill>
-              </a:rPr>
-              <a:t>问题</a:t>
-            </a:r>
-            <a:r>
-              <a:rPr lang="zh-CN" altLang="en-US" sz="2400"/>
-              <a:t>：交易失败后口令码已失效、若沿用旧码买家就会"失联"</a:t>
-            </a:r>
-            <a:endParaRPr lang="zh-CN" altLang="en-US" sz="2400"/>
-          </a:p>
-        </p:txBody>
-      </p:sp>
-      <p:sp>
-        <p:nvSpPr>
-          <p:cNvPr id="30" name="圆角矩形 29"/>
-          <p:cNvSpPr/>
-          <p:nvPr/>
-        </p:nvSpPr>
-        <p:spPr>
-          <a:xfrm>
-            <a:off x="7058660" y="3444875"/>
-            <a:ext cx="4719955" cy="1123315"/>
-          </a:xfrm>
-          <a:prstGeom prst="roundRect">
-            <a:avLst/>
-          </a:prstGeom>
-          <a:solidFill>
-            <a:schemeClr val="accent1">
-              <a:lumMod val="20000"/>
-              <a:lumOff val="80000"/>
-            </a:schemeClr>
-          </a:solidFill>
-        </p:spPr>
-        <p:style>
-          <a:lnRef idx="1">
-            <a:schemeClr val="accent1"/>
-          </a:lnRef>
-          <a:fillRef idx="3">
-            <a:schemeClr val="accent1"/>
-          </a:fillRef>
-          <a:effectRef idx="2">
-            <a:schemeClr val="accent1"/>
-          </a:effectRef>
-          <a:fontRef idx="minor">
-            <a:schemeClr val="lt1"/>
-          </a:fontRef>
-        </p:style>
-        <p:txBody>
-          <a:bodyPr/>
-          <a:p>
-            <a:endParaRPr lang="zh-CN" altLang="en-US"/>
-          </a:p>
-        </p:txBody>
-      </p:sp>
       <p:pic>
         <p:nvPicPr>
-          <p:cNvPr id="37" name="图片 36"/>
+          <p:cNvPr id="13" name="图片 12" descr="f2ca3ec9b71f776a03a5be897f0aebcc"/>
           <p:cNvPicPr>
             <a:picLocks noChangeAspect="1"/>
           </p:cNvPicPr>
@@ -18059,52 +17303,24 @@
         </p:nvPicPr>
         <p:blipFill>
           <a:blip r:embed="rId1"/>
+          <a:srcRect l="28066" r="27579"/>
           <a:stretch>
             <a:fillRect/>
           </a:stretch>
         </p:blipFill>
         <p:spPr>
           <a:xfrm>
-            <a:off x="9819005" y="4375150"/>
-            <a:ext cx="2482850" cy="2482850"/>
+            <a:off x="342265" y="1491615"/>
+            <a:ext cx="4158615" cy="4768850"/>
           </a:xfrm>
           <a:prstGeom prst="rect">
             <a:avLst/>
           </a:prstGeom>
         </p:spPr>
       </p:pic>
-      <p:sp>
-        <p:nvSpPr>
-          <p:cNvPr id="28" name="文本框 27"/>
-          <p:cNvSpPr txBox="1"/>
-          <p:nvPr/>
-        </p:nvSpPr>
-        <p:spPr>
-          <a:xfrm>
-            <a:off x="7058660" y="3387090"/>
-            <a:ext cx="4996180" cy="1198880"/>
-          </a:xfrm>
-          <a:prstGeom prst="rect">
-            <a:avLst/>
-          </a:prstGeom>
-          <a:noFill/>
-        </p:spPr>
-        <p:txBody>
-          <a:bodyPr wrap="square" rtlCol="0">
-            <a:spAutoFit/>
-          </a:bodyPr>
-          <a:p>
-            <a:r>
-              <a:rPr lang="zh-CN" altLang="en-US" sz="2400"/>
-              <a:t>解决办法：重新排队时生成新口令码，并把它标注为待团队确认的需求细节</a:t>
-            </a:r>
-            <a:endParaRPr lang="zh-CN" altLang="en-US" sz="2400"/>
-          </a:p>
-        </p:txBody>
-      </p:sp>
       <p:pic>
         <p:nvPicPr>
-          <p:cNvPr id="38" name="图片 37"/>
+          <p:cNvPr id="16" name="图片 15" descr="c3a2e3ba2854be976bbb0311de66c049"/>
           <p:cNvPicPr>
             <a:picLocks noChangeAspect="1"/>
           </p:cNvPicPr>
@@ -18112,20 +17328,112 @@
         </p:nvPicPr>
         <p:blipFill>
           <a:blip r:embed="rId2"/>
+          <a:srcRect l="27964" r="29393"/>
           <a:stretch>
             <a:fillRect/>
           </a:stretch>
         </p:blipFill>
         <p:spPr>
-          <a:xfrm rot="16200000">
-            <a:off x="1604010" y="3055620"/>
-            <a:ext cx="2272030" cy="5480685"/>
+          <a:xfrm>
+            <a:off x="7527290" y="1453515"/>
+            <a:ext cx="4177030" cy="5006975"/>
           </a:xfrm>
           <a:prstGeom prst="rect">
             <a:avLst/>
           </a:prstGeom>
         </p:spPr>
       </p:pic>
+      <p:sp>
+        <p:nvSpPr>
+          <p:cNvPr id="20" name="文本框 19"/>
+          <p:cNvSpPr txBox="1"/>
+          <p:nvPr/>
+        </p:nvSpPr>
+        <p:spPr>
+          <a:xfrm>
+            <a:off x="673100" y="935355"/>
+            <a:ext cx="1979295" cy="583565"/>
+          </a:xfrm>
+          <a:prstGeom prst="rect">
+            <a:avLst/>
+          </a:prstGeom>
+          <a:noFill/>
+        </p:spPr>
+        <p:txBody>
+          <a:bodyPr wrap="square" rtlCol="0">
+            <a:spAutoFit/>
+          </a:bodyPr>
+          <a:p>
+            <a:r>
+              <a:rPr lang="zh-CN" altLang="en-US" sz="3200" b="1"/>
+              <a:t>成功提交</a:t>
+            </a:r>
+            <a:endParaRPr lang="zh-CN" altLang="en-US" sz="3200" b="1"/>
+          </a:p>
+        </p:txBody>
+      </p:sp>
+      <p:sp>
+        <p:nvSpPr>
+          <p:cNvPr id="21" name="文本框 20"/>
+          <p:cNvSpPr txBox="1"/>
+          <p:nvPr/>
+        </p:nvSpPr>
+        <p:spPr>
+          <a:xfrm>
+            <a:off x="7425690" y="887095"/>
+            <a:ext cx="1979295" cy="583565"/>
+          </a:xfrm>
+          <a:prstGeom prst="rect">
+            <a:avLst/>
+          </a:prstGeom>
+          <a:noFill/>
+        </p:spPr>
+        <p:txBody>
+          <a:bodyPr wrap="square" rtlCol="0">
+            <a:spAutoFit/>
+          </a:bodyPr>
+          <a:p>
+            <a:r>
+              <a:rPr lang="zh-CN" altLang="en-US" sz="3200" b="1"/>
+              <a:t>弹窗</a:t>
+            </a:r>
+            <a:r>
+              <a:rPr lang="zh-CN" altLang="en-US" sz="3200" b="1"/>
+              <a:t>提醒</a:t>
+            </a:r>
+            <a:endParaRPr lang="zh-CN" altLang="en-US" sz="3200" b="1"/>
+          </a:p>
+        </p:txBody>
+      </p:sp>
+      <p:sp>
+        <p:nvSpPr>
+          <p:cNvPr id="22" name="文本框 21"/>
+          <p:cNvSpPr txBox="1"/>
+          <p:nvPr/>
+        </p:nvSpPr>
+        <p:spPr>
+          <a:xfrm>
+            <a:off x="4856480" y="2091055"/>
+            <a:ext cx="2478405" cy="2676525"/>
+          </a:xfrm>
+          <a:prstGeom prst="rect">
+            <a:avLst/>
+          </a:prstGeom>
+          <a:noFill/>
+        </p:spPr>
+        <p:txBody>
+          <a:bodyPr wrap="square" rtlCol="0">
+            <a:spAutoFit/>
+          </a:bodyPr>
+          <a:p>
+            <a:r>
+              <a:rPr lang="zh-CN" altLang="en-US" sz="2400"/>
+              <a:t>根据周展羽的需求澄清，提交意向时，系统生成一个唯一口令码，在提交成功页面直接展示，提示买家保存。</a:t>
+            </a:r>
+            <a:endParaRPr lang="zh-CN" altLang="en-US" sz="2400"/>
+          </a:p>
+        </p:txBody>
+      </p:sp>
     </p:spTree>
   </p:cSld>
   <p:clrMapOvr>
@@ -19879,6 +19187,5414 @@
                 <a:latin typeface="微软雅黑" panose="020B0503020204020204" charset="-122"/>
                 <a:ea typeface="微软雅黑" panose="020B0503020204020204" charset="-122"/>
               </a:rPr>
+              <a:t>前端</a:t>
+            </a:r>
+            <a:endParaRPr lang="zh-CN" sz="2600" b="1" i="0">
+              <a:solidFill>
+                <a:srgbClr val="1F3864"/>
+              </a:solidFill>
+              <a:latin typeface="微软雅黑" panose="020B0503020204020204" charset="-122"/>
+              <a:ea typeface="微软雅黑" panose="020B0503020204020204" charset="-122"/>
+            </a:endParaRPr>
+          </a:p>
+        </p:txBody>
+      </p:sp>
+      <p:sp>
+        <p:nvSpPr>
+          <p:cNvPr id="6" name="Rectangle 5"/>
+          <p:cNvSpPr/>
+          <p:nvPr/>
+        </p:nvSpPr>
+        <p:spPr>
+          <a:xfrm>
+            <a:off x="521207" y="896112"/>
+            <a:ext cx="502920" cy="45720"/>
+          </a:xfrm>
+          <a:prstGeom prst="rect">
+            <a:avLst/>
+          </a:prstGeom>
+          <a:solidFill>
+            <a:srgbClr val="B8860B"/>
+          </a:solidFill>
+          <a:ln>
+            <a:noFill/>
+          </a:ln>
+          <a:effectLst/>
+        </p:spPr>
+        <p:style>
+          <a:lnRef idx="1">
+            <a:schemeClr val="accent1"/>
+          </a:lnRef>
+          <a:fillRef idx="3">
+            <a:schemeClr val="accent1"/>
+          </a:fillRef>
+          <a:effectRef idx="2">
+            <a:schemeClr val="accent1"/>
+          </a:effectRef>
+          <a:fontRef idx="minor">
+            <a:schemeClr val="lt1"/>
+          </a:fontRef>
+        </p:style>
+        <p:txBody>
+          <a:bodyPr rtlCol="0" anchor="ctr"/>
+          <a:lstStyle/>
+          <a:p>
+            <a:pPr algn="ctr"/>
+          </a:p>
+        </p:txBody>
+      </p:sp>
+      <p:sp>
+        <p:nvSpPr>
+          <p:cNvPr id="7" name="Rectangle 6"/>
+          <p:cNvSpPr/>
+          <p:nvPr/>
+        </p:nvSpPr>
+        <p:spPr>
+          <a:xfrm>
+            <a:off x="1078992" y="896112"/>
+            <a:ext cx="10607040" cy="13716"/>
+          </a:xfrm>
+          <a:prstGeom prst="rect">
+            <a:avLst/>
+          </a:prstGeom>
+          <a:solidFill>
+            <a:srgbClr val="2E75B6"/>
+          </a:solidFill>
+          <a:ln>
+            <a:noFill/>
+          </a:ln>
+          <a:effectLst/>
+        </p:spPr>
+        <p:style>
+          <a:lnRef idx="1">
+            <a:schemeClr val="accent1"/>
+          </a:lnRef>
+          <a:fillRef idx="3">
+            <a:schemeClr val="accent1"/>
+          </a:fillRef>
+          <a:effectRef idx="2">
+            <a:schemeClr val="accent1"/>
+          </a:effectRef>
+          <a:fontRef idx="minor">
+            <a:schemeClr val="lt1"/>
+          </a:fontRef>
+        </p:style>
+        <p:txBody>
+          <a:bodyPr rtlCol="0" anchor="ctr"/>
+          <a:lstStyle/>
+          <a:p>
+            <a:pPr algn="ctr"/>
+          </a:p>
+        </p:txBody>
+      </p:sp>
+      <p:sp>
+        <p:nvSpPr>
+          <p:cNvPr id="9" name="Rectangle 8"/>
+          <p:cNvSpPr/>
+          <p:nvPr/>
+        </p:nvSpPr>
+        <p:spPr>
+          <a:xfrm>
+            <a:off x="0" y="6565392"/>
+            <a:ext cx="12191695" cy="292608"/>
+          </a:xfrm>
+          <a:prstGeom prst="rect">
+            <a:avLst/>
+          </a:prstGeom>
+          <a:solidFill>
+            <a:srgbClr val="EEF4FB"/>
+          </a:solidFill>
+          <a:ln>
+            <a:noFill/>
+          </a:ln>
+          <a:effectLst/>
+        </p:spPr>
+        <p:style>
+          <a:lnRef idx="1">
+            <a:schemeClr val="accent1"/>
+          </a:lnRef>
+          <a:fillRef idx="3">
+            <a:schemeClr val="accent1"/>
+          </a:fillRef>
+          <a:effectRef idx="2">
+            <a:schemeClr val="accent1"/>
+          </a:effectRef>
+          <a:fontRef idx="minor">
+            <a:schemeClr val="lt1"/>
+          </a:fontRef>
+        </p:style>
+        <p:txBody>
+          <a:bodyPr rtlCol="0" anchor="ctr"/>
+          <a:lstStyle/>
+          <a:p>
+            <a:pPr algn="ctr"/>
+          </a:p>
+        </p:txBody>
+      </p:sp>
+      <p:sp>
+        <p:nvSpPr>
+          <p:cNvPr id="10" name="TextBox 9"/>
+          <p:cNvSpPr txBox="1"/>
+          <p:nvPr/>
+        </p:nvSpPr>
+        <p:spPr>
+          <a:xfrm>
+            <a:off x="502920" y="6592824"/>
+            <a:ext cx="7315200" cy="176530"/>
+          </a:xfrm>
+          <a:prstGeom prst="rect">
+            <a:avLst/>
+          </a:prstGeom>
+          <a:noFill/>
+        </p:spPr>
+        <p:txBody>
+          <a:bodyPr wrap="square" lIns="0" tIns="0" rIns="0" bIns="0" anchor="t">
+            <a:spAutoFit/>
+          </a:bodyPr>
+          <a:lstStyle/>
+          <a:p>
+            <a:pPr algn="l">
+              <a:lnSpc>
+                <a:spcPct val="115000"/>
+              </a:lnSpc>
+              <a:spcAft>
+                <a:spcPts val="400"/>
+              </a:spcAft>
+            </a:pPr>
+            <a:r>
+              <a:rPr sz="1000" b="0" i="0">
+                <a:solidFill>
+                  <a:srgbClr val="7F7F7F"/>
+                </a:solidFill>
+                <a:latin typeface="微软雅黑" panose="020B0503020204020204" charset="-122"/>
+                <a:ea typeface="微软雅黑" panose="020B0503020204020204" charset="-122"/>
+              </a:rPr>
+              <a:t>在线购物系统 · 第 1 次阶段性评审 · 项目组 9</a:t>
+            </a:r>
+            <a:endParaRPr sz="1000" b="0" i="0">
+              <a:solidFill>
+                <a:srgbClr val="7F7F7F"/>
+              </a:solidFill>
+              <a:latin typeface="微软雅黑" panose="020B0503020204020204" charset="-122"/>
+              <a:ea typeface="微软雅黑" panose="020B0503020204020204" charset="-122"/>
+            </a:endParaRPr>
+          </a:p>
+        </p:txBody>
+      </p:sp>
+      <p:sp>
+        <p:nvSpPr>
+          <p:cNvPr id="11" name="TextBox 10"/>
+          <p:cNvSpPr txBox="1"/>
+          <p:nvPr/>
+        </p:nvSpPr>
+        <p:spPr>
+          <a:xfrm>
+            <a:off x="11247120" y="6592824"/>
+            <a:ext cx="548640" cy="256032"/>
+          </a:xfrm>
+          <a:prstGeom prst="rect">
+            <a:avLst/>
+          </a:prstGeom>
+          <a:noFill/>
+        </p:spPr>
+        <p:txBody>
+          <a:bodyPr wrap="square" lIns="0" tIns="0" rIns="0" bIns="0" anchor="t">
+            <a:spAutoFit/>
+          </a:bodyPr>
+          <a:lstStyle/>
+          <a:p>
+            <a:pPr algn="r">
+              <a:lnSpc>
+                <a:spcPct val="115000"/>
+              </a:lnSpc>
+              <a:spcAft>
+                <a:spcPts val="400"/>
+              </a:spcAft>
+            </a:pPr>
+            <a:r>
+              <a:rPr sz="1000" b="1" i="0">
+                <a:solidFill>
+                  <a:srgbClr val="2E75B6"/>
+                </a:solidFill>
+                <a:latin typeface="微软雅黑" panose="020B0503020204020204" charset="-122"/>
+                <a:ea typeface="微软雅黑" panose="020B0503020204020204" charset="-122"/>
+              </a:rPr>
+              <a:t>10</a:t>
+            </a:r>
+            <a:endParaRPr sz="1000" b="1" i="0">
+              <a:solidFill>
+                <a:srgbClr val="2E75B6"/>
+              </a:solidFill>
+              <a:latin typeface="微软雅黑" panose="020B0503020204020204" charset="-122"/>
+              <a:ea typeface="微软雅黑" panose="020B0503020204020204" charset="-122"/>
+            </a:endParaRPr>
+          </a:p>
+        </p:txBody>
+      </p:sp>
+      <p:sp>
+        <p:nvSpPr>
+          <p:cNvPr id="12" name="Rounded Rectangle 11"/>
+          <p:cNvSpPr/>
+          <p:nvPr/>
+        </p:nvSpPr>
+        <p:spPr>
+          <a:xfrm>
+            <a:off x="10104120" y="320040"/>
+            <a:ext cx="1600200" cy="384048"/>
+          </a:xfrm>
+          <a:prstGeom prst="roundRect">
+            <a:avLst>
+              <a:gd name="adj" fmla="val 50000"/>
+            </a:avLst>
+          </a:prstGeom>
+          <a:solidFill>
+            <a:srgbClr val="DEEBF7"/>
+          </a:solidFill>
+          <a:ln>
+            <a:noFill/>
+          </a:ln>
+          <a:effectLst/>
+        </p:spPr>
+        <p:style>
+          <a:lnRef idx="1">
+            <a:schemeClr val="accent1"/>
+          </a:lnRef>
+          <a:fillRef idx="3">
+            <a:schemeClr val="accent1"/>
+          </a:fillRef>
+          <a:effectRef idx="2">
+            <a:schemeClr val="accent1"/>
+          </a:effectRef>
+          <a:fontRef idx="minor">
+            <a:schemeClr val="lt1"/>
+          </a:fontRef>
+        </p:style>
+        <p:txBody>
+          <a:bodyPr wrap="none" rtlCol="0" anchor="ctr"/>
+          <a:lstStyle/>
+          <a:p>
+            <a:pPr algn="ctr"/>
+            <a:r>
+              <a:rPr lang="zh-CN" sz="1100" b="1" i="0">
+                <a:solidFill>
+                  <a:srgbClr val="1F3864"/>
+                </a:solidFill>
+                <a:latin typeface="微软雅黑" panose="020B0503020204020204" charset="-122"/>
+                <a:ea typeface="微软雅黑" panose="020B0503020204020204" charset="-122"/>
+              </a:rPr>
+              <a:t>其他</a:t>
+            </a:r>
+            <a:r>
+              <a:rPr lang="zh-CN" sz="1100" b="1" i="0">
+                <a:solidFill>
+                  <a:srgbClr val="1F3864"/>
+                </a:solidFill>
+                <a:latin typeface="微软雅黑" panose="020B0503020204020204" charset="-122"/>
+                <a:ea typeface="微软雅黑" panose="020B0503020204020204" charset="-122"/>
+              </a:rPr>
+              <a:t>进展</a:t>
+            </a:r>
+            <a:endParaRPr lang="zh-CN" sz="1100" b="1" i="0">
+              <a:solidFill>
+                <a:srgbClr val="1F3864"/>
+              </a:solidFill>
+              <a:latin typeface="微软雅黑" panose="020B0503020204020204" charset="-122"/>
+              <a:ea typeface="微软雅黑" panose="020B0503020204020204" charset="-122"/>
+            </a:endParaRPr>
+          </a:p>
+        </p:txBody>
+      </p:sp>
+      <p:sp>
+        <p:nvSpPr>
+          <p:cNvPr id="16" name="文本框 15"/>
+          <p:cNvSpPr txBox="1"/>
+          <p:nvPr/>
+        </p:nvSpPr>
+        <p:spPr>
+          <a:xfrm>
+            <a:off x="725805" y="1753235"/>
+            <a:ext cx="5947410" cy="2306955"/>
+          </a:xfrm>
+          <a:prstGeom prst="rect">
+            <a:avLst/>
+          </a:prstGeom>
+          <a:noFill/>
+        </p:spPr>
+        <p:txBody>
+          <a:bodyPr wrap="square" rtlCol="0">
+            <a:spAutoFit/>
+          </a:bodyPr>
+          <a:p>
+            <a:r>
+              <a:rPr lang="zh-CN" altLang="en-US" sz="2400"/>
+              <a:t>问：卖家的账号是注册还是，直接指定</a:t>
+            </a:r>
+            <a:endParaRPr lang="zh-CN" altLang="en-US" sz="2400"/>
+          </a:p>
+          <a:p>
+            <a:r>
+              <a:rPr lang="zh-CN" altLang="en-US" sz="2400"/>
+              <a:t>答：@刘云炎</a:t>
+            </a:r>
+            <a:endParaRPr lang="zh-CN" altLang="en-US" sz="2400"/>
+          </a:p>
+          <a:p>
+            <a:r>
+              <a:rPr lang="zh-CN" altLang="en-US" sz="2400"/>
+              <a:t>直接指定的，就固定那一个账号，没有注册流程。整个系统是单卖家模式，只有我这一个账号，用用户名和密码登录后台就行，买家那边才是免注册。</a:t>
+            </a:r>
+            <a:endParaRPr lang="zh-CN" altLang="en-US" sz="2400"/>
+          </a:p>
+        </p:txBody>
+      </p:sp>
+      <p:pic>
+        <p:nvPicPr>
+          <p:cNvPr id="13" name="图片 12"/>
+          <p:cNvPicPr>
+            <a:picLocks noChangeAspect="1"/>
+          </p:cNvPicPr>
+          <p:nvPr/>
+        </p:nvPicPr>
+        <p:blipFill>
+          <a:blip r:embed="rId1"/>
+          <a:srcRect l="36358" t="25930" r="35565" b="13595"/>
+          <a:stretch>
+            <a:fillRect/>
+          </a:stretch>
+        </p:blipFill>
+        <p:spPr>
+          <a:xfrm>
+            <a:off x="7569200" y="1668780"/>
+            <a:ext cx="3528695" cy="3872865"/>
+          </a:xfrm>
+          <a:prstGeom prst="rect">
+            <a:avLst/>
+          </a:prstGeom>
+        </p:spPr>
+      </p:pic>
+      <p:sp>
+        <p:nvSpPr>
+          <p:cNvPr id="14" name="文本框 13"/>
+          <p:cNvSpPr txBox="1"/>
+          <p:nvPr/>
+        </p:nvSpPr>
+        <p:spPr>
+          <a:xfrm>
+            <a:off x="521335" y="960755"/>
+            <a:ext cx="1705610" cy="521970"/>
+          </a:xfrm>
+          <a:prstGeom prst="rect">
+            <a:avLst/>
+          </a:prstGeom>
+          <a:noFill/>
+        </p:spPr>
+        <p:txBody>
+          <a:bodyPr wrap="square" rtlCol="0">
+            <a:spAutoFit/>
+          </a:bodyPr>
+          <a:p>
+            <a:r>
+              <a:rPr lang="zh-CN" altLang="en-US" sz="2800" b="1">
+                <a:latin typeface="黑体" panose="02010609060101010101" charset="-122"/>
+                <a:ea typeface="黑体" panose="02010609060101010101" charset="-122"/>
+              </a:rPr>
+              <a:t>卖家端</a:t>
+            </a:r>
+            <a:endParaRPr lang="zh-CN" altLang="en-US" sz="2800" b="1">
+              <a:latin typeface="黑体" panose="02010609060101010101" charset="-122"/>
+              <a:ea typeface="黑体" panose="02010609060101010101" charset="-122"/>
+            </a:endParaRPr>
+          </a:p>
+        </p:txBody>
+      </p:sp>
+      <p:sp>
+        <p:nvSpPr>
+          <p:cNvPr id="48" name="Rounded Rectangle 30"/>
+          <p:cNvSpPr/>
+          <p:nvPr/>
+        </p:nvSpPr>
+        <p:spPr>
+          <a:xfrm>
+            <a:off x="716280" y="4330065"/>
+            <a:ext cx="5956935" cy="1376680"/>
+          </a:xfrm>
+          <a:prstGeom prst="roundRect">
+            <a:avLst/>
+          </a:prstGeom>
+          <a:solidFill>
+            <a:srgbClr val="FFFFFF"/>
+          </a:solidFill>
+          <a:ln w="19050">
+            <a:solidFill>
+              <a:srgbClr val="B8860B"/>
+            </a:solidFill>
+          </a:ln>
+          <a:effectLst/>
+        </p:spPr>
+        <p:style>
+          <a:lnRef idx="1">
+            <a:schemeClr val="accent1"/>
+          </a:lnRef>
+          <a:fillRef idx="3">
+            <a:schemeClr val="accent1"/>
+          </a:fillRef>
+          <a:effectRef idx="2">
+            <a:schemeClr val="accent1"/>
+          </a:effectRef>
+          <a:fontRef idx="minor">
+            <a:schemeClr val="lt1"/>
+          </a:fontRef>
+        </p:style>
+        <p:txBody>
+          <a:bodyPr rtlCol="0" anchor="ctr"/>
+          <a:lstStyle/>
+          <a:p>
+            <a:pPr algn="ctr"/>
+            <a:r>
+              <a:rPr lang="zh-CN" altLang="en-US">
+                <a:sym typeface="+mn-ea"/>
+              </a:rPr>
+              <a:t>先让空壳服务跑通再动业务，把表结构、改一次要返工一大片"的决策全部前置成文档</a:t>
+            </a:r>
+            <a:endParaRPr lang="zh-CN" altLang="en-US"/>
+          </a:p>
+          <a:p>
+            <a:pPr algn="ctr"/>
+            <a:endParaRPr lang="zh-CN" altLang="en-US"/>
+          </a:p>
+        </p:txBody>
+      </p:sp>
+      <p:sp>
+        <p:nvSpPr>
+          <p:cNvPr id="15" name="文本框 14"/>
+          <p:cNvSpPr txBox="1"/>
+          <p:nvPr/>
+        </p:nvSpPr>
+        <p:spPr>
+          <a:xfrm>
+            <a:off x="715645" y="4322445"/>
+            <a:ext cx="5957570" cy="1383665"/>
+          </a:xfrm>
+          <a:prstGeom prst="rect">
+            <a:avLst/>
+          </a:prstGeom>
+          <a:noFill/>
+        </p:spPr>
+        <p:txBody>
+          <a:bodyPr wrap="square" rtlCol="0">
+            <a:spAutoFit/>
+          </a:bodyPr>
+          <a:p>
+            <a:pPr indent="457200"/>
+            <a:r>
+              <a:rPr lang="zh-CN" altLang="en-US" sz="2800">
+                <a:latin typeface="黑体" panose="02010609060101010101" charset="-122"/>
+                <a:ea typeface="黑体" panose="02010609060101010101" charset="-122"/>
+              </a:rPr>
+              <a:t>根据以上需求澄清，知道卖家不需要有注册功能，只需要登录功能就能发表商品</a:t>
+            </a:r>
+            <a:endParaRPr lang="zh-CN" altLang="en-US" sz="2800">
+              <a:latin typeface="黑体" panose="02010609060101010101" charset="-122"/>
+              <a:ea typeface="黑体" panose="02010609060101010101" charset="-122"/>
+            </a:endParaRPr>
+          </a:p>
+        </p:txBody>
+      </p:sp>
+    </p:spTree>
+  </p:cSld>
+  <p:clrMapOvr>
+    <a:masterClrMapping/>
+  </p:clrMapOvr>
+</p:sld>
+</file>
+
+<file path=ppt/slides/slide21.xml><?xml version="1.0" encoding="utf-8"?>
+<p:sld xmlns:a="http://schemas.openxmlformats.org/drawingml/2006/main" xmlns:r="http://schemas.openxmlformats.org/officeDocument/2006/relationships" xmlns:p="http://schemas.openxmlformats.org/presentationml/2006/main">
+  <p:cSld>
+    <p:spTree>
+      <p:nvGrpSpPr>
+        <p:cNvPr id="1" name=""/>
+        <p:cNvGrpSpPr/>
+        <p:nvPr/>
+      </p:nvGrpSpPr>
+      <p:grpSpPr/>
+      <p:sp>
+        <p:nvSpPr>
+          <p:cNvPr id="2" name="Rectangle 1"/>
+          <p:cNvSpPr/>
+          <p:nvPr/>
+        </p:nvSpPr>
+        <p:spPr>
+          <a:xfrm>
+            <a:off x="0" y="0"/>
+            <a:ext cx="12191695" cy="6858000"/>
+          </a:xfrm>
+          <a:prstGeom prst="rect">
+            <a:avLst/>
+          </a:prstGeom>
+          <a:solidFill>
+            <a:srgbClr val="FFFFFF"/>
+          </a:solidFill>
+          <a:ln>
+            <a:noFill/>
+          </a:ln>
+          <a:effectLst/>
+        </p:spPr>
+        <p:style>
+          <a:lnRef idx="1">
+            <a:schemeClr val="accent1"/>
+          </a:lnRef>
+          <a:fillRef idx="3">
+            <a:schemeClr val="accent1"/>
+          </a:fillRef>
+          <a:effectRef idx="2">
+            <a:schemeClr val="accent1"/>
+          </a:effectRef>
+          <a:fontRef idx="minor">
+            <a:schemeClr val="lt1"/>
+          </a:fontRef>
+        </p:style>
+        <p:txBody>
+          <a:bodyPr rtlCol="0" anchor="ctr"/>
+          <a:lstStyle/>
+          <a:p>
+            <a:pPr algn="ctr"/>
+          </a:p>
+        </p:txBody>
+      </p:sp>
+      <p:sp>
+        <p:nvSpPr>
+          <p:cNvPr id="3" name="Rectangle 2"/>
+          <p:cNvSpPr/>
+          <p:nvPr/>
+        </p:nvSpPr>
+        <p:spPr>
+          <a:xfrm>
+            <a:off x="0" y="0"/>
+            <a:ext cx="12191695" cy="109728"/>
+          </a:xfrm>
+          <a:prstGeom prst="rect">
+            <a:avLst/>
+          </a:prstGeom>
+          <a:solidFill>
+            <a:srgbClr val="1F3864"/>
+          </a:solidFill>
+          <a:ln>
+            <a:noFill/>
+          </a:ln>
+          <a:effectLst/>
+        </p:spPr>
+        <p:style>
+          <a:lnRef idx="1">
+            <a:schemeClr val="accent1"/>
+          </a:lnRef>
+          <a:fillRef idx="3">
+            <a:schemeClr val="accent1"/>
+          </a:fillRef>
+          <a:effectRef idx="2">
+            <a:schemeClr val="accent1"/>
+          </a:effectRef>
+          <a:fontRef idx="minor">
+            <a:schemeClr val="lt1"/>
+          </a:fontRef>
+        </p:style>
+        <p:txBody>
+          <a:bodyPr rtlCol="0" anchor="ctr"/>
+          <a:lstStyle/>
+          <a:p>
+            <a:pPr algn="ctr"/>
+          </a:p>
+        </p:txBody>
+      </p:sp>
+      <p:sp>
+        <p:nvSpPr>
+          <p:cNvPr id="4" name="Rectangle 3"/>
+          <p:cNvSpPr/>
+          <p:nvPr/>
+        </p:nvSpPr>
+        <p:spPr>
+          <a:xfrm>
+            <a:off x="0" y="109728"/>
+            <a:ext cx="12191695" cy="27432"/>
+          </a:xfrm>
+          <a:prstGeom prst="rect">
+            <a:avLst/>
+          </a:prstGeom>
+          <a:solidFill>
+            <a:srgbClr val="B8860B"/>
+          </a:solidFill>
+          <a:ln>
+            <a:noFill/>
+          </a:ln>
+          <a:effectLst/>
+        </p:spPr>
+        <p:style>
+          <a:lnRef idx="1">
+            <a:schemeClr val="accent1"/>
+          </a:lnRef>
+          <a:fillRef idx="3">
+            <a:schemeClr val="accent1"/>
+          </a:fillRef>
+          <a:effectRef idx="2">
+            <a:schemeClr val="accent1"/>
+          </a:effectRef>
+          <a:fontRef idx="minor">
+            <a:schemeClr val="lt1"/>
+          </a:fontRef>
+        </p:style>
+        <p:txBody>
+          <a:bodyPr rtlCol="0" anchor="ctr"/>
+          <a:lstStyle/>
+          <a:p>
+            <a:pPr algn="ctr"/>
+          </a:p>
+        </p:txBody>
+      </p:sp>
+      <p:sp>
+        <p:nvSpPr>
+          <p:cNvPr id="5" name="TextBox 4"/>
+          <p:cNvSpPr txBox="1"/>
+          <p:nvPr/>
+        </p:nvSpPr>
+        <p:spPr>
+          <a:xfrm>
+            <a:off x="502920" y="292608"/>
+            <a:ext cx="9875520" cy="459740"/>
+          </a:xfrm>
+          <a:prstGeom prst="rect">
+            <a:avLst/>
+          </a:prstGeom>
+          <a:noFill/>
+        </p:spPr>
+        <p:txBody>
+          <a:bodyPr wrap="square" lIns="0" tIns="0" rIns="0" bIns="0" anchor="t">
+            <a:spAutoFit/>
+          </a:bodyPr>
+          <a:lstStyle/>
+          <a:p>
+            <a:pPr algn="l">
+              <a:lnSpc>
+                <a:spcPct val="115000"/>
+              </a:lnSpc>
+              <a:spcAft>
+                <a:spcPts val="400"/>
+              </a:spcAft>
+            </a:pPr>
+            <a:r>
+              <a:rPr lang="zh-CN" sz="2600" b="1" i="0">
+                <a:solidFill>
+                  <a:srgbClr val="1F3864"/>
+                </a:solidFill>
+                <a:latin typeface="微软雅黑" panose="020B0503020204020204" charset="-122"/>
+                <a:ea typeface="微软雅黑" panose="020B0503020204020204" charset="-122"/>
+              </a:rPr>
+              <a:t>前端</a:t>
+            </a:r>
+            <a:endParaRPr lang="zh-CN" sz="2600" b="1" i="0">
+              <a:solidFill>
+                <a:srgbClr val="1F3864"/>
+              </a:solidFill>
+              <a:latin typeface="微软雅黑" panose="020B0503020204020204" charset="-122"/>
+              <a:ea typeface="微软雅黑" panose="020B0503020204020204" charset="-122"/>
+            </a:endParaRPr>
+          </a:p>
+        </p:txBody>
+      </p:sp>
+      <p:sp>
+        <p:nvSpPr>
+          <p:cNvPr id="6" name="Rectangle 5"/>
+          <p:cNvSpPr/>
+          <p:nvPr/>
+        </p:nvSpPr>
+        <p:spPr>
+          <a:xfrm>
+            <a:off x="521207" y="896112"/>
+            <a:ext cx="502920" cy="45720"/>
+          </a:xfrm>
+          <a:prstGeom prst="rect">
+            <a:avLst/>
+          </a:prstGeom>
+          <a:solidFill>
+            <a:srgbClr val="B8860B"/>
+          </a:solidFill>
+          <a:ln>
+            <a:noFill/>
+          </a:ln>
+          <a:effectLst/>
+        </p:spPr>
+        <p:style>
+          <a:lnRef idx="1">
+            <a:schemeClr val="accent1"/>
+          </a:lnRef>
+          <a:fillRef idx="3">
+            <a:schemeClr val="accent1"/>
+          </a:fillRef>
+          <a:effectRef idx="2">
+            <a:schemeClr val="accent1"/>
+          </a:effectRef>
+          <a:fontRef idx="minor">
+            <a:schemeClr val="lt1"/>
+          </a:fontRef>
+        </p:style>
+        <p:txBody>
+          <a:bodyPr rtlCol="0" anchor="ctr"/>
+          <a:lstStyle/>
+          <a:p>
+            <a:pPr algn="ctr"/>
+          </a:p>
+        </p:txBody>
+      </p:sp>
+      <p:sp>
+        <p:nvSpPr>
+          <p:cNvPr id="7" name="Rectangle 6"/>
+          <p:cNvSpPr/>
+          <p:nvPr/>
+        </p:nvSpPr>
+        <p:spPr>
+          <a:xfrm>
+            <a:off x="1078992" y="896112"/>
+            <a:ext cx="10607040" cy="13716"/>
+          </a:xfrm>
+          <a:prstGeom prst="rect">
+            <a:avLst/>
+          </a:prstGeom>
+          <a:solidFill>
+            <a:srgbClr val="2E75B6"/>
+          </a:solidFill>
+          <a:ln>
+            <a:noFill/>
+          </a:ln>
+          <a:effectLst/>
+        </p:spPr>
+        <p:style>
+          <a:lnRef idx="1">
+            <a:schemeClr val="accent1"/>
+          </a:lnRef>
+          <a:fillRef idx="3">
+            <a:schemeClr val="accent1"/>
+          </a:fillRef>
+          <a:effectRef idx="2">
+            <a:schemeClr val="accent1"/>
+          </a:effectRef>
+          <a:fontRef idx="minor">
+            <a:schemeClr val="lt1"/>
+          </a:fontRef>
+        </p:style>
+        <p:txBody>
+          <a:bodyPr rtlCol="0" anchor="ctr"/>
+          <a:lstStyle/>
+          <a:p>
+            <a:pPr algn="ctr"/>
+          </a:p>
+        </p:txBody>
+      </p:sp>
+      <p:sp>
+        <p:nvSpPr>
+          <p:cNvPr id="9" name="Rectangle 8"/>
+          <p:cNvSpPr/>
+          <p:nvPr/>
+        </p:nvSpPr>
+        <p:spPr>
+          <a:xfrm>
+            <a:off x="0" y="6565392"/>
+            <a:ext cx="12191695" cy="292608"/>
+          </a:xfrm>
+          <a:prstGeom prst="rect">
+            <a:avLst/>
+          </a:prstGeom>
+          <a:solidFill>
+            <a:srgbClr val="EEF4FB"/>
+          </a:solidFill>
+          <a:ln>
+            <a:noFill/>
+          </a:ln>
+          <a:effectLst/>
+        </p:spPr>
+        <p:style>
+          <a:lnRef idx="1">
+            <a:schemeClr val="accent1"/>
+          </a:lnRef>
+          <a:fillRef idx="3">
+            <a:schemeClr val="accent1"/>
+          </a:fillRef>
+          <a:effectRef idx="2">
+            <a:schemeClr val="accent1"/>
+          </a:effectRef>
+          <a:fontRef idx="minor">
+            <a:schemeClr val="lt1"/>
+          </a:fontRef>
+        </p:style>
+        <p:txBody>
+          <a:bodyPr rtlCol="0" anchor="ctr"/>
+          <a:lstStyle/>
+          <a:p>
+            <a:pPr algn="ctr"/>
+          </a:p>
+        </p:txBody>
+      </p:sp>
+      <p:sp>
+        <p:nvSpPr>
+          <p:cNvPr id="10" name="TextBox 9"/>
+          <p:cNvSpPr txBox="1"/>
+          <p:nvPr/>
+        </p:nvSpPr>
+        <p:spPr>
+          <a:xfrm>
+            <a:off x="502920" y="6592824"/>
+            <a:ext cx="7315200" cy="176530"/>
+          </a:xfrm>
+          <a:prstGeom prst="rect">
+            <a:avLst/>
+          </a:prstGeom>
+          <a:noFill/>
+        </p:spPr>
+        <p:txBody>
+          <a:bodyPr wrap="square" lIns="0" tIns="0" rIns="0" bIns="0" anchor="t">
+            <a:spAutoFit/>
+          </a:bodyPr>
+          <a:lstStyle/>
+          <a:p>
+            <a:pPr algn="l">
+              <a:lnSpc>
+                <a:spcPct val="115000"/>
+              </a:lnSpc>
+              <a:spcAft>
+                <a:spcPts val="400"/>
+              </a:spcAft>
+            </a:pPr>
+            <a:r>
+              <a:rPr sz="1000" b="0" i="0">
+                <a:solidFill>
+                  <a:srgbClr val="7F7F7F"/>
+                </a:solidFill>
+                <a:latin typeface="微软雅黑" panose="020B0503020204020204" charset="-122"/>
+                <a:ea typeface="微软雅黑" panose="020B0503020204020204" charset="-122"/>
+              </a:rPr>
+              <a:t>在线购物系统 · 第 1 次阶段性评审 · 项目组 9</a:t>
+            </a:r>
+            <a:endParaRPr sz="1000" b="0" i="0">
+              <a:solidFill>
+                <a:srgbClr val="7F7F7F"/>
+              </a:solidFill>
+              <a:latin typeface="微软雅黑" panose="020B0503020204020204" charset="-122"/>
+              <a:ea typeface="微软雅黑" panose="020B0503020204020204" charset="-122"/>
+            </a:endParaRPr>
+          </a:p>
+        </p:txBody>
+      </p:sp>
+      <p:sp>
+        <p:nvSpPr>
+          <p:cNvPr id="11" name="TextBox 10"/>
+          <p:cNvSpPr txBox="1"/>
+          <p:nvPr/>
+        </p:nvSpPr>
+        <p:spPr>
+          <a:xfrm>
+            <a:off x="11247120" y="6592824"/>
+            <a:ext cx="548640" cy="256032"/>
+          </a:xfrm>
+          <a:prstGeom prst="rect">
+            <a:avLst/>
+          </a:prstGeom>
+          <a:noFill/>
+        </p:spPr>
+        <p:txBody>
+          <a:bodyPr wrap="square" lIns="0" tIns="0" rIns="0" bIns="0" anchor="t">
+            <a:spAutoFit/>
+          </a:bodyPr>
+          <a:lstStyle/>
+          <a:p>
+            <a:pPr algn="r">
+              <a:lnSpc>
+                <a:spcPct val="115000"/>
+              </a:lnSpc>
+              <a:spcAft>
+                <a:spcPts val="400"/>
+              </a:spcAft>
+            </a:pPr>
+            <a:r>
+              <a:rPr sz="1000" b="1" i="0">
+                <a:solidFill>
+                  <a:srgbClr val="2E75B6"/>
+                </a:solidFill>
+                <a:latin typeface="微软雅黑" panose="020B0503020204020204" charset="-122"/>
+                <a:ea typeface="微软雅黑" panose="020B0503020204020204" charset="-122"/>
+              </a:rPr>
+              <a:t>10</a:t>
+            </a:r>
+            <a:endParaRPr sz="1000" b="1" i="0">
+              <a:solidFill>
+                <a:srgbClr val="2E75B6"/>
+              </a:solidFill>
+              <a:latin typeface="微软雅黑" panose="020B0503020204020204" charset="-122"/>
+              <a:ea typeface="微软雅黑" panose="020B0503020204020204" charset="-122"/>
+            </a:endParaRPr>
+          </a:p>
+        </p:txBody>
+      </p:sp>
+      <p:sp>
+        <p:nvSpPr>
+          <p:cNvPr id="12" name="Rounded Rectangle 11"/>
+          <p:cNvSpPr/>
+          <p:nvPr/>
+        </p:nvSpPr>
+        <p:spPr>
+          <a:xfrm>
+            <a:off x="10104120" y="320040"/>
+            <a:ext cx="1600200" cy="384048"/>
+          </a:xfrm>
+          <a:prstGeom prst="roundRect">
+            <a:avLst>
+              <a:gd name="adj" fmla="val 50000"/>
+            </a:avLst>
+          </a:prstGeom>
+          <a:solidFill>
+            <a:srgbClr val="DEEBF7"/>
+          </a:solidFill>
+          <a:ln>
+            <a:noFill/>
+          </a:ln>
+          <a:effectLst/>
+        </p:spPr>
+        <p:style>
+          <a:lnRef idx="1">
+            <a:schemeClr val="accent1"/>
+          </a:lnRef>
+          <a:fillRef idx="3">
+            <a:schemeClr val="accent1"/>
+          </a:fillRef>
+          <a:effectRef idx="2">
+            <a:schemeClr val="accent1"/>
+          </a:effectRef>
+          <a:fontRef idx="minor">
+            <a:schemeClr val="lt1"/>
+          </a:fontRef>
+        </p:style>
+        <p:txBody>
+          <a:bodyPr wrap="none" rtlCol="0" anchor="ctr"/>
+          <a:lstStyle/>
+          <a:p>
+            <a:pPr algn="ctr"/>
+            <a:r>
+              <a:rPr lang="zh-CN" sz="1100" b="1" i="0">
+                <a:solidFill>
+                  <a:srgbClr val="1F3864"/>
+                </a:solidFill>
+                <a:latin typeface="微软雅黑" panose="020B0503020204020204" charset="-122"/>
+                <a:ea typeface="微软雅黑" panose="020B0503020204020204" charset="-122"/>
+              </a:rPr>
+              <a:t>其他</a:t>
+            </a:r>
+            <a:r>
+              <a:rPr lang="zh-CN" sz="1100" b="1" i="0">
+                <a:solidFill>
+                  <a:srgbClr val="1F3864"/>
+                </a:solidFill>
+                <a:latin typeface="微软雅黑" panose="020B0503020204020204" charset="-122"/>
+                <a:ea typeface="微软雅黑" panose="020B0503020204020204" charset="-122"/>
+              </a:rPr>
+              <a:t>进展</a:t>
+            </a:r>
+            <a:endParaRPr lang="zh-CN" sz="1100" b="1" i="0">
+              <a:solidFill>
+                <a:srgbClr val="1F3864"/>
+              </a:solidFill>
+              <a:latin typeface="微软雅黑" panose="020B0503020204020204" charset="-122"/>
+              <a:ea typeface="微软雅黑" panose="020B0503020204020204" charset="-122"/>
+            </a:endParaRPr>
+          </a:p>
+        </p:txBody>
+      </p:sp>
+      <p:pic>
+        <p:nvPicPr>
+          <p:cNvPr id="17" name="图片 16"/>
+          <p:cNvPicPr>
+            <a:picLocks noChangeAspect="1"/>
+          </p:cNvPicPr>
+          <p:nvPr/>
+        </p:nvPicPr>
+        <p:blipFill>
+          <a:blip r:embed="rId1"/>
+          <a:srcRect r="36065" b="17234"/>
+          <a:stretch>
+            <a:fillRect/>
+          </a:stretch>
+        </p:blipFill>
+        <p:spPr>
+          <a:xfrm>
+            <a:off x="5942965" y="1611630"/>
+            <a:ext cx="5542915" cy="3625850"/>
+          </a:xfrm>
+          <a:prstGeom prst="rect">
+            <a:avLst/>
+          </a:prstGeom>
+        </p:spPr>
+      </p:pic>
+      <p:sp>
+        <p:nvSpPr>
+          <p:cNvPr id="18" name="文本框 17"/>
+          <p:cNvSpPr txBox="1"/>
+          <p:nvPr/>
+        </p:nvSpPr>
+        <p:spPr>
+          <a:xfrm>
+            <a:off x="520700" y="1101725"/>
+            <a:ext cx="5064125" cy="2676525"/>
+          </a:xfrm>
+          <a:prstGeom prst="rect">
+            <a:avLst/>
+          </a:prstGeom>
+          <a:noFill/>
+        </p:spPr>
+        <p:txBody>
+          <a:bodyPr wrap="square" rtlCol="0">
+            <a:spAutoFit/>
+          </a:bodyPr>
+          <a:p>
+            <a:r>
+              <a:rPr lang="zh-CN" altLang="en-US" sz="2400"/>
+              <a:t>根据丁月诚的需求澄清，下架有两条路径：</a:t>
+            </a:r>
+            <a:endParaRPr lang="zh-CN" altLang="en-US" sz="2400"/>
+          </a:p>
+          <a:p>
+            <a:r>
+              <a:rPr lang="en-US" altLang="zh-CN" sz="2400"/>
+              <a:t>1.</a:t>
+            </a:r>
+            <a:r>
+              <a:rPr lang="zh-CN" altLang="en-US" sz="2400"/>
+              <a:t>交易成功：商品从「已冻结」直接转「已下架」；</a:t>
+            </a:r>
+            <a:endParaRPr lang="zh-CN" altLang="en-US" sz="2400"/>
+          </a:p>
+          <a:p>
+            <a:r>
+              <a:rPr lang="en-US" altLang="zh-CN" sz="2400"/>
+              <a:t>2.</a:t>
+            </a:r>
+            <a:r>
+              <a:rPr lang="zh-CN" altLang="en-US" sz="2400"/>
+              <a:t>手动下架：商品还在「在售」状态时，卖家主动把它撤下（比如为了腾位置发布新商品）。</a:t>
+            </a:r>
+            <a:endParaRPr lang="zh-CN" altLang="en-US" sz="2400"/>
+          </a:p>
+        </p:txBody>
+      </p:sp>
+      <p:sp>
+        <p:nvSpPr>
+          <p:cNvPr id="19" name="文本框 18"/>
+          <p:cNvSpPr txBox="1"/>
+          <p:nvPr/>
+        </p:nvSpPr>
+        <p:spPr>
+          <a:xfrm>
+            <a:off x="521335" y="3764280"/>
+            <a:ext cx="5063490" cy="2338705"/>
+          </a:xfrm>
+          <a:prstGeom prst="rect">
+            <a:avLst/>
+          </a:prstGeom>
+          <a:noFill/>
+        </p:spPr>
+        <p:txBody>
+          <a:bodyPr wrap="square" rtlCol="0">
+            <a:noAutofit/>
+          </a:bodyPr>
+          <a:p>
+            <a:r>
+              <a:rPr lang="zh-CN" altLang="en-US" sz="2400"/>
+              <a:t>根据周到的需求澄清，冻结有两条路，走的是同一个状态：一条是自动的——商品一进入交易（我选定跟某个人线下谈的时候），系统自动把它从"在售"转成"已冻结"；另一条是我在后台手动冻结。</a:t>
+            </a:r>
+            <a:endParaRPr lang="zh-CN" altLang="en-US" sz="2400"/>
+          </a:p>
+        </p:txBody>
+      </p:sp>
+      <p:cxnSp>
+        <p:nvCxnSpPr>
+          <p:cNvPr id="20" name="直接连接符 19"/>
+          <p:cNvCxnSpPr/>
+          <p:nvPr/>
+        </p:nvCxnSpPr>
+        <p:spPr>
+          <a:xfrm>
+            <a:off x="536575" y="3753485"/>
+            <a:ext cx="5236210" cy="0"/>
+          </a:xfrm>
+          <a:prstGeom prst="line">
+            <a:avLst/>
+          </a:prstGeom>
+        </p:spPr>
+        <p:style>
+          <a:lnRef idx="2">
+            <a:schemeClr val="accent1"/>
+          </a:lnRef>
+          <a:fillRef idx="0">
+            <a:schemeClr val="accent1"/>
+          </a:fillRef>
+          <a:effectRef idx="1">
+            <a:schemeClr val="accent1"/>
+          </a:effectRef>
+          <a:fontRef idx="minor">
+            <a:schemeClr val="tx1"/>
+          </a:fontRef>
+        </p:style>
+      </p:cxnSp>
+      <p:cxnSp>
+        <p:nvCxnSpPr>
+          <p:cNvPr id="21" name="直接连接符 20"/>
+          <p:cNvCxnSpPr/>
+          <p:nvPr/>
+        </p:nvCxnSpPr>
+        <p:spPr>
+          <a:xfrm flipH="1">
+            <a:off x="502920" y="1101725"/>
+            <a:ext cx="17780" cy="5001260"/>
+          </a:xfrm>
+          <a:prstGeom prst="line">
+            <a:avLst/>
+          </a:prstGeom>
+        </p:spPr>
+        <p:style>
+          <a:lnRef idx="2">
+            <a:schemeClr val="accent1"/>
+          </a:lnRef>
+          <a:fillRef idx="0">
+            <a:schemeClr val="accent1"/>
+          </a:fillRef>
+          <a:effectRef idx="1">
+            <a:schemeClr val="accent1"/>
+          </a:effectRef>
+          <a:fontRef idx="minor">
+            <a:schemeClr val="tx1"/>
+          </a:fontRef>
+        </p:style>
+      </p:cxnSp>
+      <p:cxnSp>
+        <p:nvCxnSpPr>
+          <p:cNvPr id="22" name="直接连接符 21"/>
+          <p:cNvCxnSpPr/>
+          <p:nvPr/>
+        </p:nvCxnSpPr>
+        <p:spPr>
+          <a:xfrm>
+            <a:off x="5772785" y="1158240"/>
+            <a:ext cx="0" cy="4944745"/>
+          </a:xfrm>
+          <a:prstGeom prst="line">
+            <a:avLst/>
+          </a:prstGeom>
+        </p:spPr>
+        <p:style>
+          <a:lnRef idx="2">
+            <a:schemeClr val="accent1"/>
+          </a:lnRef>
+          <a:fillRef idx="0">
+            <a:schemeClr val="accent1"/>
+          </a:fillRef>
+          <a:effectRef idx="1">
+            <a:schemeClr val="accent1"/>
+          </a:effectRef>
+          <a:fontRef idx="minor">
+            <a:schemeClr val="tx1"/>
+          </a:fontRef>
+        </p:style>
+      </p:cxnSp>
+    </p:spTree>
+  </p:cSld>
+  <p:clrMapOvr>
+    <a:masterClrMapping/>
+  </p:clrMapOvr>
+</p:sld>
+</file>
+
+<file path=ppt/slides/slide22.xml><?xml version="1.0" encoding="utf-8"?>
+<p:sld xmlns:a="http://schemas.openxmlformats.org/drawingml/2006/main" xmlns:r="http://schemas.openxmlformats.org/officeDocument/2006/relationships" xmlns:p="http://schemas.openxmlformats.org/presentationml/2006/main">
+  <p:cSld>
+    <p:spTree>
+      <p:nvGrpSpPr>
+        <p:cNvPr id="1" name=""/>
+        <p:cNvGrpSpPr/>
+        <p:nvPr/>
+      </p:nvGrpSpPr>
+      <p:grpSpPr/>
+      <p:sp>
+        <p:nvSpPr>
+          <p:cNvPr id="2" name="Rectangle 1"/>
+          <p:cNvSpPr/>
+          <p:nvPr/>
+        </p:nvSpPr>
+        <p:spPr>
+          <a:xfrm>
+            <a:off x="0" y="0"/>
+            <a:ext cx="12191695" cy="6858000"/>
+          </a:xfrm>
+          <a:prstGeom prst="rect">
+            <a:avLst/>
+          </a:prstGeom>
+          <a:solidFill>
+            <a:srgbClr val="FFFFFF"/>
+          </a:solidFill>
+          <a:ln>
+            <a:noFill/>
+          </a:ln>
+          <a:effectLst/>
+        </p:spPr>
+        <p:style>
+          <a:lnRef idx="1">
+            <a:schemeClr val="accent1"/>
+          </a:lnRef>
+          <a:fillRef idx="3">
+            <a:schemeClr val="accent1"/>
+          </a:fillRef>
+          <a:effectRef idx="2">
+            <a:schemeClr val="accent1"/>
+          </a:effectRef>
+          <a:fontRef idx="minor">
+            <a:schemeClr val="lt1"/>
+          </a:fontRef>
+        </p:style>
+        <p:txBody>
+          <a:bodyPr rtlCol="0" anchor="ctr"/>
+          <a:lstStyle/>
+          <a:p>
+            <a:pPr algn="ctr"/>
+          </a:p>
+        </p:txBody>
+      </p:sp>
+      <p:sp>
+        <p:nvSpPr>
+          <p:cNvPr id="3" name="Rectangle 2"/>
+          <p:cNvSpPr/>
+          <p:nvPr/>
+        </p:nvSpPr>
+        <p:spPr>
+          <a:xfrm>
+            <a:off x="0" y="0"/>
+            <a:ext cx="12191695" cy="109728"/>
+          </a:xfrm>
+          <a:prstGeom prst="rect">
+            <a:avLst/>
+          </a:prstGeom>
+          <a:solidFill>
+            <a:srgbClr val="1F3864"/>
+          </a:solidFill>
+          <a:ln>
+            <a:noFill/>
+          </a:ln>
+          <a:effectLst/>
+        </p:spPr>
+        <p:style>
+          <a:lnRef idx="1">
+            <a:schemeClr val="accent1"/>
+          </a:lnRef>
+          <a:fillRef idx="3">
+            <a:schemeClr val="accent1"/>
+          </a:fillRef>
+          <a:effectRef idx="2">
+            <a:schemeClr val="accent1"/>
+          </a:effectRef>
+          <a:fontRef idx="minor">
+            <a:schemeClr val="lt1"/>
+          </a:fontRef>
+        </p:style>
+        <p:txBody>
+          <a:bodyPr rtlCol="0" anchor="ctr"/>
+          <a:lstStyle/>
+          <a:p>
+            <a:pPr algn="ctr"/>
+          </a:p>
+        </p:txBody>
+      </p:sp>
+      <p:sp>
+        <p:nvSpPr>
+          <p:cNvPr id="4" name="Rectangle 3"/>
+          <p:cNvSpPr/>
+          <p:nvPr/>
+        </p:nvSpPr>
+        <p:spPr>
+          <a:xfrm>
+            <a:off x="0" y="109728"/>
+            <a:ext cx="12191695" cy="27432"/>
+          </a:xfrm>
+          <a:prstGeom prst="rect">
+            <a:avLst/>
+          </a:prstGeom>
+          <a:solidFill>
+            <a:srgbClr val="B8860B"/>
+          </a:solidFill>
+          <a:ln>
+            <a:noFill/>
+          </a:ln>
+          <a:effectLst/>
+        </p:spPr>
+        <p:style>
+          <a:lnRef idx="1">
+            <a:schemeClr val="accent1"/>
+          </a:lnRef>
+          <a:fillRef idx="3">
+            <a:schemeClr val="accent1"/>
+          </a:fillRef>
+          <a:effectRef idx="2">
+            <a:schemeClr val="accent1"/>
+          </a:effectRef>
+          <a:fontRef idx="minor">
+            <a:schemeClr val="lt1"/>
+          </a:fontRef>
+        </p:style>
+        <p:txBody>
+          <a:bodyPr rtlCol="0" anchor="ctr"/>
+          <a:lstStyle/>
+          <a:p>
+            <a:pPr algn="ctr"/>
+          </a:p>
+        </p:txBody>
+      </p:sp>
+      <p:sp>
+        <p:nvSpPr>
+          <p:cNvPr id="5" name="TextBox 4"/>
+          <p:cNvSpPr txBox="1"/>
+          <p:nvPr/>
+        </p:nvSpPr>
+        <p:spPr>
+          <a:xfrm>
+            <a:off x="502920" y="292608"/>
+            <a:ext cx="9875520" cy="459740"/>
+          </a:xfrm>
+          <a:prstGeom prst="rect">
+            <a:avLst/>
+          </a:prstGeom>
+          <a:noFill/>
+        </p:spPr>
+        <p:txBody>
+          <a:bodyPr wrap="square" lIns="0" tIns="0" rIns="0" bIns="0" anchor="t">
+            <a:spAutoFit/>
+          </a:bodyPr>
+          <a:lstStyle/>
+          <a:p>
+            <a:pPr algn="l">
+              <a:lnSpc>
+                <a:spcPct val="115000"/>
+              </a:lnSpc>
+              <a:spcAft>
+                <a:spcPts val="400"/>
+              </a:spcAft>
+            </a:pPr>
+            <a:r>
+              <a:rPr lang="zh-CN" sz="2600" b="1" i="0">
+                <a:solidFill>
+                  <a:srgbClr val="1F3864"/>
+                </a:solidFill>
+                <a:latin typeface="微软雅黑" panose="020B0503020204020204" charset="-122"/>
+                <a:ea typeface="微软雅黑" panose="020B0503020204020204" charset="-122"/>
+              </a:rPr>
+              <a:t>前端</a:t>
+            </a:r>
+            <a:endParaRPr lang="zh-CN" sz="2600" b="1" i="0">
+              <a:solidFill>
+                <a:srgbClr val="1F3864"/>
+              </a:solidFill>
+              <a:latin typeface="微软雅黑" panose="020B0503020204020204" charset="-122"/>
+              <a:ea typeface="微软雅黑" panose="020B0503020204020204" charset="-122"/>
+            </a:endParaRPr>
+          </a:p>
+        </p:txBody>
+      </p:sp>
+      <p:sp>
+        <p:nvSpPr>
+          <p:cNvPr id="6" name="Rectangle 5"/>
+          <p:cNvSpPr/>
+          <p:nvPr/>
+        </p:nvSpPr>
+        <p:spPr>
+          <a:xfrm>
+            <a:off x="521207" y="896112"/>
+            <a:ext cx="502920" cy="45720"/>
+          </a:xfrm>
+          <a:prstGeom prst="rect">
+            <a:avLst/>
+          </a:prstGeom>
+          <a:solidFill>
+            <a:srgbClr val="B8860B"/>
+          </a:solidFill>
+          <a:ln>
+            <a:noFill/>
+          </a:ln>
+          <a:effectLst/>
+        </p:spPr>
+        <p:style>
+          <a:lnRef idx="1">
+            <a:schemeClr val="accent1"/>
+          </a:lnRef>
+          <a:fillRef idx="3">
+            <a:schemeClr val="accent1"/>
+          </a:fillRef>
+          <a:effectRef idx="2">
+            <a:schemeClr val="accent1"/>
+          </a:effectRef>
+          <a:fontRef idx="minor">
+            <a:schemeClr val="lt1"/>
+          </a:fontRef>
+        </p:style>
+        <p:txBody>
+          <a:bodyPr rtlCol="0" anchor="ctr"/>
+          <a:lstStyle/>
+          <a:p>
+            <a:pPr algn="ctr"/>
+          </a:p>
+        </p:txBody>
+      </p:sp>
+      <p:sp>
+        <p:nvSpPr>
+          <p:cNvPr id="7" name="Rectangle 6"/>
+          <p:cNvSpPr/>
+          <p:nvPr/>
+        </p:nvSpPr>
+        <p:spPr>
+          <a:xfrm>
+            <a:off x="1078992" y="896112"/>
+            <a:ext cx="10607040" cy="13716"/>
+          </a:xfrm>
+          <a:prstGeom prst="rect">
+            <a:avLst/>
+          </a:prstGeom>
+          <a:solidFill>
+            <a:srgbClr val="2E75B6"/>
+          </a:solidFill>
+          <a:ln>
+            <a:noFill/>
+          </a:ln>
+          <a:effectLst/>
+        </p:spPr>
+        <p:style>
+          <a:lnRef idx="1">
+            <a:schemeClr val="accent1"/>
+          </a:lnRef>
+          <a:fillRef idx="3">
+            <a:schemeClr val="accent1"/>
+          </a:fillRef>
+          <a:effectRef idx="2">
+            <a:schemeClr val="accent1"/>
+          </a:effectRef>
+          <a:fontRef idx="minor">
+            <a:schemeClr val="lt1"/>
+          </a:fontRef>
+        </p:style>
+        <p:txBody>
+          <a:bodyPr rtlCol="0" anchor="ctr"/>
+          <a:lstStyle/>
+          <a:p>
+            <a:pPr algn="ctr"/>
+          </a:p>
+        </p:txBody>
+      </p:sp>
+      <p:sp>
+        <p:nvSpPr>
+          <p:cNvPr id="9" name="Rectangle 8"/>
+          <p:cNvSpPr/>
+          <p:nvPr/>
+        </p:nvSpPr>
+        <p:spPr>
+          <a:xfrm>
+            <a:off x="0" y="6565392"/>
+            <a:ext cx="12191695" cy="292608"/>
+          </a:xfrm>
+          <a:prstGeom prst="rect">
+            <a:avLst/>
+          </a:prstGeom>
+          <a:solidFill>
+            <a:srgbClr val="EEF4FB"/>
+          </a:solidFill>
+          <a:ln>
+            <a:noFill/>
+          </a:ln>
+          <a:effectLst/>
+        </p:spPr>
+        <p:style>
+          <a:lnRef idx="1">
+            <a:schemeClr val="accent1"/>
+          </a:lnRef>
+          <a:fillRef idx="3">
+            <a:schemeClr val="accent1"/>
+          </a:fillRef>
+          <a:effectRef idx="2">
+            <a:schemeClr val="accent1"/>
+          </a:effectRef>
+          <a:fontRef idx="minor">
+            <a:schemeClr val="lt1"/>
+          </a:fontRef>
+        </p:style>
+        <p:txBody>
+          <a:bodyPr rtlCol="0" anchor="ctr"/>
+          <a:lstStyle/>
+          <a:p>
+            <a:pPr algn="ctr"/>
+          </a:p>
+        </p:txBody>
+      </p:sp>
+      <p:sp>
+        <p:nvSpPr>
+          <p:cNvPr id="10" name="TextBox 9"/>
+          <p:cNvSpPr txBox="1"/>
+          <p:nvPr/>
+        </p:nvSpPr>
+        <p:spPr>
+          <a:xfrm>
+            <a:off x="502920" y="6592824"/>
+            <a:ext cx="7315200" cy="176530"/>
+          </a:xfrm>
+          <a:prstGeom prst="rect">
+            <a:avLst/>
+          </a:prstGeom>
+          <a:noFill/>
+        </p:spPr>
+        <p:txBody>
+          <a:bodyPr wrap="square" lIns="0" tIns="0" rIns="0" bIns="0" anchor="t">
+            <a:spAutoFit/>
+          </a:bodyPr>
+          <a:lstStyle/>
+          <a:p>
+            <a:pPr algn="l">
+              <a:lnSpc>
+                <a:spcPct val="115000"/>
+              </a:lnSpc>
+              <a:spcAft>
+                <a:spcPts val="400"/>
+              </a:spcAft>
+            </a:pPr>
+            <a:r>
+              <a:rPr sz="1000" b="0" i="0">
+                <a:solidFill>
+                  <a:srgbClr val="7F7F7F"/>
+                </a:solidFill>
+                <a:latin typeface="微软雅黑" panose="020B0503020204020204" charset="-122"/>
+                <a:ea typeface="微软雅黑" panose="020B0503020204020204" charset="-122"/>
+              </a:rPr>
+              <a:t>在线购物系统 · 第 1 次阶段性评审 · 项目组 9</a:t>
+            </a:r>
+            <a:endParaRPr sz="1000" b="0" i="0">
+              <a:solidFill>
+                <a:srgbClr val="7F7F7F"/>
+              </a:solidFill>
+              <a:latin typeface="微软雅黑" panose="020B0503020204020204" charset="-122"/>
+              <a:ea typeface="微软雅黑" panose="020B0503020204020204" charset="-122"/>
+            </a:endParaRPr>
+          </a:p>
+        </p:txBody>
+      </p:sp>
+      <p:sp>
+        <p:nvSpPr>
+          <p:cNvPr id="11" name="TextBox 10"/>
+          <p:cNvSpPr txBox="1"/>
+          <p:nvPr/>
+        </p:nvSpPr>
+        <p:spPr>
+          <a:xfrm>
+            <a:off x="11247120" y="6592824"/>
+            <a:ext cx="548640" cy="256032"/>
+          </a:xfrm>
+          <a:prstGeom prst="rect">
+            <a:avLst/>
+          </a:prstGeom>
+          <a:noFill/>
+        </p:spPr>
+        <p:txBody>
+          <a:bodyPr wrap="square" lIns="0" tIns="0" rIns="0" bIns="0" anchor="t">
+            <a:spAutoFit/>
+          </a:bodyPr>
+          <a:lstStyle/>
+          <a:p>
+            <a:pPr algn="r">
+              <a:lnSpc>
+                <a:spcPct val="115000"/>
+              </a:lnSpc>
+              <a:spcAft>
+                <a:spcPts val="400"/>
+              </a:spcAft>
+            </a:pPr>
+            <a:r>
+              <a:rPr sz="1000" b="1" i="0">
+                <a:solidFill>
+                  <a:srgbClr val="2E75B6"/>
+                </a:solidFill>
+                <a:latin typeface="微软雅黑" panose="020B0503020204020204" charset="-122"/>
+                <a:ea typeface="微软雅黑" panose="020B0503020204020204" charset="-122"/>
+              </a:rPr>
+              <a:t>10</a:t>
+            </a:r>
+            <a:endParaRPr sz="1000" b="1" i="0">
+              <a:solidFill>
+                <a:srgbClr val="2E75B6"/>
+              </a:solidFill>
+              <a:latin typeface="微软雅黑" panose="020B0503020204020204" charset="-122"/>
+              <a:ea typeface="微软雅黑" panose="020B0503020204020204" charset="-122"/>
+            </a:endParaRPr>
+          </a:p>
+        </p:txBody>
+      </p:sp>
+      <p:sp>
+        <p:nvSpPr>
+          <p:cNvPr id="12" name="Rounded Rectangle 11"/>
+          <p:cNvSpPr/>
+          <p:nvPr/>
+        </p:nvSpPr>
+        <p:spPr>
+          <a:xfrm>
+            <a:off x="10104120" y="320040"/>
+            <a:ext cx="1600200" cy="384048"/>
+          </a:xfrm>
+          <a:prstGeom prst="roundRect">
+            <a:avLst>
+              <a:gd name="adj" fmla="val 50000"/>
+            </a:avLst>
+          </a:prstGeom>
+          <a:solidFill>
+            <a:srgbClr val="DEEBF7"/>
+          </a:solidFill>
+          <a:ln>
+            <a:noFill/>
+          </a:ln>
+          <a:effectLst/>
+        </p:spPr>
+        <p:style>
+          <a:lnRef idx="1">
+            <a:schemeClr val="accent1"/>
+          </a:lnRef>
+          <a:fillRef idx="3">
+            <a:schemeClr val="accent1"/>
+          </a:fillRef>
+          <a:effectRef idx="2">
+            <a:schemeClr val="accent1"/>
+          </a:effectRef>
+          <a:fontRef idx="minor">
+            <a:schemeClr val="lt1"/>
+          </a:fontRef>
+        </p:style>
+        <p:txBody>
+          <a:bodyPr wrap="none" rtlCol="0" anchor="ctr"/>
+          <a:lstStyle/>
+          <a:p>
+            <a:pPr algn="ctr"/>
+            <a:r>
+              <a:rPr lang="zh-CN" sz="1100" b="1" i="0">
+                <a:solidFill>
+                  <a:srgbClr val="1F3864"/>
+                </a:solidFill>
+                <a:latin typeface="微软雅黑" panose="020B0503020204020204" charset="-122"/>
+                <a:ea typeface="微软雅黑" panose="020B0503020204020204" charset="-122"/>
+              </a:rPr>
+              <a:t>其他</a:t>
+            </a:r>
+            <a:r>
+              <a:rPr lang="zh-CN" sz="1100" b="1" i="0">
+                <a:solidFill>
+                  <a:srgbClr val="1F3864"/>
+                </a:solidFill>
+                <a:latin typeface="微软雅黑" panose="020B0503020204020204" charset="-122"/>
+                <a:ea typeface="微软雅黑" panose="020B0503020204020204" charset="-122"/>
+              </a:rPr>
+              <a:t>进展</a:t>
+            </a:r>
+            <a:endParaRPr lang="zh-CN" sz="1100" b="1" i="0">
+              <a:solidFill>
+                <a:srgbClr val="1F3864"/>
+              </a:solidFill>
+              <a:latin typeface="微软雅黑" panose="020B0503020204020204" charset="-122"/>
+              <a:ea typeface="微软雅黑" panose="020B0503020204020204" charset="-122"/>
+            </a:endParaRPr>
+          </a:p>
+        </p:txBody>
+      </p:sp>
+      <p:pic>
+        <p:nvPicPr>
+          <p:cNvPr id="19" name="图片 18"/>
+          <p:cNvPicPr>
+            <a:picLocks noChangeAspect="1"/>
+          </p:cNvPicPr>
+          <p:nvPr/>
+        </p:nvPicPr>
+        <p:blipFill>
+          <a:blip r:embed="rId1"/>
+          <a:stretch>
+            <a:fillRect/>
+          </a:stretch>
+        </p:blipFill>
+        <p:spPr>
+          <a:xfrm>
+            <a:off x="502920" y="914400"/>
+            <a:ext cx="10696575" cy="5483860"/>
+          </a:xfrm>
+          <a:prstGeom prst="rect">
+            <a:avLst/>
+          </a:prstGeom>
+        </p:spPr>
+      </p:pic>
+      <p:sp>
+        <p:nvSpPr>
+          <p:cNvPr id="20" name="椭圆 19"/>
+          <p:cNvSpPr/>
+          <p:nvPr/>
+        </p:nvSpPr>
+        <p:spPr>
+          <a:xfrm>
+            <a:off x="6594475" y="3418205"/>
+            <a:ext cx="5180330" cy="2736215"/>
+          </a:xfrm>
+          <a:prstGeom prst="ellipse">
+            <a:avLst/>
+          </a:prstGeom>
+          <a:solidFill>
+            <a:schemeClr val="accent1">
+              <a:lumMod val="20000"/>
+              <a:lumOff val="80000"/>
+            </a:schemeClr>
+          </a:solidFill>
+        </p:spPr>
+        <p:style>
+          <a:lnRef idx="1">
+            <a:schemeClr val="accent1"/>
+          </a:lnRef>
+          <a:fillRef idx="3">
+            <a:schemeClr val="accent1"/>
+          </a:fillRef>
+          <a:effectRef idx="2">
+            <a:schemeClr val="accent1"/>
+          </a:effectRef>
+          <a:fontRef idx="minor">
+            <a:schemeClr val="lt1"/>
+          </a:fontRef>
+        </p:style>
+        <p:txBody>
+          <a:bodyPr/>
+          <a:p>
+            <a:endParaRPr lang="zh-CN" altLang="en-US"/>
+          </a:p>
+        </p:txBody>
+      </p:sp>
+      <p:sp>
+        <p:nvSpPr>
+          <p:cNvPr id="17" name="文本框 16"/>
+          <p:cNvSpPr txBox="1"/>
+          <p:nvPr/>
+        </p:nvSpPr>
+        <p:spPr>
+          <a:xfrm>
+            <a:off x="6757035" y="3816985"/>
+            <a:ext cx="4635500" cy="1938020"/>
+          </a:xfrm>
+          <a:prstGeom prst="rect">
+            <a:avLst/>
+          </a:prstGeom>
+          <a:noFill/>
+        </p:spPr>
+        <p:txBody>
+          <a:bodyPr wrap="square" rtlCol="0">
+            <a:spAutoFit/>
+          </a:bodyPr>
+          <a:p>
+            <a:pPr indent="457200"/>
+            <a:r>
+              <a:rPr lang="zh-CN" altLang="en-US" sz="2400"/>
+              <a:t>根据周育民的需求澄清，在后台发布商品，名称和价格是必填的，描述、图片随便填不填都行（图片最多一张主图）。但是同一时间只能有一样商品在售。</a:t>
+            </a:r>
+            <a:endParaRPr lang="zh-CN" altLang="en-US" sz="2400"/>
+          </a:p>
+        </p:txBody>
+      </p:sp>
+    </p:spTree>
+  </p:cSld>
+  <p:clrMapOvr>
+    <a:masterClrMapping/>
+  </p:clrMapOvr>
+</p:sld>
+</file>
+
+<file path=ppt/slides/slide23.xml><?xml version="1.0" encoding="utf-8"?>
+<p:sld xmlns:a="http://schemas.openxmlformats.org/drawingml/2006/main" xmlns:r="http://schemas.openxmlformats.org/officeDocument/2006/relationships" xmlns:p="http://schemas.openxmlformats.org/presentationml/2006/main">
+  <p:cSld>
+    <p:spTree>
+      <p:nvGrpSpPr>
+        <p:cNvPr id="1" name=""/>
+        <p:cNvGrpSpPr/>
+        <p:nvPr/>
+      </p:nvGrpSpPr>
+      <p:grpSpPr/>
+      <p:sp>
+        <p:nvSpPr>
+          <p:cNvPr id="2" name="Rectangle 1"/>
+          <p:cNvSpPr/>
+          <p:nvPr/>
+        </p:nvSpPr>
+        <p:spPr>
+          <a:xfrm>
+            <a:off x="0" y="0"/>
+            <a:ext cx="12191695" cy="6858000"/>
+          </a:xfrm>
+          <a:prstGeom prst="rect">
+            <a:avLst/>
+          </a:prstGeom>
+          <a:solidFill>
+            <a:srgbClr val="FFFFFF"/>
+          </a:solidFill>
+          <a:ln>
+            <a:noFill/>
+          </a:ln>
+          <a:effectLst/>
+        </p:spPr>
+        <p:style>
+          <a:lnRef idx="1">
+            <a:schemeClr val="accent1"/>
+          </a:lnRef>
+          <a:fillRef idx="3">
+            <a:schemeClr val="accent1"/>
+          </a:fillRef>
+          <a:effectRef idx="2">
+            <a:schemeClr val="accent1"/>
+          </a:effectRef>
+          <a:fontRef idx="minor">
+            <a:schemeClr val="lt1"/>
+          </a:fontRef>
+        </p:style>
+        <p:txBody>
+          <a:bodyPr rtlCol="0" anchor="ctr"/>
+          <a:lstStyle/>
+          <a:p>
+            <a:pPr algn="ctr"/>
+          </a:p>
+        </p:txBody>
+      </p:sp>
+      <p:sp>
+        <p:nvSpPr>
+          <p:cNvPr id="3" name="Rectangle 2"/>
+          <p:cNvSpPr/>
+          <p:nvPr/>
+        </p:nvSpPr>
+        <p:spPr>
+          <a:xfrm>
+            <a:off x="0" y="0"/>
+            <a:ext cx="12191695" cy="109728"/>
+          </a:xfrm>
+          <a:prstGeom prst="rect">
+            <a:avLst/>
+          </a:prstGeom>
+          <a:solidFill>
+            <a:srgbClr val="1F3864"/>
+          </a:solidFill>
+          <a:ln>
+            <a:noFill/>
+          </a:ln>
+          <a:effectLst/>
+        </p:spPr>
+        <p:style>
+          <a:lnRef idx="1">
+            <a:schemeClr val="accent1"/>
+          </a:lnRef>
+          <a:fillRef idx="3">
+            <a:schemeClr val="accent1"/>
+          </a:fillRef>
+          <a:effectRef idx="2">
+            <a:schemeClr val="accent1"/>
+          </a:effectRef>
+          <a:fontRef idx="minor">
+            <a:schemeClr val="lt1"/>
+          </a:fontRef>
+        </p:style>
+        <p:txBody>
+          <a:bodyPr rtlCol="0" anchor="ctr"/>
+          <a:lstStyle/>
+          <a:p>
+            <a:pPr algn="ctr"/>
+          </a:p>
+        </p:txBody>
+      </p:sp>
+      <p:sp>
+        <p:nvSpPr>
+          <p:cNvPr id="4" name="Rectangle 3"/>
+          <p:cNvSpPr/>
+          <p:nvPr/>
+        </p:nvSpPr>
+        <p:spPr>
+          <a:xfrm>
+            <a:off x="0" y="109728"/>
+            <a:ext cx="12191695" cy="27432"/>
+          </a:xfrm>
+          <a:prstGeom prst="rect">
+            <a:avLst/>
+          </a:prstGeom>
+          <a:solidFill>
+            <a:srgbClr val="B8860B"/>
+          </a:solidFill>
+          <a:ln>
+            <a:noFill/>
+          </a:ln>
+          <a:effectLst/>
+        </p:spPr>
+        <p:style>
+          <a:lnRef idx="1">
+            <a:schemeClr val="accent1"/>
+          </a:lnRef>
+          <a:fillRef idx="3">
+            <a:schemeClr val="accent1"/>
+          </a:fillRef>
+          <a:effectRef idx="2">
+            <a:schemeClr val="accent1"/>
+          </a:effectRef>
+          <a:fontRef idx="minor">
+            <a:schemeClr val="lt1"/>
+          </a:fontRef>
+        </p:style>
+        <p:txBody>
+          <a:bodyPr rtlCol="0" anchor="ctr"/>
+          <a:lstStyle/>
+          <a:p>
+            <a:pPr algn="ctr"/>
+          </a:p>
+        </p:txBody>
+      </p:sp>
+      <p:sp>
+        <p:nvSpPr>
+          <p:cNvPr id="5" name="TextBox 4"/>
+          <p:cNvSpPr txBox="1"/>
+          <p:nvPr/>
+        </p:nvSpPr>
+        <p:spPr>
+          <a:xfrm>
+            <a:off x="502920" y="292608"/>
+            <a:ext cx="9875520" cy="459740"/>
+          </a:xfrm>
+          <a:prstGeom prst="rect">
+            <a:avLst/>
+          </a:prstGeom>
+          <a:noFill/>
+        </p:spPr>
+        <p:txBody>
+          <a:bodyPr wrap="square" lIns="0" tIns="0" rIns="0" bIns="0" anchor="t">
+            <a:spAutoFit/>
+          </a:bodyPr>
+          <a:lstStyle/>
+          <a:p>
+            <a:pPr algn="l">
+              <a:lnSpc>
+                <a:spcPct val="115000"/>
+              </a:lnSpc>
+              <a:spcAft>
+                <a:spcPts val="400"/>
+              </a:spcAft>
+            </a:pPr>
+            <a:r>
+              <a:rPr lang="zh-CN" sz="2600" b="1" i="0">
+                <a:solidFill>
+                  <a:srgbClr val="1F3864"/>
+                </a:solidFill>
+                <a:latin typeface="微软雅黑" panose="020B0503020204020204" charset="-122"/>
+                <a:ea typeface="微软雅黑" panose="020B0503020204020204" charset="-122"/>
+              </a:rPr>
+              <a:t>前端</a:t>
+            </a:r>
+            <a:endParaRPr lang="zh-CN" sz="2600" b="1" i="0">
+              <a:solidFill>
+                <a:srgbClr val="1F3864"/>
+              </a:solidFill>
+              <a:latin typeface="微软雅黑" panose="020B0503020204020204" charset="-122"/>
+              <a:ea typeface="微软雅黑" panose="020B0503020204020204" charset="-122"/>
+            </a:endParaRPr>
+          </a:p>
+        </p:txBody>
+      </p:sp>
+      <p:sp>
+        <p:nvSpPr>
+          <p:cNvPr id="6" name="Rectangle 5"/>
+          <p:cNvSpPr/>
+          <p:nvPr/>
+        </p:nvSpPr>
+        <p:spPr>
+          <a:xfrm>
+            <a:off x="521207" y="896112"/>
+            <a:ext cx="502920" cy="45720"/>
+          </a:xfrm>
+          <a:prstGeom prst="rect">
+            <a:avLst/>
+          </a:prstGeom>
+          <a:solidFill>
+            <a:srgbClr val="B8860B"/>
+          </a:solidFill>
+          <a:ln>
+            <a:noFill/>
+          </a:ln>
+          <a:effectLst/>
+        </p:spPr>
+        <p:style>
+          <a:lnRef idx="1">
+            <a:schemeClr val="accent1"/>
+          </a:lnRef>
+          <a:fillRef idx="3">
+            <a:schemeClr val="accent1"/>
+          </a:fillRef>
+          <a:effectRef idx="2">
+            <a:schemeClr val="accent1"/>
+          </a:effectRef>
+          <a:fontRef idx="minor">
+            <a:schemeClr val="lt1"/>
+          </a:fontRef>
+        </p:style>
+        <p:txBody>
+          <a:bodyPr rtlCol="0" anchor="ctr"/>
+          <a:lstStyle/>
+          <a:p>
+            <a:pPr algn="ctr"/>
+          </a:p>
+        </p:txBody>
+      </p:sp>
+      <p:sp>
+        <p:nvSpPr>
+          <p:cNvPr id="7" name="Rectangle 6"/>
+          <p:cNvSpPr/>
+          <p:nvPr/>
+        </p:nvSpPr>
+        <p:spPr>
+          <a:xfrm>
+            <a:off x="1078992" y="896112"/>
+            <a:ext cx="10607040" cy="13716"/>
+          </a:xfrm>
+          <a:prstGeom prst="rect">
+            <a:avLst/>
+          </a:prstGeom>
+          <a:solidFill>
+            <a:srgbClr val="2E75B6"/>
+          </a:solidFill>
+          <a:ln>
+            <a:noFill/>
+          </a:ln>
+          <a:effectLst/>
+        </p:spPr>
+        <p:style>
+          <a:lnRef idx="1">
+            <a:schemeClr val="accent1"/>
+          </a:lnRef>
+          <a:fillRef idx="3">
+            <a:schemeClr val="accent1"/>
+          </a:fillRef>
+          <a:effectRef idx="2">
+            <a:schemeClr val="accent1"/>
+          </a:effectRef>
+          <a:fontRef idx="minor">
+            <a:schemeClr val="lt1"/>
+          </a:fontRef>
+        </p:style>
+        <p:txBody>
+          <a:bodyPr rtlCol="0" anchor="ctr"/>
+          <a:lstStyle/>
+          <a:p>
+            <a:pPr algn="ctr"/>
+          </a:p>
+        </p:txBody>
+      </p:sp>
+      <p:sp>
+        <p:nvSpPr>
+          <p:cNvPr id="9" name="Rectangle 8"/>
+          <p:cNvSpPr/>
+          <p:nvPr/>
+        </p:nvSpPr>
+        <p:spPr>
+          <a:xfrm>
+            <a:off x="0" y="6565392"/>
+            <a:ext cx="12191695" cy="292608"/>
+          </a:xfrm>
+          <a:prstGeom prst="rect">
+            <a:avLst/>
+          </a:prstGeom>
+          <a:solidFill>
+            <a:srgbClr val="EEF4FB"/>
+          </a:solidFill>
+          <a:ln>
+            <a:noFill/>
+          </a:ln>
+          <a:effectLst/>
+        </p:spPr>
+        <p:style>
+          <a:lnRef idx="1">
+            <a:schemeClr val="accent1"/>
+          </a:lnRef>
+          <a:fillRef idx="3">
+            <a:schemeClr val="accent1"/>
+          </a:fillRef>
+          <a:effectRef idx="2">
+            <a:schemeClr val="accent1"/>
+          </a:effectRef>
+          <a:fontRef idx="minor">
+            <a:schemeClr val="lt1"/>
+          </a:fontRef>
+        </p:style>
+        <p:txBody>
+          <a:bodyPr rtlCol="0" anchor="ctr"/>
+          <a:lstStyle/>
+          <a:p>
+            <a:pPr algn="ctr"/>
+          </a:p>
+        </p:txBody>
+      </p:sp>
+      <p:sp>
+        <p:nvSpPr>
+          <p:cNvPr id="10" name="TextBox 9"/>
+          <p:cNvSpPr txBox="1"/>
+          <p:nvPr/>
+        </p:nvSpPr>
+        <p:spPr>
+          <a:xfrm>
+            <a:off x="502920" y="6592824"/>
+            <a:ext cx="7315200" cy="176530"/>
+          </a:xfrm>
+          <a:prstGeom prst="rect">
+            <a:avLst/>
+          </a:prstGeom>
+          <a:noFill/>
+        </p:spPr>
+        <p:txBody>
+          <a:bodyPr wrap="square" lIns="0" tIns="0" rIns="0" bIns="0" anchor="t">
+            <a:spAutoFit/>
+          </a:bodyPr>
+          <a:lstStyle/>
+          <a:p>
+            <a:pPr algn="l">
+              <a:lnSpc>
+                <a:spcPct val="115000"/>
+              </a:lnSpc>
+              <a:spcAft>
+                <a:spcPts val="400"/>
+              </a:spcAft>
+            </a:pPr>
+            <a:r>
+              <a:rPr sz="1000" b="0" i="0">
+                <a:solidFill>
+                  <a:srgbClr val="7F7F7F"/>
+                </a:solidFill>
+                <a:latin typeface="微软雅黑" panose="020B0503020204020204" charset="-122"/>
+                <a:ea typeface="微软雅黑" panose="020B0503020204020204" charset="-122"/>
+              </a:rPr>
+              <a:t>在线购物系统 · 第 1 次阶段性评审 · 项目组 9</a:t>
+            </a:r>
+            <a:endParaRPr sz="1000" b="0" i="0">
+              <a:solidFill>
+                <a:srgbClr val="7F7F7F"/>
+              </a:solidFill>
+              <a:latin typeface="微软雅黑" panose="020B0503020204020204" charset="-122"/>
+              <a:ea typeface="微软雅黑" panose="020B0503020204020204" charset="-122"/>
+            </a:endParaRPr>
+          </a:p>
+        </p:txBody>
+      </p:sp>
+      <p:sp>
+        <p:nvSpPr>
+          <p:cNvPr id="11" name="TextBox 10"/>
+          <p:cNvSpPr txBox="1"/>
+          <p:nvPr/>
+        </p:nvSpPr>
+        <p:spPr>
+          <a:xfrm>
+            <a:off x="11247120" y="6592824"/>
+            <a:ext cx="548640" cy="256032"/>
+          </a:xfrm>
+          <a:prstGeom prst="rect">
+            <a:avLst/>
+          </a:prstGeom>
+          <a:noFill/>
+        </p:spPr>
+        <p:txBody>
+          <a:bodyPr wrap="square" lIns="0" tIns="0" rIns="0" bIns="0" anchor="t">
+            <a:spAutoFit/>
+          </a:bodyPr>
+          <a:lstStyle/>
+          <a:p>
+            <a:pPr algn="r">
+              <a:lnSpc>
+                <a:spcPct val="115000"/>
+              </a:lnSpc>
+              <a:spcAft>
+                <a:spcPts val="400"/>
+              </a:spcAft>
+            </a:pPr>
+            <a:r>
+              <a:rPr sz="1000" b="1" i="0">
+                <a:solidFill>
+                  <a:srgbClr val="2E75B6"/>
+                </a:solidFill>
+                <a:latin typeface="微软雅黑" panose="020B0503020204020204" charset="-122"/>
+                <a:ea typeface="微软雅黑" panose="020B0503020204020204" charset="-122"/>
+              </a:rPr>
+              <a:t>10</a:t>
+            </a:r>
+            <a:endParaRPr sz="1000" b="1" i="0">
+              <a:solidFill>
+                <a:srgbClr val="2E75B6"/>
+              </a:solidFill>
+              <a:latin typeface="微软雅黑" panose="020B0503020204020204" charset="-122"/>
+              <a:ea typeface="微软雅黑" panose="020B0503020204020204" charset="-122"/>
+            </a:endParaRPr>
+          </a:p>
+        </p:txBody>
+      </p:sp>
+      <p:sp>
+        <p:nvSpPr>
+          <p:cNvPr id="12" name="Rounded Rectangle 11"/>
+          <p:cNvSpPr/>
+          <p:nvPr/>
+        </p:nvSpPr>
+        <p:spPr>
+          <a:xfrm>
+            <a:off x="10104120" y="320040"/>
+            <a:ext cx="1600200" cy="384048"/>
+          </a:xfrm>
+          <a:prstGeom prst="roundRect">
+            <a:avLst>
+              <a:gd name="adj" fmla="val 50000"/>
+            </a:avLst>
+          </a:prstGeom>
+          <a:solidFill>
+            <a:srgbClr val="DEEBF7"/>
+          </a:solidFill>
+          <a:ln>
+            <a:noFill/>
+          </a:ln>
+          <a:effectLst/>
+        </p:spPr>
+        <p:style>
+          <a:lnRef idx="1">
+            <a:schemeClr val="accent1"/>
+          </a:lnRef>
+          <a:fillRef idx="3">
+            <a:schemeClr val="accent1"/>
+          </a:fillRef>
+          <a:effectRef idx="2">
+            <a:schemeClr val="accent1"/>
+          </a:effectRef>
+          <a:fontRef idx="minor">
+            <a:schemeClr val="lt1"/>
+          </a:fontRef>
+        </p:style>
+        <p:txBody>
+          <a:bodyPr wrap="none" rtlCol="0" anchor="ctr"/>
+          <a:lstStyle/>
+          <a:p>
+            <a:pPr algn="ctr"/>
+            <a:r>
+              <a:rPr lang="zh-CN" sz="1100" b="1" i="0">
+                <a:solidFill>
+                  <a:srgbClr val="1F3864"/>
+                </a:solidFill>
+                <a:latin typeface="微软雅黑" panose="020B0503020204020204" charset="-122"/>
+                <a:ea typeface="微软雅黑" panose="020B0503020204020204" charset="-122"/>
+              </a:rPr>
+              <a:t>其他</a:t>
+            </a:r>
+            <a:r>
+              <a:rPr lang="zh-CN" sz="1100" b="1" i="0">
+                <a:solidFill>
+                  <a:srgbClr val="1F3864"/>
+                </a:solidFill>
+                <a:latin typeface="微软雅黑" panose="020B0503020204020204" charset="-122"/>
+                <a:ea typeface="微软雅黑" panose="020B0503020204020204" charset="-122"/>
+              </a:rPr>
+              <a:t>进展</a:t>
+            </a:r>
+            <a:endParaRPr lang="zh-CN" sz="1100" b="1" i="0">
+              <a:solidFill>
+                <a:srgbClr val="1F3864"/>
+              </a:solidFill>
+              <a:latin typeface="微软雅黑" panose="020B0503020204020204" charset="-122"/>
+              <a:ea typeface="微软雅黑" panose="020B0503020204020204" charset="-122"/>
+            </a:endParaRPr>
+          </a:p>
+        </p:txBody>
+      </p:sp>
+      <p:pic>
+        <p:nvPicPr>
+          <p:cNvPr id="8" name="图片 7"/>
+          <p:cNvPicPr>
+            <a:picLocks noChangeAspect="1"/>
+          </p:cNvPicPr>
+          <p:nvPr/>
+        </p:nvPicPr>
+        <p:blipFill>
+          <a:blip r:embed="rId1"/>
+          <a:stretch>
+            <a:fillRect/>
+          </a:stretch>
+        </p:blipFill>
+        <p:spPr>
+          <a:xfrm>
+            <a:off x="521335" y="1101725"/>
+            <a:ext cx="6229350" cy="4997450"/>
+          </a:xfrm>
+          <a:prstGeom prst="rect">
+            <a:avLst/>
+          </a:prstGeom>
+        </p:spPr>
+      </p:pic>
+      <p:sp>
+        <p:nvSpPr>
+          <p:cNvPr id="14" name="文本框 13"/>
+          <p:cNvSpPr txBox="1"/>
+          <p:nvPr/>
+        </p:nvSpPr>
+        <p:spPr>
+          <a:xfrm>
+            <a:off x="6990715" y="1188085"/>
+            <a:ext cx="4635500" cy="4892675"/>
+          </a:xfrm>
+          <a:prstGeom prst="rect">
+            <a:avLst/>
+          </a:prstGeom>
+          <a:noFill/>
+        </p:spPr>
+        <p:txBody>
+          <a:bodyPr wrap="square" rtlCol="0">
+            <a:spAutoFit/>
+          </a:bodyPr>
+          <a:p>
+            <a:r>
+              <a:rPr lang="en-US" altLang="zh-CN" sz="2400" b="1"/>
+              <a:t>1. submitIntent </a:t>
+            </a:r>
+            <a:r>
+              <a:rPr lang="zh-CN" altLang="en-US" sz="2400" b="1"/>
+              <a:t>提交购买意向</a:t>
+            </a:r>
+            <a:endParaRPr lang="zh-CN" altLang="en-US" sz="2400" b="1"/>
+          </a:p>
+          <a:p>
+            <a:r>
+              <a:rPr lang="zh-CN" altLang="en-US" sz="2400"/>
+              <a:t>业务说明：买家提交购买意向，成功后生成口令码 </a:t>
+            </a:r>
+            <a:r>
+              <a:rPr lang="en-US" altLang="zh-CN" sz="2400"/>
+              <a:t>command_code。</a:t>
+            </a:r>
+            <a:endParaRPr lang="en-US" altLang="zh-CN" sz="2400"/>
+          </a:p>
+          <a:p>
+            <a:r>
+              <a:rPr lang="en-US" altLang="zh-CN" sz="2400" b="1"/>
+              <a:t>2. queryIntent </a:t>
+            </a:r>
+            <a:r>
+              <a:rPr lang="zh-CN" altLang="en-US" sz="2400" b="1"/>
+              <a:t>查询意向（凭口令码）</a:t>
+            </a:r>
+            <a:endParaRPr lang="zh-CN" altLang="en-US" sz="2400" b="1"/>
+          </a:p>
+          <a:p>
+            <a:r>
+              <a:rPr lang="zh-CN" altLang="en-US" sz="2400"/>
+              <a:t>业务说明：使用口令码查询当前排队订单状态；</a:t>
+            </a:r>
+            <a:endParaRPr lang="zh-CN" altLang="en-US" sz="2400"/>
+          </a:p>
+          <a:p>
+            <a:r>
+              <a:rPr lang="en-US" altLang="zh-CN" sz="2400" b="1"/>
+              <a:t>3. updateIntent </a:t>
+            </a:r>
+            <a:r>
+              <a:rPr lang="zh-CN" altLang="en-US" sz="2400" b="1"/>
+              <a:t>修改意向（姓名 / 电话）</a:t>
+            </a:r>
+            <a:endParaRPr lang="zh-CN" altLang="en-US" sz="2400" b="1"/>
+          </a:p>
+          <a:p>
+            <a:endParaRPr lang="zh-CN" altLang="en-US" sz="2400"/>
+          </a:p>
+          <a:p>
+            <a:r>
+              <a:rPr lang="en-US" altLang="zh-CN" sz="2400" b="1"/>
+              <a:t>4. cancelIntent </a:t>
+            </a:r>
+            <a:r>
+              <a:rPr lang="zh-CN" altLang="en-US" sz="2400" b="1"/>
+              <a:t>撤销排队意向</a:t>
+            </a:r>
+            <a:endParaRPr lang="zh-CN" altLang="en-US" sz="2400" b="1"/>
+          </a:p>
+          <a:p>
+            <a:endParaRPr lang="zh-CN" altLang="en-US" sz="2400" b="1"/>
+          </a:p>
+        </p:txBody>
+      </p:sp>
+    </p:spTree>
+  </p:cSld>
+  <p:clrMapOvr>
+    <a:masterClrMapping/>
+  </p:clrMapOvr>
+</p:sld>
+</file>
+
+<file path=ppt/slides/slide24.xml><?xml version="1.0" encoding="utf-8"?>
+<p:sld xmlns:a="http://schemas.openxmlformats.org/drawingml/2006/main" xmlns:r="http://schemas.openxmlformats.org/officeDocument/2006/relationships" xmlns:p="http://schemas.openxmlformats.org/presentationml/2006/main">
+  <p:cSld>
+    <p:spTree>
+      <p:nvGrpSpPr>
+        <p:cNvPr id="1" name=""/>
+        <p:cNvGrpSpPr/>
+        <p:nvPr/>
+      </p:nvGrpSpPr>
+      <p:grpSpPr/>
+      <p:sp>
+        <p:nvSpPr>
+          <p:cNvPr id="2" name="Rectangle 1"/>
+          <p:cNvSpPr/>
+          <p:nvPr/>
+        </p:nvSpPr>
+        <p:spPr>
+          <a:xfrm>
+            <a:off x="0" y="0"/>
+            <a:ext cx="12191695" cy="6858000"/>
+          </a:xfrm>
+          <a:prstGeom prst="rect">
+            <a:avLst/>
+          </a:prstGeom>
+          <a:solidFill>
+            <a:srgbClr val="FFFFFF"/>
+          </a:solidFill>
+          <a:ln>
+            <a:noFill/>
+          </a:ln>
+          <a:effectLst/>
+        </p:spPr>
+        <p:style>
+          <a:lnRef idx="1">
+            <a:schemeClr val="accent1"/>
+          </a:lnRef>
+          <a:fillRef idx="3">
+            <a:schemeClr val="accent1"/>
+          </a:fillRef>
+          <a:effectRef idx="2">
+            <a:schemeClr val="accent1"/>
+          </a:effectRef>
+          <a:fontRef idx="minor">
+            <a:schemeClr val="lt1"/>
+          </a:fontRef>
+        </p:style>
+        <p:txBody>
+          <a:bodyPr rtlCol="0" anchor="ctr"/>
+          <a:lstStyle/>
+          <a:p>
+            <a:pPr algn="ctr"/>
+          </a:p>
+        </p:txBody>
+      </p:sp>
+      <p:sp>
+        <p:nvSpPr>
+          <p:cNvPr id="3" name="Rectangle 2"/>
+          <p:cNvSpPr/>
+          <p:nvPr/>
+        </p:nvSpPr>
+        <p:spPr>
+          <a:xfrm>
+            <a:off x="0" y="0"/>
+            <a:ext cx="12191695" cy="109728"/>
+          </a:xfrm>
+          <a:prstGeom prst="rect">
+            <a:avLst/>
+          </a:prstGeom>
+          <a:solidFill>
+            <a:srgbClr val="1F3864"/>
+          </a:solidFill>
+          <a:ln>
+            <a:noFill/>
+          </a:ln>
+          <a:effectLst/>
+        </p:spPr>
+        <p:style>
+          <a:lnRef idx="1">
+            <a:schemeClr val="accent1"/>
+          </a:lnRef>
+          <a:fillRef idx="3">
+            <a:schemeClr val="accent1"/>
+          </a:fillRef>
+          <a:effectRef idx="2">
+            <a:schemeClr val="accent1"/>
+          </a:effectRef>
+          <a:fontRef idx="minor">
+            <a:schemeClr val="lt1"/>
+          </a:fontRef>
+        </p:style>
+        <p:txBody>
+          <a:bodyPr rtlCol="0" anchor="ctr"/>
+          <a:lstStyle/>
+          <a:p>
+            <a:pPr algn="ctr"/>
+          </a:p>
+        </p:txBody>
+      </p:sp>
+      <p:sp>
+        <p:nvSpPr>
+          <p:cNvPr id="4" name="Rectangle 3"/>
+          <p:cNvSpPr/>
+          <p:nvPr/>
+        </p:nvSpPr>
+        <p:spPr>
+          <a:xfrm>
+            <a:off x="0" y="109728"/>
+            <a:ext cx="12191695" cy="27432"/>
+          </a:xfrm>
+          <a:prstGeom prst="rect">
+            <a:avLst/>
+          </a:prstGeom>
+          <a:solidFill>
+            <a:srgbClr val="B8860B"/>
+          </a:solidFill>
+          <a:ln>
+            <a:noFill/>
+          </a:ln>
+          <a:effectLst/>
+        </p:spPr>
+        <p:style>
+          <a:lnRef idx="1">
+            <a:schemeClr val="accent1"/>
+          </a:lnRef>
+          <a:fillRef idx="3">
+            <a:schemeClr val="accent1"/>
+          </a:fillRef>
+          <a:effectRef idx="2">
+            <a:schemeClr val="accent1"/>
+          </a:effectRef>
+          <a:fontRef idx="minor">
+            <a:schemeClr val="lt1"/>
+          </a:fontRef>
+        </p:style>
+        <p:txBody>
+          <a:bodyPr rtlCol="0" anchor="ctr"/>
+          <a:lstStyle/>
+          <a:p>
+            <a:pPr algn="ctr"/>
+          </a:p>
+        </p:txBody>
+      </p:sp>
+      <p:sp>
+        <p:nvSpPr>
+          <p:cNvPr id="5" name="TextBox 4"/>
+          <p:cNvSpPr txBox="1"/>
+          <p:nvPr/>
+        </p:nvSpPr>
+        <p:spPr>
+          <a:xfrm>
+            <a:off x="502920" y="292608"/>
+            <a:ext cx="9875520" cy="459740"/>
+          </a:xfrm>
+          <a:prstGeom prst="rect">
+            <a:avLst/>
+          </a:prstGeom>
+          <a:noFill/>
+        </p:spPr>
+        <p:txBody>
+          <a:bodyPr wrap="square" lIns="0" tIns="0" rIns="0" bIns="0" anchor="t">
+            <a:spAutoFit/>
+          </a:bodyPr>
+          <a:lstStyle/>
+          <a:p>
+            <a:pPr algn="l">
+              <a:lnSpc>
+                <a:spcPct val="115000"/>
+              </a:lnSpc>
+              <a:spcAft>
+                <a:spcPts val="400"/>
+              </a:spcAft>
+            </a:pPr>
+            <a:r>
+              <a:rPr lang="zh-CN" sz="2600" b="1" i="0">
+                <a:solidFill>
+                  <a:srgbClr val="1F3864"/>
+                </a:solidFill>
+                <a:latin typeface="微软雅黑" panose="020B0503020204020204" charset="-122"/>
+                <a:ea typeface="微软雅黑" panose="020B0503020204020204" charset="-122"/>
+              </a:rPr>
+              <a:t>前端</a:t>
+            </a:r>
+            <a:endParaRPr lang="zh-CN" sz="2600" b="1" i="0">
+              <a:solidFill>
+                <a:srgbClr val="1F3864"/>
+              </a:solidFill>
+              <a:latin typeface="微软雅黑" panose="020B0503020204020204" charset="-122"/>
+              <a:ea typeface="微软雅黑" panose="020B0503020204020204" charset="-122"/>
+            </a:endParaRPr>
+          </a:p>
+        </p:txBody>
+      </p:sp>
+      <p:sp>
+        <p:nvSpPr>
+          <p:cNvPr id="6" name="Rectangle 5"/>
+          <p:cNvSpPr/>
+          <p:nvPr/>
+        </p:nvSpPr>
+        <p:spPr>
+          <a:xfrm>
+            <a:off x="521207" y="896112"/>
+            <a:ext cx="502920" cy="45720"/>
+          </a:xfrm>
+          <a:prstGeom prst="rect">
+            <a:avLst/>
+          </a:prstGeom>
+          <a:solidFill>
+            <a:srgbClr val="B8860B"/>
+          </a:solidFill>
+          <a:ln>
+            <a:noFill/>
+          </a:ln>
+          <a:effectLst/>
+        </p:spPr>
+        <p:style>
+          <a:lnRef idx="1">
+            <a:schemeClr val="accent1"/>
+          </a:lnRef>
+          <a:fillRef idx="3">
+            <a:schemeClr val="accent1"/>
+          </a:fillRef>
+          <a:effectRef idx="2">
+            <a:schemeClr val="accent1"/>
+          </a:effectRef>
+          <a:fontRef idx="minor">
+            <a:schemeClr val="lt1"/>
+          </a:fontRef>
+        </p:style>
+        <p:txBody>
+          <a:bodyPr rtlCol="0" anchor="ctr"/>
+          <a:lstStyle/>
+          <a:p>
+            <a:pPr algn="ctr"/>
+          </a:p>
+        </p:txBody>
+      </p:sp>
+      <p:sp>
+        <p:nvSpPr>
+          <p:cNvPr id="7" name="Rectangle 6"/>
+          <p:cNvSpPr/>
+          <p:nvPr/>
+        </p:nvSpPr>
+        <p:spPr>
+          <a:xfrm>
+            <a:off x="1078992" y="896112"/>
+            <a:ext cx="10607040" cy="13716"/>
+          </a:xfrm>
+          <a:prstGeom prst="rect">
+            <a:avLst/>
+          </a:prstGeom>
+          <a:solidFill>
+            <a:srgbClr val="2E75B6"/>
+          </a:solidFill>
+          <a:ln>
+            <a:noFill/>
+          </a:ln>
+          <a:effectLst/>
+        </p:spPr>
+        <p:style>
+          <a:lnRef idx="1">
+            <a:schemeClr val="accent1"/>
+          </a:lnRef>
+          <a:fillRef idx="3">
+            <a:schemeClr val="accent1"/>
+          </a:fillRef>
+          <a:effectRef idx="2">
+            <a:schemeClr val="accent1"/>
+          </a:effectRef>
+          <a:fontRef idx="minor">
+            <a:schemeClr val="lt1"/>
+          </a:fontRef>
+        </p:style>
+        <p:txBody>
+          <a:bodyPr rtlCol="0" anchor="ctr"/>
+          <a:lstStyle/>
+          <a:p>
+            <a:pPr algn="ctr"/>
+          </a:p>
+        </p:txBody>
+      </p:sp>
+      <p:sp>
+        <p:nvSpPr>
+          <p:cNvPr id="9" name="Rectangle 8"/>
+          <p:cNvSpPr/>
+          <p:nvPr/>
+        </p:nvSpPr>
+        <p:spPr>
+          <a:xfrm>
+            <a:off x="0" y="6565392"/>
+            <a:ext cx="12191695" cy="292608"/>
+          </a:xfrm>
+          <a:prstGeom prst="rect">
+            <a:avLst/>
+          </a:prstGeom>
+          <a:solidFill>
+            <a:srgbClr val="EEF4FB"/>
+          </a:solidFill>
+          <a:ln>
+            <a:noFill/>
+          </a:ln>
+          <a:effectLst/>
+        </p:spPr>
+        <p:style>
+          <a:lnRef idx="1">
+            <a:schemeClr val="accent1"/>
+          </a:lnRef>
+          <a:fillRef idx="3">
+            <a:schemeClr val="accent1"/>
+          </a:fillRef>
+          <a:effectRef idx="2">
+            <a:schemeClr val="accent1"/>
+          </a:effectRef>
+          <a:fontRef idx="minor">
+            <a:schemeClr val="lt1"/>
+          </a:fontRef>
+        </p:style>
+        <p:txBody>
+          <a:bodyPr rtlCol="0" anchor="ctr"/>
+          <a:lstStyle/>
+          <a:p>
+            <a:pPr algn="ctr"/>
+          </a:p>
+        </p:txBody>
+      </p:sp>
+      <p:sp>
+        <p:nvSpPr>
+          <p:cNvPr id="10" name="TextBox 9"/>
+          <p:cNvSpPr txBox="1"/>
+          <p:nvPr/>
+        </p:nvSpPr>
+        <p:spPr>
+          <a:xfrm>
+            <a:off x="502920" y="6592824"/>
+            <a:ext cx="7315200" cy="176530"/>
+          </a:xfrm>
+          <a:prstGeom prst="rect">
+            <a:avLst/>
+          </a:prstGeom>
+          <a:noFill/>
+        </p:spPr>
+        <p:txBody>
+          <a:bodyPr wrap="square" lIns="0" tIns="0" rIns="0" bIns="0" anchor="t">
+            <a:spAutoFit/>
+          </a:bodyPr>
+          <a:lstStyle/>
+          <a:p>
+            <a:pPr algn="l">
+              <a:lnSpc>
+                <a:spcPct val="115000"/>
+              </a:lnSpc>
+              <a:spcAft>
+                <a:spcPts val="400"/>
+              </a:spcAft>
+            </a:pPr>
+            <a:r>
+              <a:rPr sz="1000" b="0" i="0">
+                <a:solidFill>
+                  <a:srgbClr val="7F7F7F"/>
+                </a:solidFill>
+                <a:latin typeface="微软雅黑" panose="020B0503020204020204" charset="-122"/>
+                <a:ea typeface="微软雅黑" panose="020B0503020204020204" charset="-122"/>
+              </a:rPr>
+              <a:t>在线购物系统 · 第 1 次阶段性评审 · 项目组 9</a:t>
+            </a:r>
+            <a:endParaRPr sz="1000" b="0" i="0">
+              <a:solidFill>
+                <a:srgbClr val="7F7F7F"/>
+              </a:solidFill>
+              <a:latin typeface="微软雅黑" panose="020B0503020204020204" charset="-122"/>
+              <a:ea typeface="微软雅黑" panose="020B0503020204020204" charset="-122"/>
+            </a:endParaRPr>
+          </a:p>
+        </p:txBody>
+      </p:sp>
+      <p:sp>
+        <p:nvSpPr>
+          <p:cNvPr id="11" name="TextBox 10"/>
+          <p:cNvSpPr txBox="1"/>
+          <p:nvPr/>
+        </p:nvSpPr>
+        <p:spPr>
+          <a:xfrm>
+            <a:off x="11247120" y="6592824"/>
+            <a:ext cx="548640" cy="256032"/>
+          </a:xfrm>
+          <a:prstGeom prst="rect">
+            <a:avLst/>
+          </a:prstGeom>
+          <a:noFill/>
+        </p:spPr>
+        <p:txBody>
+          <a:bodyPr wrap="square" lIns="0" tIns="0" rIns="0" bIns="0" anchor="t">
+            <a:spAutoFit/>
+          </a:bodyPr>
+          <a:lstStyle/>
+          <a:p>
+            <a:pPr algn="r">
+              <a:lnSpc>
+                <a:spcPct val="115000"/>
+              </a:lnSpc>
+              <a:spcAft>
+                <a:spcPts val="400"/>
+              </a:spcAft>
+            </a:pPr>
+            <a:r>
+              <a:rPr sz="1000" b="1" i="0">
+                <a:solidFill>
+                  <a:srgbClr val="2E75B6"/>
+                </a:solidFill>
+                <a:latin typeface="微软雅黑" panose="020B0503020204020204" charset="-122"/>
+                <a:ea typeface="微软雅黑" panose="020B0503020204020204" charset="-122"/>
+              </a:rPr>
+              <a:t>10</a:t>
+            </a:r>
+            <a:endParaRPr sz="1000" b="1" i="0">
+              <a:solidFill>
+                <a:srgbClr val="2E75B6"/>
+              </a:solidFill>
+              <a:latin typeface="微软雅黑" panose="020B0503020204020204" charset="-122"/>
+              <a:ea typeface="微软雅黑" panose="020B0503020204020204" charset="-122"/>
+            </a:endParaRPr>
+          </a:p>
+        </p:txBody>
+      </p:sp>
+      <p:sp>
+        <p:nvSpPr>
+          <p:cNvPr id="12" name="Rounded Rectangle 11"/>
+          <p:cNvSpPr/>
+          <p:nvPr/>
+        </p:nvSpPr>
+        <p:spPr>
+          <a:xfrm>
+            <a:off x="10104120" y="320040"/>
+            <a:ext cx="1600200" cy="384048"/>
+          </a:xfrm>
+          <a:prstGeom prst="roundRect">
+            <a:avLst>
+              <a:gd name="adj" fmla="val 50000"/>
+            </a:avLst>
+          </a:prstGeom>
+          <a:solidFill>
+            <a:srgbClr val="DEEBF7"/>
+          </a:solidFill>
+          <a:ln>
+            <a:noFill/>
+          </a:ln>
+          <a:effectLst/>
+        </p:spPr>
+        <p:style>
+          <a:lnRef idx="1">
+            <a:schemeClr val="accent1"/>
+          </a:lnRef>
+          <a:fillRef idx="3">
+            <a:schemeClr val="accent1"/>
+          </a:fillRef>
+          <a:effectRef idx="2">
+            <a:schemeClr val="accent1"/>
+          </a:effectRef>
+          <a:fontRef idx="minor">
+            <a:schemeClr val="lt1"/>
+          </a:fontRef>
+        </p:style>
+        <p:txBody>
+          <a:bodyPr wrap="none" rtlCol="0" anchor="ctr"/>
+          <a:lstStyle/>
+          <a:p>
+            <a:pPr algn="ctr"/>
+            <a:r>
+              <a:rPr lang="zh-CN" sz="1100" b="1" i="0">
+                <a:solidFill>
+                  <a:srgbClr val="1F3864"/>
+                </a:solidFill>
+                <a:latin typeface="微软雅黑" panose="020B0503020204020204" charset="-122"/>
+                <a:ea typeface="微软雅黑" panose="020B0503020204020204" charset="-122"/>
+              </a:rPr>
+              <a:t>其他</a:t>
+            </a:r>
+            <a:r>
+              <a:rPr lang="zh-CN" sz="1100" b="1" i="0">
+                <a:solidFill>
+                  <a:srgbClr val="1F3864"/>
+                </a:solidFill>
+                <a:latin typeface="微软雅黑" panose="020B0503020204020204" charset="-122"/>
+                <a:ea typeface="微软雅黑" panose="020B0503020204020204" charset="-122"/>
+              </a:rPr>
+              <a:t>进展</a:t>
+            </a:r>
+            <a:endParaRPr lang="zh-CN" sz="1100" b="1" i="0">
+              <a:solidFill>
+                <a:srgbClr val="1F3864"/>
+              </a:solidFill>
+              <a:latin typeface="微软雅黑" panose="020B0503020204020204" charset="-122"/>
+              <a:ea typeface="微软雅黑" panose="020B0503020204020204" charset="-122"/>
+            </a:endParaRPr>
+          </a:p>
+        </p:txBody>
+      </p:sp>
+      <p:sp>
+        <p:nvSpPr>
+          <p:cNvPr id="14" name="文本框 13"/>
+          <p:cNvSpPr txBox="1"/>
+          <p:nvPr/>
+        </p:nvSpPr>
+        <p:spPr>
+          <a:xfrm>
+            <a:off x="6180455" y="1188085"/>
+            <a:ext cx="5445760" cy="4887595"/>
+          </a:xfrm>
+          <a:prstGeom prst="rect">
+            <a:avLst/>
+          </a:prstGeom>
+          <a:noFill/>
+        </p:spPr>
+        <p:txBody>
+          <a:bodyPr wrap="square" rtlCol="0">
+            <a:spAutoFit/>
+          </a:bodyPr>
+          <a:p>
+            <a:pPr>
+              <a:lnSpc>
+                <a:spcPct val="130000"/>
+              </a:lnSpc>
+            </a:pPr>
+            <a:r>
+              <a:rPr lang="zh-CN" altLang="en-US" sz="2400" b="1"/>
+              <a:t>一、登录与账号模块</a:t>
+            </a:r>
+            <a:endParaRPr lang="zh-CN" altLang="en-US" sz="2400" b="1"/>
+          </a:p>
+          <a:p>
+            <a:pPr>
+              <a:lnSpc>
+                <a:spcPct val="130000"/>
+              </a:lnSpc>
+            </a:pPr>
+            <a:r>
+              <a:rPr lang="en-US" altLang="zh-CN" sz="2400" b="1"/>
+              <a:t>1. login </a:t>
+            </a:r>
+            <a:r>
+              <a:rPr lang="zh-CN" altLang="en-US" sz="2400" b="1"/>
+              <a:t>卖家登录</a:t>
+            </a:r>
+            <a:endParaRPr lang="zh-CN" altLang="en-US" sz="2400" b="1"/>
+          </a:p>
+          <a:p>
+            <a:pPr>
+              <a:lnSpc>
+                <a:spcPct val="130000"/>
+              </a:lnSpc>
+            </a:pPr>
+            <a:r>
+              <a:rPr lang="en-US" altLang="zh-CN" sz="2400" b="1"/>
+              <a:t>2. changePassword </a:t>
+            </a:r>
+            <a:r>
+              <a:rPr lang="zh-CN" altLang="en-US" sz="2400" b="1"/>
+              <a:t>修改密码</a:t>
+            </a:r>
+            <a:endParaRPr lang="zh-CN" altLang="en-US" sz="2400" b="1"/>
+          </a:p>
+          <a:p>
+            <a:pPr>
+              <a:lnSpc>
+                <a:spcPct val="130000"/>
+              </a:lnSpc>
+            </a:pPr>
+            <a:r>
+              <a:rPr lang="zh-CN" altLang="en-US" sz="2400" b="1"/>
+              <a:t>二、商品管理模块</a:t>
+            </a:r>
+            <a:endParaRPr lang="zh-CN" altLang="en-US" sz="2400" b="1"/>
+          </a:p>
+          <a:p>
+            <a:pPr>
+              <a:lnSpc>
+                <a:spcPct val="130000"/>
+              </a:lnSpc>
+            </a:pPr>
+            <a:r>
+              <a:rPr lang="en-US" altLang="zh-CN" sz="2400" b="1"/>
+              <a:t>1. getCurrentProduct </a:t>
+            </a:r>
+            <a:r>
+              <a:rPr lang="zh-CN" altLang="en-US" sz="2400" b="1"/>
+              <a:t>获取当前商品</a:t>
+            </a:r>
+            <a:endParaRPr lang="zh-CN" altLang="en-US" sz="2400" b="1"/>
+          </a:p>
+          <a:p>
+            <a:pPr>
+              <a:lnSpc>
+                <a:spcPct val="130000"/>
+              </a:lnSpc>
+            </a:pPr>
+            <a:r>
+              <a:rPr lang="en-US" altLang="zh-CN" sz="2400" b="1"/>
+              <a:t>2. publishProduct </a:t>
+            </a:r>
+            <a:r>
+              <a:rPr lang="zh-CN" altLang="en-US" sz="2400" b="1"/>
+              <a:t>发布商品</a:t>
+            </a:r>
+            <a:endParaRPr lang="zh-CN" altLang="en-US" sz="2400" b="1"/>
+          </a:p>
+          <a:p>
+            <a:pPr>
+              <a:lnSpc>
+                <a:spcPct val="130000"/>
+              </a:lnSpc>
+            </a:pPr>
+            <a:r>
+              <a:rPr lang="en-US" altLang="zh-CN" sz="2400" b="1"/>
+              <a:t>3. offShelf </a:t>
+            </a:r>
+            <a:r>
+              <a:rPr lang="zh-CN" altLang="en-US" sz="2400" b="1"/>
+              <a:t>商品下架</a:t>
+            </a:r>
+            <a:endParaRPr lang="zh-CN" altLang="en-US" sz="2400" b="1"/>
+          </a:p>
+          <a:p>
+            <a:pPr>
+              <a:lnSpc>
+                <a:spcPct val="130000"/>
+              </a:lnSpc>
+            </a:pPr>
+            <a:r>
+              <a:rPr lang="en-US" altLang="zh-CN" sz="2400" b="1"/>
+              <a:t>4. freezeProduct </a:t>
+            </a:r>
+            <a:r>
+              <a:rPr lang="zh-CN" altLang="en-US" sz="2400" b="1"/>
+              <a:t>冻结商品</a:t>
+            </a:r>
+            <a:endParaRPr lang="zh-CN" altLang="en-US" sz="2400" b="1"/>
+          </a:p>
+          <a:p>
+            <a:pPr>
+              <a:lnSpc>
+                <a:spcPct val="130000"/>
+              </a:lnSpc>
+            </a:pPr>
+            <a:r>
+              <a:rPr lang="en-US" altLang="zh-CN" sz="2400" b="1"/>
+              <a:t>5. unfreezeProduct </a:t>
+            </a:r>
+            <a:r>
+              <a:rPr lang="zh-CN" altLang="en-US" sz="2400" b="1"/>
+              <a:t>解除商品冻结</a:t>
+            </a:r>
+            <a:endParaRPr lang="zh-CN" altLang="en-US" sz="2400" b="1"/>
+          </a:p>
+          <a:p>
+            <a:pPr>
+              <a:lnSpc>
+                <a:spcPct val="130000"/>
+              </a:lnSpc>
+            </a:pPr>
+            <a:r>
+              <a:rPr lang="en-US" altLang="zh-CN" sz="2400" b="1"/>
+              <a:t>6. startTransaction </a:t>
+            </a:r>
+            <a:r>
+              <a:rPr lang="zh-CN" altLang="en-US" sz="2400" b="1"/>
+              <a:t>开启交易</a:t>
+            </a:r>
+            <a:endParaRPr lang="zh-CN" altLang="en-US" sz="2400" b="1"/>
+          </a:p>
+        </p:txBody>
+      </p:sp>
+      <p:pic>
+        <p:nvPicPr>
+          <p:cNvPr id="13" name="图片 12"/>
+          <p:cNvPicPr>
+            <a:picLocks noChangeAspect="1"/>
+          </p:cNvPicPr>
+          <p:nvPr/>
+        </p:nvPicPr>
+        <p:blipFill>
+          <a:blip r:embed="rId1"/>
+          <a:stretch>
+            <a:fillRect/>
+          </a:stretch>
+        </p:blipFill>
+        <p:spPr>
+          <a:xfrm>
+            <a:off x="521335" y="935355"/>
+            <a:ext cx="5056505" cy="5647690"/>
+          </a:xfrm>
+          <a:prstGeom prst="rect">
+            <a:avLst/>
+          </a:prstGeom>
+        </p:spPr>
+      </p:pic>
+    </p:spTree>
+  </p:cSld>
+  <p:clrMapOvr>
+    <a:masterClrMapping/>
+  </p:clrMapOvr>
+</p:sld>
+</file>
+
+<file path=ppt/slides/slide25.xml><?xml version="1.0" encoding="utf-8"?>
+<p:sld xmlns:a="http://schemas.openxmlformats.org/drawingml/2006/main" xmlns:r="http://schemas.openxmlformats.org/officeDocument/2006/relationships" xmlns:p="http://schemas.openxmlformats.org/presentationml/2006/main">
+  <p:cSld>
+    <p:spTree>
+      <p:nvGrpSpPr>
+        <p:cNvPr id="1" name=""/>
+        <p:cNvGrpSpPr/>
+        <p:nvPr/>
+      </p:nvGrpSpPr>
+      <p:grpSpPr/>
+      <p:sp>
+        <p:nvSpPr>
+          <p:cNvPr id="2" name="Rectangle 1"/>
+          <p:cNvSpPr/>
+          <p:nvPr/>
+        </p:nvSpPr>
+        <p:spPr>
+          <a:xfrm>
+            <a:off x="0" y="0"/>
+            <a:ext cx="12191695" cy="6858000"/>
+          </a:xfrm>
+          <a:prstGeom prst="rect">
+            <a:avLst/>
+          </a:prstGeom>
+          <a:solidFill>
+            <a:srgbClr val="FFFFFF"/>
+          </a:solidFill>
+          <a:ln>
+            <a:noFill/>
+          </a:ln>
+          <a:effectLst/>
+        </p:spPr>
+        <p:style>
+          <a:lnRef idx="1">
+            <a:schemeClr val="accent1"/>
+          </a:lnRef>
+          <a:fillRef idx="3">
+            <a:schemeClr val="accent1"/>
+          </a:fillRef>
+          <a:effectRef idx="2">
+            <a:schemeClr val="accent1"/>
+          </a:effectRef>
+          <a:fontRef idx="minor">
+            <a:schemeClr val="lt1"/>
+          </a:fontRef>
+        </p:style>
+        <p:txBody>
+          <a:bodyPr rtlCol="0" anchor="ctr"/>
+          <a:lstStyle/>
+          <a:p>
+            <a:pPr algn="ctr"/>
+          </a:p>
+        </p:txBody>
+      </p:sp>
+      <p:sp>
+        <p:nvSpPr>
+          <p:cNvPr id="3" name="Rectangle 2"/>
+          <p:cNvSpPr/>
+          <p:nvPr/>
+        </p:nvSpPr>
+        <p:spPr>
+          <a:xfrm>
+            <a:off x="0" y="0"/>
+            <a:ext cx="12191695" cy="109728"/>
+          </a:xfrm>
+          <a:prstGeom prst="rect">
+            <a:avLst/>
+          </a:prstGeom>
+          <a:solidFill>
+            <a:srgbClr val="1F3864"/>
+          </a:solidFill>
+          <a:ln>
+            <a:noFill/>
+          </a:ln>
+          <a:effectLst/>
+        </p:spPr>
+        <p:style>
+          <a:lnRef idx="1">
+            <a:schemeClr val="accent1"/>
+          </a:lnRef>
+          <a:fillRef idx="3">
+            <a:schemeClr val="accent1"/>
+          </a:fillRef>
+          <a:effectRef idx="2">
+            <a:schemeClr val="accent1"/>
+          </a:effectRef>
+          <a:fontRef idx="minor">
+            <a:schemeClr val="lt1"/>
+          </a:fontRef>
+        </p:style>
+        <p:txBody>
+          <a:bodyPr rtlCol="0" anchor="ctr"/>
+          <a:lstStyle/>
+          <a:p>
+            <a:pPr algn="ctr"/>
+          </a:p>
+        </p:txBody>
+      </p:sp>
+      <p:sp>
+        <p:nvSpPr>
+          <p:cNvPr id="4" name="Rectangle 3"/>
+          <p:cNvSpPr/>
+          <p:nvPr/>
+        </p:nvSpPr>
+        <p:spPr>
+          <a:xfrm>
+            <a:off x="0" y="109728"/>
+            <a:ext cx="12191695" cy="27432"/>
+          </a:xfrm>
+          <a:prstGeom prst="rect">
+            <a:avLst/>
+          </a:prstGeom>
+          <a:solidFill>
+            <a:srgbClr val="B8860B"/>
+          </a:solidFill>
+          <a:ln>
+            <a:noFill/>
+          </a:ln>
+          <a:effectLst/>
+        </p:spPr>
+        <p:style>
+          <a:lnRef idx="1">
+            <a:schemeClr val="accent1"/>
+          </a:lnRef>
+          <a:fillRef idx="3">
+            <a:schemeClr val="accent1"/>
+          </a:fillRef>
+          <a:effectRef idx="2">
+            <a:schemeClr val="accent1"/>
+          </a:effectRef>
+          <a:fontRef idx="minor">
+            <a:schemeClr val="lt1"/>
+          </a:fontRef>
+        </p:style>
+        <p:txBody>
+          <a:bodyPr rtlCol="0" anchor="ctr"/>
+          <a:lstStyle/>
+          <a:p>
+            <a:pPr algn="ctr"/>
+          </a:p>
+        </p:txBody>
+      </p:sp>
+      <p:sp>
+        <p:nvSpPr>
+          <p:cNvPr id="5" name="TextBox 4"/>
+          <p:cNvSpPr txBox="1"/>
+          <p:nvPr/>
+        </p:nvSpPr>
+        <p:spPr>
+          <a:xfrm>
+            <a:off x="502920" y="292608"/>
+            <a:ext cx="9875520" cy="459740"/>
+          </a:xfrm>
+          <a:prstGeom prst="rect">
+            <a:avLst/>
+          </a:prstGeom>
+          <a:noFill/>
+        </p:spPr>
+        <p:txBody>
+          <a:bodyPr wrap="square" lIns="0" tIns="0" rIns="0" bIns="0" anchor="t">
+            <a:spAutoFit/>
+          </a:bodyPr>
+          <a:lstStyle/>
+          <a:p>
+            <a:pPr algn="l">
+              <a:lnSpc>
+                <a:spcPct val="115000"/>
+              </a:lnSpc>
+              <a:spcAft>
+                <a:spcPts val="400"/>
+              </a:spcAft>
+            </a:pPr>
+            <a:r>
+              <a:rPr lang="zh-CN" sz="2600" b="1" i="0">
+                <a:solidFill>
+                  <a:srgbClr val="1F3864"/>
+                </a:solidFill>
+                <a:latin typeface="微软雅黑" panose="020B0503020204020204" charset="-122"/>
+                <a:ea typeface="微软雅黑" panose="020B0503020204020204" charset="-122"/>
+              </a:rPr>
+              <a:t>后端</a:t>
+            </a:r>
+            <a:endParaRPr lang="zh-CN" sz="2600" b="1" i="0">
+              <a:solidFill>
+                <a:srgbClr val="1F3864"/>
+              </a:solidFill>
+              <a:latin typeface="微软雅黑" panose="020B0503020204020204" charset="-122"/>
+              <a:ea typeface="微软雅黑" panose="020B0503020204020204" charset="-122"/>
+            </a:endParaRPr>
+          </a:p>
+        </p:txBody>
+      </p:sp>
+      <p:sp>
+        <p:nvSpPr>
+          <p:cNvPr id="6" name="Rectangle 5"/>
+          <p:cNvSpPr/>
+          <p:nvPr/>
+        </p:nvSpPr>
+        <p:spPr>
+          <a:xfrm>
+            <a:off x="521207" y="896112"/>
+            <a:ext cx="502920" cy="45720"/>
+          </a:xfrm>
+          <a:prstGeom prst="rect">
+            <a:avLst/>
+          </a:prstGeom>
+          <a:solidFill>
+            <a:srgbClr val="B8860B"/>
+          </a:solidFill>
+          <a:ln>
+            <a:noFill/>
+          </a:ln>
+          <a:effectLst/>
+        </p:spPr>
+        <p:style>
+          <a:lnRef idx="1">
+            <a:schemeClr val="accent1"/>
+          </a:lnRef>
+          <a:fillRef idx="3">
+            <a:schemeClr val="accent1"/>
+          </a:fillRef>
+          <a:effectRef idx="2">
+            <a:schemeClr val="accent1"/>
+          </a:effectRef>
+          <a:fontRef idx="minor">
+            <a:schemeClr val="lt1"/>
+          </a:fontRef>
+        </p:style>
+        <p:txBody>
+          <a:bodyPr rtlCol="0" anchor="ctr"/>
+          <a:lstStyle/>
+          <a:p>
+            <a:pPr algn="ctr"/>
+          </a:p>
+        </p:txBody>
+      </p:sp>
+      <p:sp>
+        <p:nvSpPr>
+          <p:cNvPr id="7" name="Rectangle 6"/>
+          <p:cNvSpPr/>
+          <p:nvPr/>
+        </p:nvSpPr>
+        <p:spPr>
+          <a:xfrm>
+            <a:off x="1078992" y="896112"/>
+            <a:ext cx="10607040" cy="13716"/>
+          </a:xfrm>
+          <a:prstGeom prst="rect">
+            <a:avLst/>
+          </a:prstGeom>
+          <a:solidFill>
+            <a:srgbClr val="2E75B6"/>
+          </a:solidFill>
+          <a:ln>
+            <a:noFill/>
+          </a:ln>
+          <a:effectLst/>
+        </p:spPr>
+        <p:style>
+          <a:lnRef idx="1">
+            <a:schemeClr val="accent1"/>
+          </a:lnRef>
+          <a:fillRef idx="3">
+            <a:schemeClr val="accent1"/>
+          </a:fillRef>
+          <a:effectRef idx="2">
+            <a:schemeClr val="accent1"/>
+          </a:effectRef>
+          <a:fontRef idx="minor">
+            <a:schemeClr val="lt1"/>
+          </a:fontRef>
+        </p:style>
+        <p:txBody>
+          <a:bodyPr rtlCol="0" anchor="ctr"/>
+          <a:lstStyle/>
+          <a:p>
+            <a:pPr algn="ctr"/>
+          </a:p>
+        </p:txBody>
+      </p:sp>
+      <p:sp>
+        <p:nvSpPr>
+          <p:cNvPr id="9" name="Rectangle 8"/>
+          <p:cNvSpPr/>
+          <p:nvPr/>
+        </p:nvSpPr>
+        <p:spPr>
+          <a:xfrm>
+            <a:off x="0" y="6565392"/>
+            <a:ext cx="12191695" cy="292608"/>
+          </a:xfrm>
+          <a:prstGeom prst="rect">
+            <a:avLst/>
+          </a:prstGeom>
+          <a:solidFill>
+            <a:srgbClr val="EEF4FB"/>
+          </a:solidFill>
+          <a:ln>
+            <a:noFill/>
+          </a:ln>
+          <a:effectLst/>
+        </p:spPr>
+        <p:style>
+          <a:lnRef idx="1">
+            <a:schemeClr val="accent1"/>
+          </a:lnRef>
+          <a:fillRef idx="3">
+            <a:schemeClr val="accent1"/>
+          </a:fillRef>
+          <a:effectRef idx="2">
+            <a:schemeClr val="accent1"/>
+          </a:effectRef>
+          <a:fontRef idx="minor">
+            <a:schemeClr val="lt1"/>
+          </a:fontRef>
+        </p:style>
+        <p:txBody>
+          <a:bodyPr rtlCol="0" anchor="ctr"/>
+          <a:lstStyle/>
+          <a:p>
+            <a:pPr algn="ctr"/>
+          </a:p>
+        </p:txBody>
+      </p:sp>
+      <p:sp>
+        <p:nvSpPr>
+          <p:cNvPr id="10" name="TextBox 9"/>
+          <p:cNvSpPr txBox="1"/>
+          <p:nvPr/>
+        </p:nvSpPr>
+        <p:spPr>
+          <a:xfrm>
+            <a:off x="502920" y="6592824"/>
+            <a:ext cx="7315200" cy="176530"/>
+          </a:xfrm>
+          <a:prstGeom prst="rect">
+            <a:avLst/>
+          </a:prstGeom>
+          <a:noFill/>
+        </p:spPr>
+        <p:txBody>
+          <a:bodyPr wrap="square" lIns="0" tIns="0" rIns="0" bIns="0" anchor="t">
+            <a:spAutoFit/>
+          </a:bodyPr>
+          <a:lstStyle/>
+          <a:p>
+            <a:pPr algn="l">
+              <a:lnSpc>
+                <a:spcPct val="115000"/>
+              </a:lnSpc>
+              <a:spcAft>
+                <a:spcPts val="400"/>
+              </a:spcAft>
+            </a:pPr>
+            <a:r>
+              <a:rPr sz="1000" b="0" i="0">
+                <a:solidFill>
+                  <a:srgbClr val="7F7F7F"/>
+                </a:solidFill>
+                <a:latin typeface="微软雅黑" panose="020B0503020204020204" charset="-122"/>
+                <a:ea typeface="微软雅黑" panose="020B0503020204020204" charset="-122"/>
+              </a:rPr>
+              <a:t>在线购物系统 · 第 1 次阶段性评审 · 项目组 9</a:t>
+            </a:r>
+            <a:endParaRPr sz="1000" b="0" i="0">
+              <a:solidFill>
+                <a:srgbClr val="7F7F7F"/>
+              </a:solidFill>
+              <a:latin typeface="微软雅黑" panose="020B0503020204020204" charset="-122"/>
+              <a:ea typeface="微软雅黑" panose="020B0503020204020204" charset="-122"/>
+            </a:endParaRPr>
+          </a:p>
+        </p:txBody>
+      </p:sp>
+      <p:sp>
+        <p:nvSpPr>
+          <p:cNvPr id="11" name="TextBox 10"/>
+          <p:cNvSpPr txBox="1"/>
+          <p:nvPr/>
+        </p:nvSpPr>
+        <p:spPr>
+          <a:xfrm>
+            <a:off x="11247120" y="6592824"/>
+            <a:ext cx="548640" cy="256032"/>
+          </a:xfrm>
+          <a:prstGeom prst="rect">
+            <a:avLst/>
+          </a:prstGeom>
+          <a:noFill/>
+        </p:spPr>
+        <p:txBody>
+          <a:bodyPr wrap="square" lIns="0" tIns="0" rIns="0" bIns="0" anchor="t">
+            <a:spAutoFit/>
+          </a:bodyPr>
+          <a:lstStyle/>
+          <a:p>
+            <a:pPr algn="r">
+              <a:lnSpc>
+                <a:spcPct val="115000"/>
+              </a:lnSpc>
+              <a:spcAft>
+                <a:spcPts val="400"/>
+              </a:spcAft>
+            </a:pPr>
+            <a:r>
+              <a:rPr sz="1000" b="1" i="0">
+                <a:solidFill>
+                  <a:srgbClr val="2E75B6"/>
+                </a:solidFill>
+                <a:latin typeface="微软雅黑" panose="020B0503020204020204" charset="-122"/>
+                <a:ea typeface="微软雅黑" panose="020B0503020204020204" charset="-122"/>
+              </a:rPr>
+              <a:t>10</a:t>
+            </a:r>
+            <a:endParaRPr sz="1000" b="1" i="0">
+              <a:solidFill>
+                <a:srgbClr val="2E75B6"/>
+              </a:solidFill>
+              <a:latin typeface="微软雅黑" panose="020B0503020204020204" charset="-122"/>
+              <a:ea typeface="微软雅黑" panose="020B0503020204020204" charset="-122"/>
+            </a:endParaRPr>
+          </a:p>
+        </p:txBody>
+      </p:sp>
+      <p:sp>
+        <p:nvSpPr>
+          <p:cNvPr id="12" name="Rounded Rectangle 11"/>
+          <p:cNvSpPr/>
+          <p:nvPr/>
+        </p:nvSpPr>
+        <p:spPr>
+          <a:xfrm>
+            <a:off x="10104120" y="320040"/>
+            <a:ext cx="1600200" cy="384048"/>
+          </a:xfrm>
+          <a:prstGeom prst="roundRect">
+            <a:avLst>
+              <a:gd name="adj" fmla="val 50000"/>
+            </a:avLst>
+          </a:prstGeom>
+          <a:solidFill>
+            <a:srgbClr val="DEEBF7"/>
+          </a:solidFill>
+          <a:ln>
+            <a:noFill/>
+          </a:ln>
+          <a:effectLst/>
+        </p:spPr>
+        <p:style>
+          <a:lnRef idx="1">
+            <a:schemeClr val="accent1"/>
+          </a:lnRef>
+          <a:fillRef idx="3">
+            <a:schemeClr val="accent1"/>
+          </a:fillRef>
+          <a:effectRef idx="2">
+            <a:schemeClr val="accent1"/>
+          </a:effectRef>
+          <a:fontRef idx="minor">
+            <a:schemeClr val="lt1"/>
+          </a:fontRef>
+        </p:style>
+        <p:txBody>
+          <a:bodyPr wrap="none" rtlCol="0" anchor="ctr"/>
+          <a:lstStyle/>
+          <a:p>
+            <a:pPr algn="ctr"/>
+            <a:r>
+              <a:rPr lang="zh-CN" sz="1100" b="1" i="0">
+                <a:solidFill>
+                  <a:srgbClr val="1F3864"/>
+                </a:solidFill>
+                <a:latin typeface="微软雅黑" panose="020B0503020204020204" charset="-122"/>
+                <a:ea typeface="微软雅黑" panose="020B0503020204020204" charset="-122"/>
+              </a:rPr>
+              <a:t>其他</a:t>
+            </a:r>
+            <a:r>
+              <a:rPr lang="zh-CN" sz="1100" b="1" i="0">
+                <a:solidFill>
+                  <a:srgbClr val="1F3864"/>
+                </a:solidFill>
+                <a:latin typeface="微软雅黑" panose="020B0503020204020204" charset="-122"/>
+                <a:ea typeface="微软雅黑" panose="020B0503020204020204" charset="-122"/>
+              </a:rPr>
+              <a:t>进展</a:t>
+            </a:r>
+            <a:endParaRPr lang="zh-CN" sz="1100" b="1" i="0">
+              <a:solidFill>
+                <a:srgbClr val="1F3864"/>
+              </a:solidFill>
+              <a:latin typeface="微软雅黑" panose="020B0503020204020204" charset="-122"/>
+              <a:ea typeface="微软雅黑" panose="020B0503020204020204" charset="-122"/>
+            </a:endParaRPr>
+          </a:p>
+        </p:txBody>
+      </p:sp>
+      <p:sp>
+        <p:nvSpPr>
+          <p:cNvPr id="13" name="圆角矩形 12"/>
+          <p:cNvSpPr/>
+          <p:nvPr/>
+        </p:nvSpPr>
+        <p:spPr>
+          <a:xfrm>
+            <a:off x="1132205" y="1459230"/>
+            <a:ext cx="3566795" cy="1198880"/>
+          </a:xfrm>
+          <a:prstGeom prst="roundRect">
+            <a:avLst/>
+          </a:prstGeom>
+          <a:solidFill>
+            <a:schemeClr val="accent1">
+              <a:lumMod val="20000"/>
+              <a:lumOff val="80000"/>
+            </a:schemeClr>
+          </a:solidFill>
+        </p:spPr>
+        <p:style>
+          <a:lnRef idx="1">
+            <a:schemeClr val="accent1"/>
+          </a:lnRef>
+          <a:fillRef idx="3">
+            <a:schemeClr val="accent1"/>
+          </a:fillRef>
+          <a:effectRef idx="2">
+            <a:schemeClr val="accent1"/>
+          </a:effectRef>
+          <a:fontRef idx="minor">
+            <a:schemeClr val="lt1"/>
+          </a:fontRef>
+        </p:style>
+        <p:txBody>
+          <a:bodyPr/>
+          <a:p>
+            <a:endParaRPr lang="zh-CN" altLang="en-US"/>
+          </a:p>
+        </p:txBody>
+      </p:sp>
+      <p:sp>
+        <p:nvSpPr>
+          <p:cNvPr id="8" name="文本框 7"/>
+          <p:cNvSpPr txBox="1"/>
+          <p:nvPr/>
+        </p:nvSpPr>
+        <p:spPr>
+          <a:xfrm>
+            <a:off x="1132840" y="1467485"/>
+            <a:ext cx="3639820" cy="1198880"/>
+          </a:xfrm>
+          <a:prstGeom prst="rect">
+            <a:avLst/>
+          </a:prstGeom>
+          <a:noFill/>
+        </p:spPr>
+        <p:txBody>
+          <a:bodyPr wrap="square" rtlCol="0">
+            <a:spAutoFit/>
+          </a:bodyPr>
+          <a:p>
+            <a:r>
+              <a:rPr lang="zh-CN" altLang="en-US" sz="2400"/>
+              <a:t>本机已就绪 </a:t>
+            </a:r>
+            <a:r>
+              <a:rPr lang="en-US" altLang="zh-CN" sz="2400"/>
+              <a:t>Python </a:t>
+            </a:r>
+            <a:r>
+              <a:rPr lang="zh-CN" altLang="en-US" sz="2400"/>
+              <a:t>而缺少 </a:t>
+            </a:r>
+            <a:r>
+              <a:rPr lang="en-US" altLang="zh-CN" sz="2400"/>
+              <a:t>Maven/Node，</a:t>
+            </a:r>
+            <a:r>
+              <a:rPr lang="zh-CN" altLang="en-US" sz="2400"/>
+              <a:t>且需求明确要求接口文档</a:t>
+            </a:r>
+            <a:endParaRPr lang="zh-CN" altLang="en-US" sz="2400"/>
+          </a:p>
+        </p:txBody>
+      </p:sp>
+      <p:cxnSp>
+        <p:nvCxnSpPr>
+          <p:cNvPr id="14" name="直接箭头连接符 13"/>
+          <p:cNvCxnSpPr/>
+          <p:nvPr/>
+        </p:nvCxnSpPr>
+        <p:spPr>
+          <a:xfrm>
+            <a:off x="4772660" y="1882775"/>
+            <a:ext cx="2286000" cy="0"/>
+          </a:xfrm>
+          <a:prstGeom prst="straightConnector1">
+            <a:avLst/>
+          </a:prstGeom>
+          <a:ln>
+            <a:tailEnd type="arrow"/>
+          </a:ln>
+        </p:spPr>
+        <p:style>
+          <a:lnRef idx="2">
+            <a:schemeClr val="accent1"/>
+          </a:lnRef>
+          <a:fillRef idx="0">
+            <a:schemeClr val="accent1"/>
+          </a:fillRef>
+          <a:effectRef idx="1">
+            <a:schemeClr val="accent1"/>
+          </a:effectRef>
+          <a:fontRef idx="minor">
+            <a:schemeClr val="tx1"/>
+          </a:fontRef>
+        </p:style>
+      </p:cxnSp>
+      <p:sp>
+        <p:nvSpPr>
+          <p:cNvPr id="17" name="圆角矩形 16"/>
+          <p:cNvSpPr/>
+          <p:nvPr/>
+        </p:nvSpPr>
+        <p:spPr>
+          <a:xfrm>
+            <a:off x="7387590" y="1459230"/>
+            <a:ext cx="2120265" cy="922020"/>
+          </a:xfrm>
+          <a:prstGeom prst="roundRect">
+            <a:avLst/>
+          </a:prstGeom>
+          <a:solidFill>
+            <a:schemeClr val="accent1">
+              <a:lumMod val="20000"/>
+              <a:lumOff val="80000"/>
+            </a:schemeClr>
+          </a:solidFill>
+        </p:spPr>
+        <p:style>
+          <a:lnRef idx="1">
+            <a:schemeClr val="accent1"/>
+          </a:lnRef>
+          <a:fillRef idx="3">
+            <a:schemeClr val="accent1"/>
+          </a:fillRef>
+          <a:effectRef idx="2">
+            <a:schemeClr val="accent1"/>
+          </a:effectRef>
+          <a:fontRef idx="minor">
+            <a:schemeClr val="lt1"/>
+          </a:fontRef>
+        </p:style>
+        <p:txBody>
+          <a:bodyPr/>
+          <a:p>
+            <a:endParaRPr lang="zh-CN" altLang="en-US"/>
+          </a:p>
+        </p:txBody>
+      </p:sp>
+      <p:sp>
+        <p:nvSpPr>
+          <p:cNvPr id="15" name="文本框 14"/>
+          <p:cNvSpPr txBox="1"/>
+          <p:nvPr/>
+        </p:nvSpPr>
+        <p:spPr>
+          <a:xfrm>
+            <a:off x="7524750" y="1532890"/>
+            <a:ext cx="2494915" cy="829945"/>
+          </a:xfrm>
+          <a:prstGeom prst="rect">
+            <a:avLst/>
+          </a:prstGeom>
+          <a:noFill/>
+        </p:spPr>
+        <p:txBody>
+          <a:bodyPr wrap="square" rtlCol="0">
+            <a:spAutoFit/>
+          </a:bodyPr>
+          <a:p>
+            <a:r>
+              <a:rPr lang="en-US" altLang="zh-CN" sz="2400"/>
+              <a:t> FastAPI    </a:t>
+            </a:r>
+            <a:r>
+              <a:rPr lang="en-US" altLang="zh-CN" sz="2400">
+                <a:solidFill>
+                  <a:srgbClr val="92D050"/>
+                </a:solidFill>
+              </a:rPr>
+              <a:t>√</a:t>
+            </a:r>
+            <a:endParaRPr lang="en-US" altLang="zh-CN" sz="2400"/>
+          </a:p>
+          <a:p>
+            <a:r>
+              <a:rPr lang="en-US" altLang="zh-CN" sz="2400"/>
+              <a:t>Spring Boot </a:t>
+            </a:r>
+            <a:r>
+              <a:rPr lang="zh-CN" altLang="en-US" sz="2400">
+                <a:solidFill>
+                  <a:srgbClr val="FF0000"/>
+                </a:solidFill>
+              </a:rPr>
+              <a:t>×</a:t>
+            </a:r>
+            <a:endParaRPr lang="zh-CN" altLang="en-US" sz="2400">
+              <a:solidFill>
+                <a:srgbClr val="FF0000"/>
+              </a:solidFill>
+            </a:endParaRPr>
+          </a:p>
+        </p:txBody>
+      </p:sp>
+      <p:sp>
+        <p:nvSpPr>
+          <p:cNvPr id="16" name="圆角矩形 15"/>
+          <p:cNvSpPr/>
+          <p:nvPr/>
+        </p:nvSpPr>
+        <p:spPr>
+          <a:xfrm>
+            <a:off x="1132205" y="2930525"/>
+            <a:ext cx="3598545" cy="890905"/>
+          </a:xfrm>
+          <a:prstGeom prst="roundRect">
+            <a:avLst/>
+          </a:prstGeom>
+          <a:solidFill>
+            <a:schemeClr val="accent1">
+              <a:lumMod val="20000"/>
+              <a:lumOff val="80000"/>
+            </a:schemeClr>
+          </a:solidFill>
+        </p:spPr>
+        <p:style>
+          <a:lnRef idx="1">
+            <a:schemeClr val="accent1"/>
+          </a:lnRef>
+          <a:fillRef idx="3">
+            <a:schemeClr val="accent1"/>
+          </a:fillRef>
+          <a:effectRef idx="2">
+            <a:schemeClr val="accent1"/>
+          </a:effectRef>
+          <a:fontRef idx="minor">
+            <a:schemeClr val="lt1"/>
+          </a:fontRef>
+        </p:style>
+        <p:txBody>
+          <a:bodyPr/>
+          <a:p>
+            <a:endParaRPr lang="zh-CN" altLang="en-US"/>
+          </a:p>
+        </p:txBody>
+      </p:sp>
+      <p:sp>
+        <p:nvSpPr>
+          <p:cNvPr id="18" name="圆角矩形 17"/>
+          <p:cNvSpPr/>
+          <p:nvPr/>
+        </p:nvSpPr>
+        <p:spPr>
+          <a:xfrm>
+            <a:off x="7387590" y="2985770"/>
+            <a:ext cx="2416810" cy="772160"/>
+          </a:xfrm>
+          <a:prstGeom prst="roundRect">
+            <a:avLst/>
+          </a:prstGeom>
+          <a:solidFill>
+            <a:schemeClr val="accent1">
+              <a:lumMod val="20000"/>
+              <a:lumOff val="80000"/>
+            </a:schemeClr>
+          </a:solidFill>
+        </p:spPr>
+        <p:style>
+          <a:lnRef idx="1">
+            <a:schemeClr val="accent1"/>
+          </a:lnRef>
+          <a:fillRef idx="3">
+            <a:schemeClr val="accent1"/>
+          </a:fillRef>
+          <a:effectRef idx="2">
+            <a:schemeClr val="accent1"/>
+          </a:effectRef>
+          <a:fontRef idx="minor">
+            <a:schemeClr val="lt1"/>
+          </a:fontRef>
+        </p:style>
+        <p:txBody>
+          <a:bodyPr/>
+          <a:p>
+            <a:endParaRPr lang="zh-CN" altLang="en-US"/>
+          </a:p>
+        </p:txBody>
+      </p:sp>
+      <p:sp>
+        <p:nvSpPr>
+          <p:cNvPr id="41" name="文本框 40"/>
+          <p:cNvSpPr txBox="1"/>
+          <p:nvPr/>
+        </p:nvSpPr>
+        <p:spPr>
+          <a:xfrm>
+            <a:off x="7524750" y="3153410"/>
+            <a:ext cx="2359660" cy="460375"/>
+          </a:xfrm>
+          <a:prstGeom prst="rect">
+            <a:avLst/>
+          </a:prstGeom>
+          <a:noFill/>
+        </p:spPr>
+        <p:txBody>
+          <a:bodyPr wrap="square" rtlCol="0">
+            <a:spAutoFit/>
+          </a:bodyPr>
+          <a:p>
+            <a:r>
+              <a:rPr lang="zh-CN" altLang="en-US" sz="2400"/>
+              <a:t>零配置的 </a:t>
+            </a:r>
+            <a:r>
+              <a:rPr lang="en-US" altLang="zh-CN" sz="2400"/>
+              <a:t>SQLite</a:t>
+            </a:r>
+            <a:endParaRPr lang="en-US" altLang="zh-CN" sz="2400"/>
+          </a:p>
+        </p:txBody>
+      </p:sp>
+      <p:sp>
+        <p:nvSpPr>
+          <p:cNvPr id="45" name="文本框 44"/>
+          <p:cNvSpPr txBox="1"/>
+          <p:nvPr/>
+        </p:nvSpPr>
+        <p:spPr>
+          <a:xfrm>
+            <a:off x="1132840" y="2950210"/>
+            <a:ext cx="3660140" cy="829945"/>
+          </a:xfrm>
+          <a:prstGeom prst="rect">
+            <a:avLst/>
+          </a:prstGeom>
+          <a:noFill/>
+        </p:spPr>
+        <p:txBody>
+          <a:bodyPr wrap="square" rtlCol="0">
+            <a:spAutoFit/>
+          </a:bodyPr>
+          <a:p>
+            <a:r>
+              <a:rPr lang="zh-CN" altLang="en-US" sz="2400"/>
+              <a:t>"单卖家、任一时刻仅一件商品在售、队列个位数"</a:t>
+            </a:r>
+            <a:endParaRPr lang="zh-CN" altLang="en-US" sz="2400"/>
+          </a:p>
+        </p:txBody>
+      </p:sp>
+      <p:pic>
+        <p:nvPicPr>
+          <p:cNvPr id="52" name="图片 51"/>
+          <p:cNvPicPr>
+            <a:picLocks noChangeAspect="1"/>
+          </p:cNvPicPr>
+          <p:nvPr/>
+        </p:nvPicPr>
+        <p:blipFill>
+          <a:blip r:embed="rId1"/>
+          <a:stretch>
+            <a:fillRect/>
+          </a:stretch>
+        </p:blipFill>
+        <p:spPr>
+          <a:xfrm>
+            <a:off x="9819005" y="4375150"/>
+            <a:ext cx="2482850" cy="2482850"/>
+          </a:xfrm>
+          <a:prstGeom prst="rect">
+            <a:avLst/>
+          </a:prstGeom>
+        </p:spPr>
+      </p:pic>
+      <p:sp>
+        <p:nvSpPr>
+          <p:cNvPr id="48" name="Rounded Rectangle 30"/>
+          <p:cNvSpPr/>
+          <p:nvPr/>
+        </p:nvSpPr>
+        <p:spPr>
+          <a:xfrm>
+            <a:off x="1078865" y="4561840"/>
+            <a:ext cx="10117455" cy="706120"/>
+          </a:xfrm>
+          <a:prstGeom prst="roundRect">
+            <a:avLst/>
+          </a:prstGeom>
+          <a:solidFill>
+            <a:srgbClr val="FFFFFF"/>
+          </a:solidFill>
+          <a:ln w="19050">
+            <a:solidFill>
+              <a:srgbClr val="B8860B"/>
+            </a:solidFill>
+          </a:ln>
+          <a:effectLst/>
+        </p:spPr>
+        <p:style>
+          <a:lnRef idx="1">
+            <a:schemeClr val="accent1"/>
+          </a:lnRef>
+          <a:fillRef idx="3">
+            <a:schemeClr val="accent1"/>
+          </a:fillRef>
+          <a:effectRef idx="2">
+            <a:schemeClr val="accent1"/>
+          </a:effectRef>
+          <a:fontRef idx="minor">
+            <a:schemeClr val="lt1"/>
+          </a:fontRef>
+        </p:style>
+        <p:txBody>
+          <a:bodyPr rtlCol="0" anchor="ctr"/>
+          <a:lstStyle/>
+          <a:p>
+            <a:pPr algn="ctr"/>
+            <a:r>
+              <a:rPr lang="zh-CN" altLang="en-US">
+                <a:sym typeface="+mn-ea"/>
+              </a:rPr>
+              <a:t>先让空壳服务跑通再动业务，把表结构、改一次要返工一大片"的决策全部前置成文档</a:t>
+            </a:r>
+            <a:endParaRPr lang="zh-CN" altLang="en-US"/>
+          </a:p>
+          <a:p>
+            <a:pPr algn="ctr"/>
+            <a:endParaRPr lang="zh-CN" altLang="en-US"/>
+          </a:p>
+        </p:txBody>
+      </p:sp>
+      <p:sp>
+        <p:nvSpPr>
+          <p:cNvPr id="46" name="文本框 45"/>
+          <p:cNvSpPr txBox="1"/>
+          <p:nvPr/>
+        </p:nvSpPr>
+        <p:spPr>
+          <a:xfrm>
+            <a:off x="1078865" y="4622800"/>
+            <a:ext cx="9387205" cy="645160"/>
+          </a:xfrm>
+          <a:prstGeom prst="rect">
+            <a:avLst/>
+          </a:prstGeom>
+          <a:noFill/>
+        </p:spPr>
+        <p:txBody>
+          <a:bodyPr wrap="square" rtlCol="0">
+            <a:spAutoFit/>
+          </a:bodyPr>
+          <a:p>
+            <a:r>
+              <a:rPr lang="zh-CN" altLang="en-US"/>
+              <a:t>先让空壳服务跑通再动业务，把表结构、状态机这些"改一次要返工一大片"的决策全部前置成文档</a:t>
+            </a:r>
+            <a:endParaRPr lang="zh-CN" altLang="en-US"/>
+          </a:p>
+        </p:txBody>
+      </p:sp>
+      <p:cxnSp>
+        <p:nvCxnSpPr>
+          <p:cNvPr id="47" name="直接箭头连接符 46"/>
+          <p:cNvCxnSpPr/>
+          <p:nvPr/>
+        </p:nvCxnSpPr>
+        <p:spPr>
+          <a:xfrm>
+            <a:off x="4699000" y="3380740"/>
+            <a:ext cx="2359660" cy="0"/>
+          </a:xfrm>
+          <a:prstGeom prst="straightConnector1">
+            <a:avLst/>
+          </a:prstGeom>
+          <a:ln>
+            <a:tailEnd type="arrow"/>
+          </a:ln>
+        </p:spPr>
+        <p:style>
+          <a:lnRef idx="2">
+            <a:schemeClr val="accent1"/>
+          </a:lnRef>
+          <a:fillRef idx="0">
+            <a:schemeClr val="accent1"/>
+          </a:fillRef>
+          <a:effectRef idx="1">
+            <a:schemeClr val="accent1"/>
+          </a:effectRef>
+          <a:fontRef idx="minor">
+            <a:schemeClr val="tx1"/>
+          </a:fontRef>
+        </p:style>
+      </p:cxnSp>
+      <p:pic>
+        <p:nvPicPr>
+          <p:cNvPr id="51" name="图片 50"/>
+          <p:cNvPicPr>
+            <a:picLocks noChangeAspect="1"/>
+          </p:cNvPicPr>
+          <p:nvPr/>
+        </p:nvPicPr>
+        <p:blipFill>
+          <a:blip r:embed="rId2"/>
+          <a:stretch>
+            <a:fillRect/>
+          </a:stretch>
+        </p:blipFill>
+        <p:spPr>
+          <a:xfrm rot="16200000">
+            <a:off x="4231005" y="612775"/>
+            <a:ext cx="3368675" cy="4013200"/>
+          </a:xfrm>
+          <a:prstGeom prst="rect">
+            <a:avLst/>
+          </a:prstGeom>
+        </p:spPr>
+      </p:pic>
+    </p:spTree>
+  </p:cSld>
+  <p:clrMapOvr>
+    <a:masterClrMapping/>
+  </p:clrMapOvr>
+</p:sld>
+</file>
+
+<file path=ppt/slides/slide26.xml><?xml version="1.0" encoding="utf-8"?>
+<p:sld xmlns:a="http://schemas.openxmlformats.org/drawingml/2006/main" xmlns:r="http://schemas.openxmlformats.org/officeDocument/2006/relationships" xmlns:p="http://schemas.openxmlformats.org/presentationml/2006/main">
+  <p:cSld>
+    <p:spTree>
+      <p:nvGrpSpPr>
+        <p:cNvPr id="1" name=""/>
+        <p:cNvGrpSpPr/>
+        <p:nvPr/>
+      </p:nvGrpSpPr>
+      <p:grpSpPr/>
+      <p:sp>
+        <p:nvSpPr>
+          <p:cNvPr id="3" name="Rectangle 2"/>
+          <p:cNvSpPr/>
+          <p:nvPr/>
+        </p:nvSpPr>
+        <p:spPr>
+          <a:xfrm>
+            <a:off x="0" y="0"/>
+            <a:ext cx="12191695" cy="109728"/>
+          </a:xfrm>
+          <a:prstGeom prst="rect">
+            <a:avLst/>
+          </a:prstGeom>
+          <a:solidFill>
+            <a:srgbClr val="1F3864"/>
+          </a:solidFill>
+          <a:ln>
+            <a:noFill/>
+          </a:ln>
+          <a:effectLst/>
+        </p:spPr>
+        <p:style>
+          <a:lnRef idx="1">
+            <a:schemeClr val="accent1"/>
+          </a:lnRef>
+          <a:fillRef idx="3">
+            <a:schemeClr val="accent1"/>
+          </a:fillRef>
+          <a:effectRef idx="2">
+            <a:schemeClr val="accent1"/>
+          </a:effectRef>
+          <a:fontRef idx="minor">
+            <a:schemeClr val="lt1"/>
+          </a:fontRef>
+        </p:style>
+        <p:txBody>
+          <a:bodyPr rtlCol="0" anchor="ctr"/>
+          <a:lstStyle/>
+          <a:p>
+            <a:pPr algn="ctr"/>
+          </a:p>
+        </p:txBody>
+      </p:sp>
+      <p:sp>
+        <p:nvSpPr>
+          <p:cNvPr id="4" name="Rectangle 3"/>
+          <p:cNvSpPr/>
+          <p:nvPr/>
+        </p:nvSpPr>
+        <p:spPr>
+          <a:xfrm>
+            <a:off x="0" y="109728"/>
+            <a:ext cx="12191695" cy="27432"/>
+          </a:xfrm>
+          <a:prstGeom prst="rect">
+            <a:avLst/>
+          </a:prstGeom>
+          <a:solidFill>
+            <a:srgbClr val="B8860B"/>
+          </a:solidFill>
+          <a:ln>
+            <a:noFill/>
+          </a:ln>
+          <a:effectLst/>
+        </p:spPr>
+        <p:style>
+          <a:lnRef idx="1">
+            <a:schemeClr val="accent1"/>
+          </a:lnRef>
+          <a:fillRef idx="3">
+            <a:schemeClr val="accent1"/>
+          </a:fillRef>
+          <a:effectRef idx="2">
+            <a:schemeClr val="accent1"/>
+          </a:effectRef>
+          <a:fontRef idx="minor">
+            <a:schemeClr val="lt1"/>
+          </a:fontRef>
+        </p:style>
+        <p:txBody>
+          <a:bodyPr rtlCol="0" anchor="ctr"/>
+          <a:lstStyle/>
+          <a:p>
+            <a:pPr algn="ctr"/>
+          </a:p>
+        </p:txBody>
+      </p:sp>
+      <p:sp>
+        <p:nvSpPr>
+          <p:cNvPr id="5" name="TextBox 4"/>
+          <p:cNvSpPr txBox="1"/>
+          <p:nvPr/>
+        </p:nvSpPr>
+        <p:spPr>
+          <a:xfrm>
+            <a:off x="502920" y="292608"/>
+            <a:ext cx="9875520" cy="459740"/>
+          </a:xfrm>
+          <a:prstGeom prst="rect">
+            <a:avLst/>
+          </a:prstGeom>
+          <a:noFill/>
+        </p:spPr>
+        <p:txBody>
+          <a:bodyPr wrap="square" lIns="0" tIns="0" rIns="0" bIns="0" anchor="t">
+            <a:spAutoFit/>
+          </a:bodyPr>
+          <a:lstStyle/>
+          <a:p>
+            <a:pPr algn="l">
+              <a:lnSpc>
+                <a:spcPct val="115000"/>
+              </a:lnSpc>
+              <a:spcAft>
+                <a:spcPts val="400"/>
+              </a:spcAft>
+            </a:pPr>
+            <a:r>
+              <a:rPr lang="zh-CN" sz="2600" b="1" i="0">
+                <a:solidFill>
+                  <a:srgbClr val="1F3864"/>
+                </a:solidFill>
+                <a:latin typeface="微软雅黑" panose="020B0503020204020204" charset="-122"/>
+                <a:ea typeface="微软雅黑" panose="020B0503020204020204" charset="-122"/>
+              </a:rPr>
+              <a:t>后端</a:t>
+            </a:r>
+            <a:endParaRPr lang="zh-CN" sz="2600" b="1" i="0">
+              <a:solidFill>
+                <a:srgbClr val="1F3864"/>
+              </a:solidFill>
+              <a:latin typeface="微软雅黑" panose="020B0503020204020204" charset="-122"/>
+              <a:ea typeface="微软雅黑" panose="020B0503020204020204" charset="-122"/>
+            </a:endParaRPr>
+          </a:p>
+        </p:txBody>
+      </p:sp>
+      <p:sp>
+        <p:nvSpPr>
+          <p:cNvPr id="6" name="Rectangle 5"/>
+          <p:cNvSpPr/>
+          <p:nvPr/>
+        </p:nvSpPr>
+        <p:spPr>
+          <a:xfrm>
+            <a:off x="521207" y="896112"/>
+            <a:ext cx="502920" cy="45720"/>
+          </a:xfrm>
+          <a:prstGeom prst="rect">
+            <a:avLst/>
+          </a:prstGeom>
+          <a:solidFill>
+            <a:srgbClr val="B8860B"/>
+          </a:solidFill>
+          <a:ln>
+            <a:noFill/>
+          </a:ln>
+          <a:effectLst/>
+        </p:spPr>
+        <p:style>
+          <a:lnRef idx="1">
+            <a:schemeClr val="accent1"/>
+          </a:lnRef>
+          <a:fillRef idx="3">
+            <a:schemeClr val="accent1"/>
+          </a:fillRef>
+          <a:effectRef idx="2">
+            <a:schemeClr val="accent1"/>
+          </a:effectRef>
+          <a:fontRef idx="minor">
+            <a:schemeClr val="lt1"/>
+          </a:fontRef>
+        </p:style>
+        <p:txBody>
+          <a:bodyPr rtlCol="0" anchor="ctr"/>
+          <a:lstStyle/>
+          <a:p>
+            <a:pPr algn="ctr"/>
+          </a:p>
+        </p:txBody>
+      </p:sp>
+      <p:sp>
+        <p:nvSpPr>
+          <p:cNvPr id="7" name="Rectangle 6"/>
+          <p:cNvSpPr/>
+          <p:nvPr/>
+        </p:nvSpPr>
+        <p:spPr>
+          <a:xfrm>
+            <a:off x="1078992" y="896112"/>
+            <a:ext cx="10607040" cy="13716"/>
+          </a:xfrm>
+          <a:prstGeom prst="rect">
+            <a:avLst/>
+          </a:prstGeom>
+          <a:solidFill>
+            <a:srgbClr val="2E75B6"/>
+          </a:solidFill>
+          <a:ln>
+            <a:noFill/>
+          </a:ln>
+          <a:effectLst/>
+        </p:spPr>
+        <p:style>
+          <a:lnRef idx="1">
+            <a:schemeClr val="accent1"/>
+          </a:lnRef>
+          <a:fillRef idx="3">
+            <a:schemeClr val="accent1"/>
+          </a:fillRef>
+          <a:effectRef idx="2">
+            <a:schemeClr val="accent1"/>
+          </a:effectRef>
+          <a:fontRef idx="minor">
+            <a:schemeClr val="lt1"/>
+          </a:fontRef>
+        </p:style>
+        <p:txBody>
+          <a:bodyPr rtlCol="0" anchor="ctr"/>
+          <a:lstStyle/>
+          <a:p>
+            <a:pPr algn="ctr"/>
+          </a:p>
+        </p:txBody>
+      </p:sp>
+      <p:sp>
+        <p:nvSpPr>
+          <p:cNvPr id="9" name="Rectangle 8"/>
+          <p:cNvSpPr/>
+          <p:nvPr/>
+        </p:nvSpPr>
+        <p:spPr>
+          <a:xfrm>
+            <a:off x="0" y="6565392"/>
+            <a:ext cx="12191695" cy="292608"/>
+          </a:xfrm>
+          <a:prstGeom prst="rect">
+            <a:avLst/>
+          </a:prstGeom>
+          <a:solidFill>
+            <a:srgbClr val="EEF4FB"/>
+          </a:solidFill>
+          <a:ln>
+            <a:noFill/>
+          </a:ln>
+          <a:effectLst/>
+        </p:spPr>
+        <p:style>
+          <a:lnRef idx="1">
+            <a:schemeClr val="accent1"/>
+          </a:lnRef>
+          <a:fillRef idx="3">
+            <a:schemeClr val="accent1"/>
+          </a:fillRef>
+          <a:effectRef idx="2">
+            <a:schemeClr val="accent1"/>
+          </a:effectRef>
+          <a:fontRef idx="minor">
+            <a:schemeClr val="lt1"/>
+          </a:fontRef>
+        </p:style>
+        <p:txBody>
+          <a:bodyPr rtlCol="0" anchor="ctr"/>
+          <a:lstStyle/>
+          <a:p>
+            <a:pPr algn="ctr"/>
+          </a:p>
+        </p:txBody>
+      </p:sp>
+      <p:sp>
+        <p:nvSpPr>
+          <p:cNvPr id="10" name="TextBox 9"/>
+          <p:cNvSpPr txBox="1"/>
+          <p:nvPr/>
+        </p:nvSpPr>
+        <p:spPr>
+          <a:xfrm>
+            <a:off x="502920" y="6592824"/>
+            <a:ext cx="7315200" cy="176530"/>
+          </a:xfrm>
+          <a:prstGeom prst="rect">
+            <a:avLst/>
+          </a:prstGeom>
+          <a:noFill/>
+        </p:spPr>
+        <p:txBody>
+          <a:bodyPr wrap="square" lIns="0" tIns="0" rIns="0" bIns="0" anchor="t">
+            <a:spAutoFit/>
+          </a:bodyPr>
+          <a:lstStyle/>
+          <a:p>
+            <a:pPr algn="l">
+              <a:lnSpc>
+                <a:spcPct val="115000"/>
+              </a:lnSpc>
+              <a:spcAft>
+                <a:spcPts val="400"/>
+              </a:spcAft>
+            </a:pPr>
+            <a:r>
+              <a:rPr sz="1000" b="0" i="0">
+                <a:solidFill>
+                  <a:srgbClr val="7F7F7F"/>
+                </a:solidFill>
+                <a:latin typeface="微软雅黑" panose="020B0503020204020204" charset="-122"/>
+                <a:ea typeface="微软雅黑" panose="020B0503020204020204" charset="-122"/>
+              </a:rPr>
+              <a:t>在线购物系统 · 第 1 次阶段性评审 · 项目组 9</a:t>
+            </a:r>
+            <a:endParaRPr sz="1000" b="0" i="0">
+              <a:solidFill>
+                <a:srgbClr val="7F7F7F"/>
+              </a:solidFill>
+              <a:latin typeface="微软雅黑" panose="020B0503020204020204" charset="-122"/>
+              <a:ea typeface="微软雅黑" panose="020B0503020204020204" charset="-122"/>
+            </a:endParaRPr>
+          </a:p>
+        </p:txBody>
+      </p:sp>
+      <p:sp>
+        <p:nvSpPr>
+          <p:cNvPr id="11" name="TextBox 10"/>
+          <p:cNvSpPr txBox="1"/>
+          <p:nvPr/>
+        </p:nvSpPr>
+        <p:spPr>
+          <a:xfrm>
+            <a:off x="11247120" y="6592824"/>
+            <a:ext cx="548640" cy="256032"/>
+          </a:xfrm>
+          <a:prstGeom prst="rect">
+            <a:avLst/>
+          </a:prstGeom>
+          <a:noFill/>
+        </p:spPr>
+        <p:txBody>
+          <a:bodyPr wrap="square" lIns="0" tIns="0" rIns="0" bIns="0" anchor="t">
+            <a:spAutoFit/>
+          </a:bodyPr>
+          <a:lstStyle/>
+          <a:p>
+            <a:pPr algn="r">
+              <a:lnSpc>
+                <a:spcPct val="115000"/>
+              </a:lnSpc>
+              <a:spcAft>
+                <a:spcPts val="400"/>
+              </a:spcAft>
+            </a:pPr>
+            <a:r>
+              <a:rPr sz="1000" b="1" i="0">
+                <a:solidFill>
+                  <a:srgbClr val="2E75B6"/>
+                </a:solidFill>
+                <a:latin typeface="微软雅黑" panose="020B0503020204020204" charset="-122"/>
+                <a:ea typeface="微软雅黑" panose="020B0503020204020204" charset="-122"/>
+              </a:rPr>
+              <a:t>10</a:t>
+            </a:r>
+            <a:endParaRPr sz="1000" b="1" i="0">
+              <a:solidFill>
+                <a:srgbClr val="2E75B6"/>
+              </a:solidFill>
+              <a:latin typeface="微软雅黑" panose="020B0503020204020204" charset="-122"/>
+              <a:ea typeface="微软雅黑" panose="020B0503020204020204" charset="-122"/>
+            </a:endParaRPr>
+          </a:p>
+        </p:txBody>
+      </p:sp>
+      <p:sp>
+        <p:nvSpPr>
+          <p:cNvPr id="12" name="Rounded Rectangle 11"/>
+          <p:cNvSpPr/>
+          <p:nvPr/>
+        </p:nvSpPr>
+        <p:spPr>
+          <a:xfrm>
+            <a:off x="10104120" y="320040"/>
+            <a:ext cx="1600200" cy="384048"/>
+          </a:xfrm>
+          <a:prstGeom prst="roundRect">
+            <a:avLst>
+              <a:gd name="adj" fmla="val 50000"/>
+            </a:avLst>
+          </a:prstGeom>
+          <a:solidFill>
+            <a:srgbClr val="DEEBF7"/>
+          </a:solidFill>
+          <a:ln>
+            <a:noFill/>
+          </a:ln>
+          <a:effectLst/>
+        </p:spPr>
+        <p:style>
+          <a:lnRef idx="1">
+            <a:schemeClr val="accent1"/>
+          </a:lnRef>
+          <a:fillRef idx="3">
+            <a:schemeClr val="accent1"/>
+          </a:fillRef>
+          <a:effectRef idx="2">
+            <a:schemeClr val="accent1"/>
+          </a:effectRef>
+          <a:fontRef idx="minor">
+            <a:schemeClr val="lt1"/>
+          </a:fontRef>
+        </p:style>
+        <p:txBody>
+          <a:bodyPr wrap="none" rtlCol="0" anchor="ctr"/>
+          <a:lstStyle/>
+          <a:p>
+            <a:pPr algn="ctr"/>
+            <a:r>
+              <a:rPr lang="zh-CN" sz="1100" b="1" i="0">
+                <a:solidFill>
+                  <a:srgbClr val="1F3864"/>
+                </a:solidFill>
+                <a:latin typeface="微软雅黑" panose="020B0503020204020204" charset="-122"/>
+                <a:ea typeface="微软雅黑" panose="020B0503020204020204" charset="-122"/>
+              </a:rPr>
+              <a:t>其他</a:t>
+            </a:r>
+            <a:r>
+              <a:rPr lang="zh-CN" sz="1100" b="1" i="0">
+                <a:solidFill>
+                  <a:srgbClr val="1F3864"/>
+                </a:solidFill>
+                <a:latin typeface="微软雅黑" panose="020B0503020204020204" charset="-122"/>
+                <a:ea typeface="微软雅黑" panose="020B0503020204020204" charset="-122"/>
+              </a:rPr>
+              <a:t>进展</a:t>
+            </a:r>
+            <a:endParaRPr lang="zh-CN" sz="1100" b="1" i="0">
+              <a:solidFill>
+                <a:srgbClr val="1F3864"/>
+              </a:solidFill>
+              <a:latin typeface="微软雅黑" panose="020B0503020204020204" charset="-122"/>
+              <a:ea typeface="微软雅黑" panose="020B0503020204020204" charset="-122"/>
+            </a:endParaRPr>
+          </a:p>
+        </p:txBody>
+      </p:sp>
+      <p:sp>
+        <p:nvSpPr>
+          <p:cNvPr id="49" name="椭圆 48"/>
+          <p:cNvSpPr/>
+          <p:nvPr/>
+        </p:nvSpPr>
+        <p:spPr>
+          <a:xfrm>
+            <a:off x="237490" y="2832100"/>
+            <a:ext cx="1581785" cy="953770"/>
+          </a:xfrm>
+          <a:prstGeom prst="ellipse">
+            <a:avLst/>
+          </a:prstGeom>
+          <a:solidFill>
+            <a:schemeClr val="accent3">
+              <a:lumMod val="60000"/>
+              <a:lumOff val="40000"/>
+            </a:schemeClr>
+          </a:solidFill>
+          <a:ln>
+            <a:solidFill>
+              <a:srgbClr val="92D050"/>
+            </a:solidFill>
+          </a:ln>
+        </p:spPr>
+        <p:style>
+          <a:lnRef idx="1">
+            <a:schemeClr val="accent1"/>
+          </a:lnRef>
+          <a:fillRef idx="3">
+            <a:schemeClr val="accent1"/>
+          </a:fillRef>
+          <a:effectRef idx="2">
+            <a:schemeClr val="accent1"/>
+          </a:effectRef>
+          <a:fontRef idx="minor">
+            <a:schemeClr val="lt1"/>
+          </a:fontRef>
+        </p:style>
+        <p:txBody>
+          <a:bodyPr/>
+          <a:p>
+            <a:endParaRPr lang="zh-CN" altLang="en-US"/>
+          </a:p>
+        </p:txBody>
+      </p:sp>
+      <p:sp>
+        <p:nvSpPr>
+          <p:cNvPr id="50" name="文本框 49"/>
+          <p:cNvSpPr txBox="1"/>
+          <p:nvPr/>
+        </p:nvSpPr>
+        <p:spPr>
+          <a:xfrm>
+            <a:off x="249555" y="3078480"/>
+            <a:ext cx="1600200" cy="460375"/>
+          </a:xfrm>
+          <a:prstGeom prst="rect">
+            <a:avLst/>
+          </a:prstGeom>
+          <a:noFill/>
+        </p:spPr>
+        <p:txBody>
+          <a:bodyPr wrap="square" rtlCol="0">
+            <a:spAutoFit/>
+          </a:bodyPr>
+          <a:p>
+            <a:r>
+              <a:rPr lang="en-US" altLang="zh-CN" sz="2400"/>
+              <a:t>service </a:t>
+            </a:r>
+            <a:r>
+              <a:rPr lang="zh-CN" altLang="en-US" sz="2400"/>
+              <a:t>层</a:t>
+            </a:r>
+            <a:endParaRPr lang="zh-CN" altLang="en-US" sz="2400"/>
+          </a:p>
+        </p:txBody>
+      </p:sp>
+      <p:sp>
+        <p:nvSpPr>
+          <p:cNvPr id="19" name="右大括号 18"/>
+          <p:cNvSpPr/>
+          <p:nvPr/>
+        </p:nvSpPr>
+        <p:spPr>
+          <a:xfrm rot="10800000">
+            <a:off x="1903095" y="2044065"/>
+            <a:ext cx="1144270" cy="2482850"/>
+          </a:xfrm>
+          <a:prstGeom prst="rightBrace">
+            <a:avLst>
+              <a:gd name="adj1" fmla="val 8333"/>
+              <a:gd name="adj2" fmla="val 50000"/>
+            </a:avLst>
+          </a:prstGeom>
+          <a:ln>
+            <a:solidFill>
+              <a:srgbClr val="92D050"/>
+            </a:solidFill>
+          </a:ln>
+        </p:spPr>
+        <p:style>
+          <a:lnRef idx="2">
+            <a:schemeClr val="accent1"/>
+          </a:lnRef>
+          <a:fillRef idx="0">
+            <a:schemeClr val="accent1"/>
+          </a:fillRef>
+          <a:effectRef idx="1">
+            <a:schemeClr val="accent1"/>
+          </a:effectRef>
+          <a:fontRef idx="minor">
+            <a:schemeClr val="tx1"/>
+          </a:fontRef>
+        </p:style>
+        <p:txBody>
+          <a:bodyPr/>
+          <a:p>
+            <a:endParaRPr lang="zh-CN" altLang="en-US"/>
+          </a:p>
+        </p:txBody>
+      </p:sp>
+      <p:sp>
+        <p:nvSpPr>
+          <p:cNvPr id="24" name="矩形 23"/>
+          <p:cNvSpPr/>
+          <p:nvPr/>
+        </p:nvSpPr>
+        <p:spPr>
+          <a:xfrm>
+            <a:off x="3320415" y="1938020"/>
+            <a:ext cx="2952750" cy="460375"/>
+          </a:xfrm>
+          <a:prstGeom prst="rect">
+            <a:avLst/>
+          </a:prstGeom>
+          <a:solidFill>
+            <a:schemeClr val="accent3">
+              <a:lumMod val="60000"/>
+              <a:lumOff val="40000"/>
+            </a:schemeClr>
+          </a:solidFill>
+          <a:ln>
+            <a:solidFill>
+              <a:srgbClr val="92D050"/>
+            </a:solidFill>
+          </a:ln>
+        </p:spPr>
+        <p:style>
+          <a:lnRef idx="1">
+            <a:schemeClr val="accent1"/>
+          </a:lnRef>
+          <a:fillRef idx="3">
+            <a:schemeClr val="accent1"/>
+          </a:fillRef>
+          <a:effectRef idx="2">
+            <a:schemeClr val="accent1"/>
+          </a:effectRef>
+          <a:fontRef idx="minor">
+            <a:schemeClr val="lt1"/>
+          </a:fontRef>
+        </p:style>
+        <p:txBody>
+          <a:bodyPr/>
+          <a:p>
+            <a:endParaRPr lang="zh-CN" altLang="en-US"/>
+          </a:p>
+        </p:txBody>
+      </p:sp>
+      <p:sp>
+        <p:nvSpPr>
+          <p:cNvPr id="20" name="文本框 19"/>
+          <p:cNvSpPr txBox="1"/>
+          <p:nvPr/>
+        </p:nvSpPr>
+        <p:spPr>
+          <a:xfrm>
+            <a:off x="3320415" y="1938020"/>
+            <a:ext cx="3735070" cy="460375"/>
+          </a:xfrm>
+          <a:prstGeom prst="rect">
+            <a:avLst/>
+          </a:prstGeom>
+          <a:noFill/>
+        </p:spPr>
+        <p:txBody>
+          <a:bodyPr wrap="square" rtlCol="0">
+            <a:spAutoFit/>
+          </a:bodyPr>
+          <a:p>
+            <a:r>
+              <a:rPr lang="en-US" altLang="zh-CN" sz="2400"/>
+              <a:t>FIFO </a:t>
+            </a:r>
+            <a:r>
+              <a:rPr lang="zh-CN" altLang="en-US" sz="2400"/>
+              <a:t>排队与交易冻结</a:t>
+            </a:r>
+            <a:endParaRPr lang="zh-CN" altLang="en-US" sz="2400"/>
+          </a:p>
+        </p:txBody>
+      </p:sp>
+      <p:sp>
+        <p:nvSpPr>
+          <p:cNvPr id="25" name="矩形 24"/>
+          <p:cNvSpPr/>
+          <p:nvPr/>
+        </p:nvSpPr>
+        <p:spPr>
+          <a:xfrm>
+            <a:off x="3267075" y="3012440"/>
+            <a:ext cx="2952750" cy="460375"/>
+          </a:xfrm>
+          <a:prstGeom prst="rect">
+            <a:avLst/>
+          </a:prstGeom>
+          <a:solidFill>
+            <a:schemeClr val="accent3">
+              <a:lumMod val="60000"/>
+              <a:lumOff val="40000"/>
+            </a:schemeClr>
+          </a:solidFill>
+          <a:ln>
+            <a:solidFill>
+              <a:srgbClr val="92D050"/>
+            </a:solidFill>
+          </a:ln>
+        </p:spPr>
+        <p:style>
+          <a:lnRef idx="1">
+            <a:schemeClr val="accent1"/>
+          </a:lnRef>
+          <a:fillRef idx="3">
+            <a:schemeClr val="accent1"/>
+          </a:fillRef>
+          <a:effectRef idx="2">
+            <a:schemeClr val="accent1"/>
+          </a:effectRef>
+          <a:fontRef idx="minor">
+            <a:schemeClr val="lt1"/>
+          </a:fontRef>
+        </p:style>
+        <p:txBody>
+          <a:bodyPr/>
+          <a:p>
+            <a:endParaRPr lang="zh-CN" altLang="en-US"/>
+          </a:p>
+        </p:txBody>
+      </p:sp>
+      <p:sp>
+        <p:nvSpPr>
+          <p:cNvPr id="21" name="文本框 20"/>
+          <p:cNvSpPr txBox="1"/>
+          <p:nvPr/>
+        </p:nvSpPr>
+        <p:spPr>
+          <a:xfrm>
+            <a:off x="3320415" y="3007360"/>
+            <a:ext cx="3069590" cy="460375"/>
+          </a:xfrm>
+          <a:prstGeom prst="rect">
+            <a:avLst/>
+          </a:prstGeom>
+          <a:noFill/>
+        </p:spPr>
+        <p:txBody>
+          <a:bodyPr wrap="square" rtlCol="0">
+            <a:spAutoFit/>
+          </a:bodyPr>
+          <a:p>
+            <a:r>
+              <a:rPr lang="zh-CN" altLang="en-US" sz="2400"/>
+              <a:t>失败后的自动递补</a:t>
+            </a:r>
+            <a:endParaRPr lang="zh-CN" altLang="en-US" sz="2400"/>
+          </a:p>
+        </p:txBody>
+      </p:sp>
+      <p:sp>
+        <p:nvSpPr>
+          <p:cNvPr id="26" name="矩形 25"/>
+          <p:cNvSpPr/>
+          <p:nvPr/>
+        </p:nvSpPr>
+        <p:spPr>
+          <a:xfrm>
+            <a:off x="3267075" y="4054475"/>
+            <a:ext cx="2952750" cy="460375"/>
+          </a:xfrm>
+          <a:prstGeom prst="rect">
+            <a:avLst/>
+          </a:prstGeom>
+          <a:solidFill>
+            <a:schemeClr val="accent3">
+              <a:lumMod val="60000"/>
+              <a:lumOff val="40000"/>
+            </a:schemeClr>
+          </a:solidFill>
+          <a:ln>
+            <a:solidFill>
+              <a:srgbClr val="92D050"/>
+            </a:solidFill>
+          </a:ln>
+        </p:spPr>
+        <p:style>
+          <a:lnRef idx="1">
+            <a:schemeClr val="accent1"/>
+          </a:lnRef>
+          <a:fillRef idx="3">
+            <a:schemeClr val="accent1"/>
+          </a:fillRef>
+          <a:effectRef idx="2">
+            <a:schemeClr val="accent1"/>
+          </a:effectRef>
+          <a:fontRef idx="minor">
+            <a:schemeClr val="lt1"/>
+          </a:fontRef>
+        </p:style>
+        <p:txBody>
+          <a:bodyPr/>
+          <a:p>
+            <a:endParaRPr lang="zh-CN" altLang="en-US"/>
+          </a:p>
+        </p:txBody>
+      </p:sp>
+      <p:sp>
+        <p:nvSpPr>
+          <p:cNvPr id="22" name="文本框 21"/>
+          <p:cNvSpPr txBox="1"/>
+          <p:nvPr/>
+        </p:nvSpPr>
+        <p:spPr>
+          <a:xfrm>
+            <a:off x="3267075" y="4086860"/>
+            <a:ext cx="3788410" cy="460375"/>
+          </a:xfrm>
+          <a:prstGeom prst="rect">
+            <a:avLst/>
+          </a:prstGeom>
+          <a:noFill/>
+        </p:spPr>
+        <p:txBody>
+          <a:bodyPr wrap="square" rtlCol="0">
+            <a:spAutoFit/>
+          </a:bodyPr>
+          <a:p>
+            <a:r>
+              <a:rPr lang="zh-CN" altLang="en-US" sz="2400"/>
+              <a:t>口令码全生命周期</a:t>
+            </a:r>
+            <a:endParaRPr lang="zh-CN" altLang="en-US" sz="2400"/>
+          </a:p>
+        </p:txBody>
+      </p:sp>
+      <p:sp>
+        <p:nvSpPr>
+          <p:cNvPr id="23" name="文本框 22"/>
+          <p:cNvSpPr txBox="1"/>
+          <p:nvPr/>
+        </p:nvSpPr>
+        <p:spPr>
+          <a:xfrm>
+            <a:off x="1849755" y="2611120"/>
+            <a:ext cx="744855" cy="645160"/>
+          </a:xfrm>
+          <a:prstGeom prst="rect">
+            <a:avLst/>
+          </a:prstGeom>
+          <a:noFill/>
+        </p:spPr>
+        <p:txBody>
+          <a:bodyPr wrap="square" rtlCol="0">
+            <a:spAutoFit/>
+          </a:bodyPr>
+          <a:p>
+            <a:r>
+              <a:rPr lang="zh-CN" altLang="en-US"/>
+              <a:t>三</a:t>
+            </a:r>
+            <a:r>
+              <a:rPr lang="zh-CN" altLang="en-US"/>
+              <a:t>个逻辑</a:t>
+            </a:r>
+            <a:endParaRPr lang="zh-CN" altLang="en-US"/>
+          </a:p>
+        </p:txBody>
+      </p:sp>
+      <p:sp>
+        <p:nvSpPr>
+          <p:cNvPr id="29" name="圆角矩形 28"/>
+          <p:cNvSpPr/>
+          <p:nvPr/>
+        </p:nvSpPr>
+        <p:spPr>
+          <a:xfrm>
+            <a:off x="6995795" y="2027555"/>
+            <a:ext cx="4690110" cy="784860"/>
+          </a:xfrm>
+          <a:prstGeom prst="roundRect">
+            <a:avLst/>
+          </a:prstGeom>
+          <a:solidFill>
+            <a:schemeClr val="accent1">
+              <a:lumMod val="20000"/>
+              <a:lumOff val="80000"/>
+            </a:schemeClr>
+          </a:solidFill>
+        </p:spPr>
+        <p:style>
+          <a:lnRef idx="1">
+            <a:schemeClr val="accent1"/>
+          </a:lnRef>
+          <a:fillRef idx="3">
+            <a:schemeClr val="accent1"/>
+          </a:fillRef>
+          <a:effectRef idx="2">
+            <a:schemeClr val="accent1"/>
+          </a:effectRef>
+          <a:fontRef idx="minor">
+            <a:schemeClr val="lt1"/>
+          </a:fontRef>
+        </p:style>
+        <p:txBody>
+          <a:bodyPr/>
+          <a:p>
+            <a:endParaRPr lang="zh-CN" altLang="en-US"/>
+          </a:p>
+        </p:txBody>
+      </p:sp>
+      <p:sp>
+        <p:nvSpPr>
+          <p:cNvPr id="27" name="文本框 26"/>
+          <p:cNvSpPr txBox="1"/>
+          <p:nvPr/>
+        </p:nvSpPr>
+        <p:spPr>
+          <a:xfrm>
+            <a:off x="7052945" y="2024380"/>
+            <a:ext cx="4719320" cy="829945"/>
+          </a:xfrm>
+          <a:prstGeom prst="rect">
+            <a:avLst/>
+          </a:prstGeom>
+          <a:noFill/>
+        </p:spPr>
+        <p:txBody>
+          <a:bodyPr wrap="square" rtlCol="0">
+            <a:spAutoFit/>
+          </a:bodyPr>
+          <a:p>
+            <a:r>
+              <a:rPr lang="zh-CN" altLang="en-US" sz="2400">
+                <a:solidFill>
+                  <a:srgbClr val="FF0000"/>
+                </a:solidFill>
+              </a:rPr>
+              <a:t>问题</a:t>
+            </a:r>
+            <a:r>
+              <a:rPr lang="zh-CN" altLang="en-US" sz="2400"/>
+              <a:t>：交易失败后口令码已失效、若沿用旧码买家就会"失联"</a:t>
+            </a:r>
+            <a:endParaRPr lang="zh-CN" altLang="en-US" sz="2400"/>
+          </a:p>
+        </p:txBody>
+      </p:sp>
+      <p:sp>
+        <p:nvSpPr>
+          <p:cNvPr id="30" name="圆角矩形 29"/>
+          <p:cNvSpPr/>
+          <p:nvPr/>
+        </p:nvSpPr>
+        <p:spPr>
+          <a:xfrm>
+            <a:off x="7058660" y="3444875"/>
+            <a:ext cx="4719955" cy="1123315"/>
+          </a:xfrm>
+          <a:prstGeom prst="roundRect">
+            <a:avLst/>
+          </a:prstGeom>
+          <a:solidFill>
+            <a:schemeClr val="accent1">
+              <a:lumMod val="20000"/>
+              <a:lumOff val="80000"/>
+            </a:schemeClr>
+          </a:solidFill>
+        </p:spPr>
+        <p:style>
+          <a:lnRef idx="1">
+            <a:schemeClr val="accent1"/>
+          </a:lnRef>
+          <a:fillRef idx="3">
+            <a:schemeClr val="accent1"/>
+          </a:fillRef>
+          <a:effectRef idx="2">
+            <a:schemeClr val="accent1"/>
+          </a:effectRef>
+          <a:fontRef idx="minor">
+            <a:schemeClr val="lt1"/>
+          </a:fontRef>
+        </p:style>
+        <p:txBody>
+          <a:bodyPr/>
+          <a:p>
+            <a:endParaRPr lang="zh-CN" altLang="en-US"/>
+          </a:p>
+        </p:txBody>
+      </p:sp>
+      <p:pic>
+        <p:nvPicPr>
+          <p:cNvPr id="37" name="图片 36"/>
+          <p:cNvPicPr>
+            <a:picLocks noChangeAspect="1"/>
+          </p:cNvPicPr>
+          <p:nvPr/>
+        </p:nvPicPr>
+        <p:blipFill>
+          <a:blip r:embed="rId1"/>
+          <a:stretch>
+            <a:fillRect/>
+          </a:stretch>
+        </p:blipFill>
+        <p:spPr>
+          <a:xfrm>
+            <a:off x="9819005" y="4375150"/>
+            <a:ext cx="2482850" cy="2482850"/>
+          </a:xfrm>
+          <a:prstGeom prst="rect">
+            <a:avLst/>
+          </a:prstGeom>
+        </p:spPr>
+      </p:pic>
+      <p:sp>
+        <p:nvSpPr>
+          <p:cNvPr id="28" name="文本框 27"/>
+          <p:cNvSpPr txBox="1"/>
+          <p:nvPr/>
+        </p:nvSpPr>
+        <p:spPr>
+          <a:xfrm>
+            <a:off x="7058660" y="3387090"/>
+            <a:ext cx="4996180" cy="1198880"/>
+          </a:xfrm>
+          <a:prstGeom prst="rect">
+            <a:avLst/>
+          </a:prstGeom>
+          <a:noFill/>
+        </p:spPr>
+        <p:txBody>
+          <a:bodyPr wrap="square" rtlCol="0">
+            <a:spAutoFit/>
+          </a:bodyPr>
+          <a:p>
+            <a:r>
+              <a:rPr lang="zh-CN" altLang="en-US" sz="2400"/>
+              <a:t>解决办法：重新排队时生成新口令码，并把它标注为待团队确认的需求细节</a:t>
+            </a:r>
+            <a:endParaRPr lang="zh-CN" altLang="en-US" sz="2400"/>
+          </a:p>
+        </p:txBody>
+      </p:sp>
+      <p:pic>
+        <p:nvPicPr>
+          <p:cNvPr id="38" name="图片 37"/>
+          <p:cNvPicPr>
+            <a:picLocks noChangeAspect="1"/>
+          </p:cNvPicPr>
+          <p:nvPr/>
+        </p:nvPicPr>
+        <p:blipFill>
+          <a:blip r:embed="rId2"/>
+          <a:stretch>
+            <a:fillRect/>
+          </a:stretch>
+        </p:blipFill>
+        <p:spPr>
+          <a:xfrm rot="16200000">
+            <a:off x="1604010" y="3055620"/>
+            <a:ext cx="2272030" cy="5480685"/>
+          </a:xfrm>
+          <a:prstGeom prst="rect">
+            <a:avLst/>
+          </a:prstGeom>
+        </p:spPr>
+      </p:pic>
+    </p:spTree>
+  </p:cSld>
+  <p:clrMapOvr>
+    <a:masterClrMapping/>
+  </p:clrMapOvr>
+</p:sld>
+</file>
+
+<file path=ppt/slides/slide27.xml><?xml version="1.0" encoding="utf-8"?>
+<p:sld xmlns:a="http://schemas.openxmlformats.org/drawingml/2006/main" xmlns:r="http://schemas.openxmlformats.org/officeDocument/2006/relationships" xmlns:p="http://schemas.openxmlformats.org/presentationml/2006/main">
+  <p:cSld>
+    <p:spTree>
+      <p:nvGrpSpPr>
+        <p:cNvPr id="1" name=""/>
+        <p:cNvGrpSpPr/>
+        <p:nvPr/>
+      </p:nvGrpSpPr>
+      <p:grpSpPr/>
+      <p:sp>
+        <p:nvSpPr>
+          <p:cNvPr id="2" name="Rectangle 1"/>
+          <p:cNvSpPr/>
+          <p:nvPr/>
+        </p:nvSpPr>
+        <p:spPr>
+          <a:xfrm>
+            <a:off x="0" y="0"/>
+            <a:ext cx="12191695" cy="6858000"/>
+          </a:xfrm>
+          <a:prstGeom prst="rect">
+            <a:avLst/>
+          </a:prstGeom>
+          <a:solidFill>
+            <a:srgbClr val="FFFFFF"/>
+          </a:solidFill>
+          <a:ln>
+            <a:noFill/>
+          </a:ln>
+          <a:effectLst/>
+        </p:spPr>
+        <p:style>
+          <a:lnRef idx="1">
+            <a:schemeClr val="accent1"/>
+          </a:lnRef>
+          <a:fillRef idx="3">
+            <a:schemeClr val="accent1"/>
+          </a:fillRef>
+          <a:effectRef idx="2">
+            <a:schemeClr val="accent1"/>
+          </a:effectRef>
+          <a:fontRef idx="minor">
+            <a:schemeClr val="lt1"/>
+          </a:fontRef>
+        </p:style>
+        <p:txBody>
+          <a:bodyPr rtlCol="0" anchor="ctr"/>
+          <a:lstStyle/>
+          <a:p>
+            <a:pPr algn="ctr"/>
+          </a:p>
+        </p:txBody>
+      </p:sp>
+      <p:sp>
+        <p:nvSpPr>
+          <p:cNvPr id="3" name="Rectangle 2"/>
+          <p:cNvSpPr/>
+          <p:nvPr/>
+        </p:nvSpPr>
+        <p:spPr>
+          <a:xfrm>
+            <a:off x="0" y="0"/>
+            <a:ext cx="12191695" cy="109728"/>
+          </a:xfrm>
+          <a:prstGeom prst="rect">
+            <a:avLst/>
+          </a:prstGeom>
+          <a:solidFill>
+            <a:srgbClr val="1F3864"/>
+          </a:solidFill>
+          <a:ln>
+            <a:noFill/>
+          </a:ln>
+          <a:effectLst/>
+        </p:spPr>
+        <p:style>
+          <a:lnRef idx="1">
+            <a:schemeClr val="accent1"/>
+          </a:lnRef>
+          <a:fillRef idx="3">
+            <a:schemeClr val="accent1"/>
+          </a:fillRef>
+          <a:effectRef idx="2">
+            <a:schemeClr val="accent1"/>
+          </a:effectRef>
+          <a:fontRef idx="minor">
+            <a:schemeClr val="lt1"/>
+          </a:fontRef>
+        </p:style>
+        <p:txBody>
+          <a:bodyPr rtlCol="0" anchor="ctr"/>
+          <a:lstStyle/>
+          <a:p>
+            <a:pPr algn="ctr"/>
+          </a:p>
+        </p:txBody>
+      </p:sp>
+      <p:sp>
+        <p:nvSpPr>
+          <p:cNvPr id="4" name="Rectangle 3"/>
+          <p:cNvSpPr/>
+          <p:nvPr/>
+        </p:nvSpPr>
+        <p:spPr>
+          <a:xfrm>
+            <a:off x="0" y="109728"/>
+            <a:ext cx="12191695" cy="27432"/>
+          </a:xfrm>
+          <a:prstGeom prst="rect">
+            <a:avLst/>
+          </a:prstGeom>
+          <a:solidFill>
+            <a:srgbClr val="B8860B"/>
+          </a:solidFill>
+          <a:ln>
+            <a:noFill/>
+          </a:ln>
+          <a:effectLst/>
+        </p:spPr>
+        <p:style>
+          <a:lnRef idx="1">
+            <a:schemeClr val="accent1"/>
+          </a:lnRef>
+          <a:fillRef idx="3">
+            <a:schemeClr val="accent1"/>
+          </a:fillRef>
+          <a:effectRef idx="2">
+            <a:schemeClr val="accent1"/>
+          </a:effectRef>
+          <a:fontRef idx="minor">
+            <a:schemeClr val="lt1"/>
+          </a:fontRef>
+        </p:style>
+        <p:txBody>
+          <a:bodyPr rtlCol="0" anchor="ctr"/>
+          <a:lstStyle/>
+          <a:p>
+            <a:pPr algn="ctr"/>
+          </a:p>
+        </p:txBody>
+      </p:sp>
+      <p:sp>
+        <p:nvSpPr>
+          <p:cNvPr id="5" name="TextBox 4"/>
+          <p:cNvSpPr txBox="1"/>
+          <p:nvPr/>
+        </p:nvSpPr>
+        <p:spPr>
+          <a:xfrm>
+            <a:off x="502920" y="292608"/>
+            <a:ext cx="9875520" cy="459740"/>
+          </a:xfrm>
+          <a:prstGeom prst="rect">
+            <a:avLst/>
+          </a:prstGeom>
+          <a:noFill/>
+        </p:spPr>
+        <p:txBody>
+          <a:bodyPr wrap="square" lIns="0" tIns="0" rIns="0" bIns="0" anchor="t">
+            <a:spAutoFit/>
+          </a:bodyPr>
+          <a:lstStyle/>
+          <a:p>
+            <a:pPr algn="l">
+              <a:lnSpc>
+                <a:spcPct val="115000"/>
+              </a:lnSpc>
+              <a:spcAft>
+                <a:spcPts val="400"/>
+              </a:spcAft>
+            </a:pPr>
+            <a:r>
+              <a:rPr lang="zh-CN" sz="2600" b="1" i="0">
+                <a:solidFill>
+                  <a:srgbClr val="1F3864"/>
+                </a:solidFill>
+                <a:latin typeface="微软雅黑" panose="020B0503020204020204" charset="-122"/>
+                <a:ea typeface="微软雅黑" panose="020B0503020204020204" charset="-122"/>
+              </a:rPr>
               <a:t>测试</a:t>
             </a:r>
             <a:endParaRPr lang="zh-CN" sz="2600" b="1" i="0">
@@ -21200,7 +25916,7 @@
 </p:sld>
 </file>
 
-<file path=ppt/slides/slide21.xml><?xml version="1.0" encoding="utf-8"?>
+<file path=ppt/slides/slide28.xml><?xml version="1.0" encoding="utf-8"?>
 <p:sld xmlns:a="http://schemas.openxmlformats.org/drawingml/2006/main" xmlns:r="http://schemas.openxmlformats.org/officeDocument/2006/relationships" xmlns:p="http://schemas.openxmlformats.org/presentationml/2006/main">
   <p:cSld>
     <p:spTree>

--- a/docs/第1次阶段性评审_第九组.pptx
+++ b/docs/第1次阶段性评审_第九组.pptx
@@ -53,15 +53,15 @@
       <p:regular r:id="rId39"/>
     </p:embeddedFont>
     <p:embeddedFont>
-      <p:font typeface="Calibri" panose="020F0502020204030204" charset="0"/>
+      <p:font typeface="黑体" panose="02010609060101010101" charset="-122"/>
       <p:regular r:id="rId40"/>
-      <p:bold r:id="rId41"/>
-      <p:italic r:id="rId42"/>
-      <p:boldItalic r:id="rId43"/>
     </p:embeddedFont>
     <p:embeddedFont>
-      <p:font typeface="黑体" panose="02010609060101010101" charset="-122"/>
-      <p:regular r:id="rId44"/>
+      <p:font typeface="Calibri" panose="020F0502020204030204" charset="0"/>
+      <p:regular r:id="rId41"/>
+      <p:bold r:id="rId42"/>
+      <p:italic r:id="rId43"/>
+      <p:boldItalic r:id="rId44"/>
     </p:embeddedFont>
     <p:embeddedFont>
       <p:font typeface="Impact" panose="020B0806030902050204" pitchFamily="34" charset="0"/>
@@ -25208,7 +25208,7 @@
         <p:spPr>
           <a:xfrm>
             <a:off x="685800" y="1554480"/>
-            <a:ext cx="3246120" cy="640080"/>
+            <a:ext cx="3246120" cy="530860"/>
           </a:xfrm>
           <a:prstGeom prst="rect">
             <a:avLst/>
@@ -25237,9 +25237,39 @@
                 <a:latin typeface="微软雅黑" panose="020B0503020204020204" charset="-122"/>
                 <a:ea typeface="微软雅黑" panose="020B0503020204020204" charset="-122"/>
               </a:rPr>
-              <a:t>111/113</a:t>
-            </a:r>
-            <a:endParaRPr sz="3000" b="1" i="0">
+              <a:t>11</a:t>
+            </a:r>
+            <a:r>
+              <a:rPr lang="en-US" sz="3000" b="1" i="0">
+                <a:solidFill>
+                  <a:srgbClr val="2E7D32"/>
+                </a:solidFill>
+                <a:latin typeface="微软雅黑" panose="020B0503020204020204" charset="-122"/>
+                <a:ea typeface="微软雅黑" panose="020B0503020204020204" charset="-122"/>
+              </a:rPr>
+              <a:t>5</a:t>
+            </a:r>
+            <a:r>
+              <a:rPr sz="3000" b="1" i="0">
+                <a:solidFill>
+                  <a:srgbClr val="2E7D32"/>
+                </a:solidFill>
+                <a:latin typeface="微软雅黑" panose="020B0503020204020204" charset="-122"/>
+                <a:ea typeface="微软雅黑" panose="020B0503020204020204" charset="-122"/>
+              </a:rPr>
+              <a:t>/11</a:t>
+            </a:r>
+            <a:r>
+              <a:rPr lang="en-US" sz="3000" b="1" i="0">
+                <a:solidFill>
+                  <a:srgbClr val="2E7D32"/>
+                </a:solidFill>
+                <a:latin typeface="微软雅黑" panose="020B0503020204020204" charset="-122"/>
+                <a:ea typeface="微软雅黑" panose="020B0503020204020204" charset="-122"/>
+              </a:rPr>
+              <a:t>7</a:t>
+            </a:r>
+            <a:endParaRPr lang="en-US" sz="3000" b="1" i="0">
               <a:solidFill>
                 <a:srgbClr val="2E7D32"/>
               </a:solidFill>
@@ -25316,7 +25346,7 @@
         <p:spPr>
           <a:xfrm>
             <a:off x="685800" y="2651760"/>
-            <a:ext cx="3246120" cy="365760"/>
+            <a:ext cx="3246120" cy="184785"/>
           </a:xfrm>
           <a:prstGeom prst="rect">
             <a:avLst/>
@@ -25345,7 +25375,27 @@
                 <a:latin typeface="微软雅黑" panose="020B0503020204020204" charset="-122"/>
                 <a:ea typeface="微软雅黑" panose="020B0503020204020204" charset="-122"/>
               </a:rPr>
-              <a:t>通过率 98.2%</a:t>
+              <a:t>通过率 98.</a:t>
+            </a:r>
+            <a:r>
+              <a:rPr lang="en-US" sz="1050" b="0" i="0">
+                <a:solidFill>
+                  <a:srgbClr val="404040"/>
+                </a:solidFill>
+                <a:latin typeface="微软雅黑" panose="020B0503020204020204" charset="-122"/>
+                <a:ea typeface="微软雅黑" panose="020B0503020204020204" charset="-122"/>
+              </a:rPr>
+              <a:t>3</a:t>
+            </a:r>
+            <a:r>
+              <a:rPr sz="1050" b="0" i="0">
+                <a:solidFill>
+                  <a:srgbClr val="404040"/>
+                </a:solidFill>
+                <a:latin typeface="微软雅黑" panose="020B0503020204020204" charset="-122"/>
+                <a:ea typeface="微软雅黑" panose="020B0503020204020204" charset="-122"/>
+              </a:rPr>
+              <a:t>%</a:t>
             </a:r>
             <a:endParaRPr sz="1050" b="0" i="0">
               <a:solidFill>
